--- a/Report/5주차.pptx
+++ b/Report/5주차.pptx
@@ -5,14 +5,18 @@
     <p:sldMasterId id="2147483648" r:id="rId1"/>
   </p:sldMasterIdLst>
   <p:notesMasterIdLst>
-    <p:notesMasterId r:id="rId7"/>
+    <p:notesMasterId r:id="rId11"/>
   </p:notesMasterIdLst>
   <p:sldIdLst>
     <p:sldId id="256" r:id="rId2"/>
     <p:sldId id="259" r:id="rId3"/>
     <p:sldId id="264" r:id="rId4"/>
     <p:sldId id="267" r:id="rId5"/>
-    <p:sldId id="258" r:id="rId6"/>
+    <p:sldId id="272" r:id="rId6"/>
+    <p:sldId id="270" r:id="rId7"/>
+    <p:sldId id="271" r:id="rId8"/>
+    <p:sldId id="269" r:id="rId9"/>
+    <p:sldId id="258" r:id="rId10"/>
   </p:sldIdLst>
   <p:sldSz cx="12192000" cy="6858000"/>
   <p:notesSz cx="12192000" cy="6858000"/>
@@ -122,7 +126,7 @@
           <a:p>
             <a:fld id="{12912881-8C8D-44A6-AE66-9F7D64B0003F}" type="datetimeFigureOut">
               <a:rPr lang="ko-KR" altLang="en-US" smtClean="0"/>
-              <a:t>2026-07-27</a:t>
+              <a:t>2026-07-29</a:t>
             </a:fld>
             <a:endParaRPr lang="ko-KR" altLang="en-US"/>
           </a:p>
@@ -601,448 +605,6 @@
           <a:bodyPr/>
           <a:lstStyle/>
           <a:p>
-            <a:pPr marL="742950" lvl="1" indent="-285750">
-              <a:lnSpc>
-                <a:spcPct val="150000"/>
-              </a:lnSpc>
-              <a:buFont typeface="Arial" panose="020B0604020202020204" pitchFamily="34" charset="0"/>
-              <a:buChar char="•"/>
-            </a:pPr>
-            <a:r>
-              <a:rPr lang="en-US" altLang="ko-KR" sz="1200" dirty="0">
-                <a:latin typeface="Malgun Gothic"/>
-                <a:cs typeface="Malgun Gothic"/>
-              </a:rPr>
-              <a:t>-- </a:t>
-            </a:r>
-            <a:r>
-              <a:rPr lang="en-US" altLang="ko-KR" sz="1200" dirty="0" err="1">
-                <a:latin typeface="Malgun Gothic"/>
-                <a:cs typeface="Malgun Gothic"/>
-              </a:rPr>
-              <a:t>VehicleCollision</a:t>
-            </a:r>
-            <a:r>
-              <a:rPr lang="en-US" altLang="ko-KR" sz="1200" dirty="0">
-                <a:latin typeface="Malgun Gothic"/>
-                <a:cs typeface="Malgun Gothic"/>
-              </a:rPr>
-              <a:t>::</a:t>
-            </a:r>
-            <a:r>
-              <a:rPr lang="en-US" altLang="ko-KR" sz="1200" dirty="0" err="1">
-                <a:latin typeface="Malgun Gothic"/>
-                <a:cs typeface="Malgun Gothic"/>
-              </a:rPr>
-              <a:t>IsColliding</a:t>
-            </a:r>
-            <a:r>
-              <a:rPr lang="en-US" altLang="ko-KR" sz="1200" dirty="0">
-                <a:latin typeface="Malgun Gothic"/>
-                <a:cs typeface="Malgun Gothic"/>
-              </a:rPr>
-              <a:t> benchmark --</a:t>
-            </a:r>
-          </a:p>
-          <a:p>
-            <a:pPr marL="742950" lvl="1" indent="-285750">
-              <a:lnSpc>
-                <a:spcPct val="150000"/>
-              </a:lnSpc>
-              <a:buFont typeface="Arial" panose="020B0604020202020204" pitchFamily="34" charset="0"/>
-              <a:buChar char="•"/>
-            </a:pPr>
-            <a:r>
-              <a:rPr lang="en-US" altLang="ko-KR" sz="1200" dirty="0">
-                <a:latin typeface="Malgun Gothic"/>
-                <a:cs typeface="Malgun Gothic"/>
-              </a:rPr>
-              <a:t>[bench] </a:t>
-            </a:r>
-            <a:r>
-              <a:rPr lang="en-US" altLang="ko-KR" sz="1200" dirty="0" err="1">
-                <a:latin typeface="Malgun Gothic"/>
-                <a:cs typeface="Malgun Gothic"/>
-              </a:rPr>
-              <a:t>IsColliding</a:t>
-            </a:r>
-            <a:r>
-              <a:rPr lang="en-US" altLang="ko-KR" sz="1200" dirty="0">
-                <a:latin typeface="Malgun Gothic"/>
-                <a:cs typeface="Malgun Gothic"/>
-              </a:rPr>
-              <a:t> obstacles=  1  iterations=2000000  total= 111.13ms  avg= 0.056us/call  hits=1953</a:t>
-            </a:r>
-          </a:p>
-          <a:p>
-            <a:pPr marL="742950" lvl="1" indent="-285750">
-              <a:lnSpc>
-                <a:spcPct val="150000"/>
-              </a:lnSpc>
-              <a:buFont typeface="Arial" panose="020B0604020202020204" pitchFamily="34" charset="0"/>
-              <a:buChar char="•"/>
-            </a:pPr>
-            <a:r>
-              <a:rPr lang="en-US" altLang="ko-KR" sz="1200" dirty="0">
-                <a:latin typeface="Malgun Gothic"/>
-                <a:cs typeface="Malgun Gothic"/>
-              </a:rPr>
-              <a:t>[bench] </a:t>
-            </a:r>
-            <a:r>
-              <a:rPr lang="en-US" altLang="ko-KR" sz="1200" dirty="0" err="1">
-                <a:latin typeface="Malgun Gothic"/>
-                <a:cs typeface="Malgun Gothic"/>
-              </a:rPr>
-              <a:t>IsColliding</a:t>
-            </a:r>
-            <a:r>
-              <a:rPr lang="en-US" altLang="ko-KR" sz="1200" dirty="0">
-                <a:latin typeface="Malgun Gothic"/>
-                <a:cs typeface="Malgun Gothic"/>
-              </a:rPr>
-              <a:t> obstacles=  6  iterations= 333333  total=  54.67ms  avg= 0.164us/call  hits=1901</a:t>
-            </a:r>
-          </a:p>
-          <a:p>
-            <a:pPr marL="742950" lvl="1" indent="-285750">
-              <a:lnSpc>
-                <a:spcPct val="150000"/>
-              </a:lnSpc>
-              <a:buFont typeface="Arial" panose="020B0604020202020204" pitchFamily="34" charset="0"/>
-              <a:buChar char="•"/>
-            </a:pPr>
-            <a:r>
-              <a:rPr lang="en-US" altLang="ko-KR" sz="1200" dirty="0">
-                <a:latin typeface="Malgun Gothic"/>
-                <a:cs typeface="Malgun Gothic"/>
-              </a:rPr>
-              <a:t>[bench] </a:t>
-            </a:r>
-            <a:r>
-              <a:rPr lang="en-US" altLang="ko-KR" sz="1200" dirty="0" err="1">
-                <a:latin typeface="Malgun Gothic"/>
-                <a:cs typeface="Malgun Gothic"/>
-              </a:rPr>
-              <a:t>IsColliding</a:t>
-            </a:r>
-            <a:r>
-              <a:rPr lang="en-US" altLang="ko-KR" sz="1200" dirty="0">
-                <a:latin typeface="Malgun Gothic"/>
-                <a:cs typeface="Malgun Gothic"/>
-              </a:rPr>
-              <a:t> obstacles= 20  iterations= 100000  total=  46.64ms  avg= 0.466us/call  hits=2027</a:t>
-            </a:r>
-          </a:p>
-          <a:p>
-            <a:pPr marL="742950" lvl="1" indent="-285750">
-              <a:lnSpc>
-                <a:spcPct val="150000"/>
-              </a:lnSpc>
-              <a:buFont typeface="Arial" panose="020B0604020202020204" pitchFamily="34" charset="0"/>
-              <a:buChar char="•"/>
-            </a:pPr>
-            <a:r>
-              <a:rPr lang="en-US" altLang="ko-KR" sz="1200" dirty="0">
-                <a:latin typeface="Malgun Gothic"/>
-                <a:cs typeface="Malgun Gothic"/>
-              </a:rPr>
-              <a:t>[bench] </a:t>
-            </a:r>
-            <a:r>
-              <a:rPr lang="en-US" altLang="ko-KR" sz="1200" dirty="0" err="1">
-                <a:latin typeface="Malgun Gothic"/>
-                <a:cs typeface="Malgun Gothic"/>
-              </a:rPr>
-              <a:t>IsColliding</a:t>
-            </a:r>
-            <a:r>
-              <a:rPr lang="en-US" altLang="ko-KR" sz="1200" dirty="0">
-                <a:latin typeface="Malgun Gothic"/>
-                <a:cs typeface="Malgun Gothic"/>
-              </a:rPr>
-              <a:t> obstacles= 50  iterations=  40000  total=  44.47ms  avg= 1.112us/call  hits=1999</a:t>
-            </a:r>
-          </a:p>
-          <a:p>
-            <a:pPr marL="742950" lvl="1" indent="-285750">
-              <a:lnSpc>
-                <a:spcPct val="150000"/>
-              </a:lnSpc>
-              <a:buFont typeface="Arial" panose="020B0604020202020204" pitchFamily="34" charset="0"/>
-              <a:buChar char="•"/>
-            </a:pPr>
-            <a:r>
-              <a:rPr lang="en-US" altLang="ko-KR" sz="1200" dirty="0">
-                <a:latin typeface="Malgun Gothic"/>
-                <a:cs typeface="Malgun Gothic"/>
-              </a:rPr>
-              <a:t>[bench] </a:t>
-            </a:r>
-            <a:r>
-              <a:rPr lang="en-US" altLang="ko-KR" sz="1200" dirty="0" err="1">
-                <a:latin typeface="Malgun Gothic"/>
-                <a:cs typeface="Malgun Gothic"/>
-              </a:rPr>
-              <a:t>IsColliding</a:t>
-            </a:r>
-            <a:r>
-              <a:rPr lang="en-US" altLang="ko-KR" sz="1200" dirty="0">
-                <a:latin typeface="Malgun Gothic"/>
-                <a:cs typeface="Malgun Gothic"/>
-              </a:rPr>
-              <a:t> obstacles=200  iterations=  10000  total=  42.02ms  avg= 4.202us/call  hits=1846</a:t>
-            </a:r>
-          </a:p>
-          <a:p>
-            <a:pPr marL="742950" lvl="1" indent="-285750">
-              <a:lnSpc>
-                <a:spcPct val="150000"/>
-              </a:lnSpc>
-              <a:buFont typeface="Arial" panose="020B0604020202020204" pitchFamily="34" charset="0"/>
-              <a:buChar char="•"/>
-            </a:pPr>
-            <a:r>
-              <a:rPr lang="en-US" altLang="ko-KR" sz="1200" dirty="0">
-                <a:latin typeface="Malgun Gothic"/>
-                <a:cs typeface="Malgun Gothic"/>
-              </a:rPr>
-              <a:t>[bench] </a:t>
-            </a:r>
-            <a:r>
-              <a:rPr lang="en-US" altLang="ko-KR" sz="1200" dirty="0" err="1">
-                <a:latin typeface="Malgun Gothic"/>
-                <a:cs typeface="Malgun Gothic"/>
-              </a:rPr>
-              <a:t>IsColliding</a:t>
-            </a:r>
-            <a:r>
-              <a:rPr lang="en-US" altLang="ko-KR" sz="1200" dirty="0">
-                <a:latin typeface="Malgun Gothic"/>
-                <a:cs typeface="Malgun Gothic"/>
-              </a:rPr>
-              <a:t> obstacles=500  iterations=   4000  total=  38.97ms  avg= 9.742us/call  hits=1576</a:t>
-            </a:r>
-          </a:p>
-          <a:p>
-            <a:pPr marL="742950" lvl="1" indent="-285750">
-              <a:lnSpc>
-                <a:spcPct val="150000"/>
-              </a:lnSpc>
-              <a:buFont typeface="Arial" panose="020B0604020202020204" pitchFamily="34" charset="0"/>
-              <a:buChar char="•"/>
-            </a:pPr>
-            <a:r>
-              <a:rPr lang="ko-KR" altLang="ko-KR" sz="1200" dirty="0" err="1"/>
-              <a:t>Bounding</a:t>
-            </a:r>
-            <a:r>
-              <a:rPr lang="ko-KR" altLang="ko-KR" sz="1200" dirty="0"/>
-              <a:t> </a:t>
-            </a:r>
-            <a:r>
-              <a:rPr lang="ko-KR" altLang="ko-KR" sz="1200" dirty="0" err="1"/>
-              <a:t>Circle</a:t>
-            </a:r>
-            <a:r>
-              <a:rPr lang="en-US" altLang="ko-KR" sz="1200" dirty="0"/>
-              <a:t> </a:t>
-            </a:r>
-            <a:r>
-              <a:rPr lang="ko-KR" altLang="en-US" sz="1200" dirty="0"/>
-              <a:t>우선 거르기</a:t>
-            </a:r>
-            <a:r>
-              <a:rPr lang="en-US" altLang="ko-KR" sz="1200" dirty="0"/>
-              <a:t>, </a:t>
-            </a:r>
-            <a:r>
-              <a:rPr lang="ko-KR" altLang="en-US" sz="1200" dirty="0"/>
-              <a:t>코드 최적화 후</a:t>
-            </a:r>
-            <a:endParaRPr lang="en-US" altLang="ko-KR" sz="1200" dirty="0"/>
-          </a:p>
-          <a:p>
-            <a:pPr marL="742950" lvl="1" indent="-285750">
-              <a:lnSpc>
-                <a:spcPct val="150000"/>
-              </a:lnSpc>
-              <a:buFont typeface="Arial" panose="020B0604020202020204" pitchFamily="34" charset="0"/>
-              <a:buChar char="•"/>
-            </a:pPr>
-            <a:r>
-              <a:rPr lang="en-US" altLang="ko-KR" sz="1200" dirty="0">
-                <a:latin typeface="Malgun Gothic"/>
-                <a:cs typeface="Malgun Gothic"/>
-              </a:rPr>
-              <a:t>[bench] </a:t>
-            </a:r>
-            <a:r>
-              <a:rPr lang="en-US" altLang="ko-KR" sz="1200" dirty="0" err="1">
-                <a:latin typeface="Malgun Gothic"/>
-                <a:cs typeface="Malgun Gothic"/>
-              </a:rPr>
-              <a:t>IsColliding</a:t>
-            </a:r>
-            <a:r>
-              <a:rPr lang="en-US" altLang="ko-KR" sz="1200" dirty="0">
-                <a:latin typeface="Malgun Gothic"/>
-                <a:cs typeface="Malgun Gothic"/>
-              </a:rPr>
-              <a:t> obstacles=  1  iterations=2000000  total=  74.19ms  avg= 0.037us/call  hits=1953</a:t>
-            </a:r>
-          </a:p>
-          <a:p>
-            <a:pPr marL="742950" lvl="1" indent="-285750">
-              <a:lnSpc>
-                <a:spcPct val="150000"/>
-              </a:lnSpc>
-              <a:buFont typeface="Arial" panose="020B0604020202020204" pitchFamily="34" charset="0"/>
-              <a:buChar char="•"/>
-            </a:pPr>
-            <a:r>
-              <a:rPr lang="en-US" altLang="ko-KR" sz="1200" dirty="0">
-                <a:latin typeface="Malgun Gothic"/>
-                <a:cs typeface="Malgun Gothic"/>
-              </a:rPr>
-              <a:t>[bench] </a:t>
-            </a:r>
-            <a:r>
-              <a:rPr lang="en-US" altLang="ko-KR" sz="1200" dirty="0" err="1">
-                <a:latin typeface="Malgun Gothic"/>
-                <a:cs typeface="Malgun Gothic"/>
-              </a:rPr>
-              <a:t>IsColliding</a:t>
-            </a:r>
-            <a:r>
-              <a:rPr lang="en-US" altLang="ko-KR" sz="1200" dirty="0">
-                <a:latin typeface="Malgun Gothic"/>
-                <a:cs typeface="Malgun Gothic"/>
-              </a:rPr>
-              <a:t> obstacles=  6  iterations= 333333  total=  18.95ms  avg= 0.057us/call  hits=1901</a:t>
-            </a:r>
-          </a:p>
-          <a:p>
-            <a:pPr marL="742950" lvl="1" indent="-285750">
-              <a:lnSpc>
-                <a:spcPct val="150000"/>
-              </a:lnSpc>
-              <a:buFont typeface="Arial" panose="020B0604020202020204" pitchFamily="34" charset="0"/>
-              <a:buChar char="•"/>
-            </a:pPr>
-            <a:r>
-              <a:rPr lang="en-US" altLang="ko-KR" sz="1200" dirty="0">
-                <a:latin typeface="Malgun Gothic"/>
-                <a:cs typeface="Malgun Gothic"/>
-              </a:rPr>
-              <a:t>[bench] </a:t>
-            </a:r>
-            <a:r>
-              <a:rPr lang="en-US" altLang="ko-KR" sz="1200" dirty="0" err="1">
-                <a:latin typeface="Malgun Gothic"/>
-                <a:cs typeface="Malgun Gothic"/>
-              </a:rPr>
-              <a:t>IsColliding</a:t>
-            </a:r>
-            <a:r>
-              <a:rPr lang="en-US" altLang="ko-KR" sz="1200" dirty="0">
-                <a:latin typeface="Malgun Gothic"/>
-                <a:cs typeface="Malgun Gothic"/>
-              </a:rPr>
-              <a:t> obstacles= 20  iterations= 100000  total=  10.30ms  avg= 0.103us/call  hits=2027</a:t>
-            </a:r>
-          </a:p>
-          <a:p>
-            <a:pPr marL="742950" lvl="1" indent="-285750">
-              <a:lnSpc>
-                <a:spcPct val="150000"/>
-              </a:lnSpc>
-              <a:buFont typeface="Arial" panose="020B0604020202020204" pitchFamily="34" charset="0"/>
-              <a:buChar char="•"/>
-            </a:pPr>
-            <a:r>
-              <a:rPr lang="en-US" altLang="ko-KR" sz="1200" dirty="0">
-                <a:latin typeface="Malgun Gothic"/>
-                <a:cs typeface="Malgun Gothic"/>
-              </a:rPr>
-              <a:t>[bench] </a:t>
-            </a:r>
-            <a:r>
-              <a:rPr lang="en-US" altLang="ko-KR" sz="1200" dirty="0" err="1">
-                <a:latin typeface="Malgun Gothic"/>
-                <a:cs typeface="Malgun Gothic"/>
-              </a:rPr>
-              <a:t>IsColliding</a:t>
-            </a:r>
-            <a:r>
-              <a:rPr lang="en-US" altLang="ko-KR" sz="1200" dirty="0">
-                <a:latin typeface="Malgun Gothic"/>
-                <a:cs typeface="Malgun Gothic"/>
-              </a:rPr>
-              <a:t> obstacles= 50  iterations=  40000  total=   8.07ms  avg= 0.202us/call  hits=1999</a:t>
-            </a:r>
-          </a:p>
-          <a:p>
-            <a:pPr marL="742950" lvl="1" indent="-285750">
-              <a:lnSpc>
-                <a:spcPct val="150000"/>
-              </a:lnSpc>
-              <a:buFont typeface="Arial" panose="020B0604020202020204" pitchFamily="34" charset="0"/>
-              <a:buChar char="•"/>
-            </a:pPr>
-            <a:r>
-              <a:rPr lang="en-US" altLang="ko-KR" sz="1200" dirty="0">
-                <a:latin typeface="Malgun Gothic"/>
-                <a:cs typeface="Malgun Gothic"/>
-              </a:rPr>
-              <a:t>[bench] </a:t>
-            </a:r>
-            <a:r>
-              <a:rPr lang="en-US" altLang="ko-KR" sz="1200" dirty="0" err="1">
-                <a:latin typeface="Malgun Gothic"/>
-                <a:cs typeface="Malgun Gothic"/>
-              </a:rPr>
-              <a:t>IsColliding</a:t>
-            </a:r>
-            <a:r>
-              <a:rPr lang="en-US" altLang="ko-KR" sz="1200" dirty="0">
-                <a:latin typeface="Malgun Gothic"/>
-                <a:cs typeface="Malgun Gothic"/>
-              </a:rPr>
-              <a:t> obstacles=200  iterations=  10000  total=   6.09ms  avg= 0.609us/call  hits=1846</a:t>
-            </a:r>
-          </a:p>
-          <a:p>
-            <a:pPr marL="742950" lvl="1" indent="-285750">
-              <a:lnSpc>
-                <a:spcPct val="150000"/>
-              </a:lnSpc>
-              <a:buFont typeface="Arial" panose="020B0604020202020204" pitchFamily="34" charset="0"/>
-              <a:buChar char="•"/>
-            </a:pPr>
-            <a:r>
-              <a:rPr lang="en-US" altLang="ko-KR" sz="1200" dirty="0">
-                <a:latin typeface="Malgun Gothic"/>
-                <a:cs typeface="Malgun Gothic"/>
-              </a:rPr>
-              <a:t>[bench] </a:t>
-            </a:r>
-            <a:r>
-              <a:rPr lang="en-US" altLang="ko-KR" sz="1200" dirty="0" err="1">
-                <a:latin typeface="Malgun Gothic"/>
-                <a:cs typeface="Malgun Gothic"/>
-              </a:rPr>
-              <a:t>IsColliding</a:t>
-            </a:r>
-            <a:r>
-              <a:rPr lang="en-US" altLang="ko-KR" sz="1200" dirty="0">
-                <a:latin typeface="Malgun Gothic"/>
-                <a:cs typeface="Malgun Gothic"/>
-              </a:rPr>
-              <a:t> obstacles=500  iterations=   4000  total=   5.30ms  avg= 1.325us/call  hits=1576</a:t>
-            </a:r>
-          </a:p>
-          <a:p>
             <a:endParaRPr lang="ko-KR" altLang="en-US" dirty="0"/>
           </a:p>
         </p:txBody>
@@ -1084,6 +646,880 @@
 </file>
 
 <file path=ppt/notesSlides/notesSlide4.xml><?xml version="1.0" encoding="utf-8"?>
+<p:notes xmlns:a="http://schemas.openxmlformats.org/drawingml/2006/main" xmlns:r="http://schemas.openxmlformats.org/officeDocument/2006/relationships" xmlns:p="http://schemas.openxmlformats.org/presentationml/2006/main">
+  <p:cSld>
+    <p:spTree>
+      <p:nvGrpSpPr>
+        <p:cNvPr id="1" name="">
+          <a:extLst>
+            <a:ext uri="{FF2B5EF4-FFF2-40B4-BE49-F238E27FC236}">
+              <a16:creationId xmlns:a16="http://schemas.microsoft.com/office/drawing/2014/main" id="{C327070F-428F-9090-2DB6-4519D1387C1B}"/>
+            </a:ext>
+          </a:extLst>
+        </p:cNvPr>
+        <p:cNvGrpSpPr/>
+        <p:nvPr/>
+      </p:nvGrpSpPr>
+      <p:grpSpPr>
+        <a:xfrm>
+          <a:off x="0" y="0"/>
+          <a:ext cx="0" cy="0"/>
+          <a:chOff x="0" y="0"/>
+          <a:chExt cx="0" cy="0"/>
+        </a:xfrm>
+      </p:grpSpPr>
+      <p:sp>
+        <p:nvSpPr>
+          <p:cNvPr id="2" name="슬라이드 이미지 개체 틀 1">
+            <a:extLst>
+              <a:ext uri="{FF2B5EF4-FFF2-40B4-BE49-F238E27FC236}">
+                <a16:creationId xmlns:a16="http://schemas.microsoft.com/office/drawing/2014/main" id="{20719B8D-C4E1-E322-FB90-219E293F1696}"/>
+              </a:ext>
+            </a:extLst>
+          </p:cNvPr>
+          <p:cNvSpPr>
+            <a:spLocks noGrp="1" noRot="1" noChangeAspect="1"/>
+          </p:cNvSpPr>
+          <p:nvPr>
+            <p:ph type="sldImg"/>
+          </p:nvPr>
+        </p:nvSpPr>
+        <p:spPr/>
+      </p:sp>
+      <p:sp>
+        <p:nvSpPr>
+          <p:cNvPr id="3" name="슬라이드 노트 개체 틀 2">
+            <a:extLst>
+              <a:ext uri="{FF2B5EF4-FFF2-40B4-BE49-F238E27FC236}">
+                <a16:creationId xmlns:a16="http://schemas.microsoft.com/office/drawing/2014/main" id="{F29C772C-662B-28A7-453D-163401586E8F}"/>
+              </a:ext>
+            </a:extLst>
+          </p:cNvPr>
+          <p:cNvSpPr>
+            <a:spLocks noGrp="1"/>
+          </p:cNvSpPr>
+          <p:nvPr>
+            <p:ph type="body" idx="1"/>
+          </p:nvPr>
+        </p:nvSpPr>
+        <p:spPr/>
+        <p:txBody>
+          <a:bodyPr/>
+          <a:lstStyle/>
+          <a:p>
+            <a:endParaRPr lang="ko-KR" altLang="en-US" dirty="0"/>
+          </a:p>
+        </p:txBody>
+      </p:sp>
+      <p:sp>
+        <p:nvSpPr>
+          <p:cNvPr id="4" name="슬라이드 번호 개체 틀 3">
+            <a:extLst>
+              <a:ext uri="{FF2B5EF4-FFF2-40B4-BE49-F238E27FC236}">
+                <a16:creationId xmlns:a16="http://schemas.microsoft.com/office/drawing/2014/main" id="{C32D1655-1C5B-AD08-92DF-2705F69E2973}"/>
+              </a:ext>
+            </a:extLst>
+          </p:cNvPr>
+          <p:cNvSpPr>
+            <a:spLocks noGrp="1"/>
+          </p:cNvSpPr>
+          <p:nvPr>
+            <p:ph type="sldNum" sz="quarter" idx="5"/>
+          </p:nvPr>
+        </p:nvSpPr>
+        <p:spPr/>
+        <p:txBody>
+          <a:bodyPr/>
+          <a:lstStyle/>
+          <a:p>
+            <a:fld id="{1840BF9F-FA8F-4CB1-839A-D4536A9CACB4}" type="slidenum">
+              <a:rPr lang="ko-KR" altLang="en-US" smtClean="0"/>
+              <a:t>5</a:t>
+            </a:fld>
+            <a:endParaRPr lang="ko-KR" altLang="en-US"/>
+          </a:p>
+        </p:txBody>
+      </p:sp>
+    </p:spTree>
+    <p:extLst>
+      <p:ext uri="{BB962C8B-B14F-4D97-AF65-F5344CB8AC3E}">
+        <p14:creationId xmlns:p14="http://schemas.microsoft.com/office/powerpoint/2010/main" val="693739339"/>
+      </p:ext>
+    </p:extLst>
+  </p:cSld>
+  <p:clrMapOvr>
+    <a:masterClrMapping/>
+  </p:clrMapOvr>
+</p:notes>
+</file>
+
+<file path=ppt/notesSlides/notesSlide5.xml><?xml version="1.0" encoding="utf-8"?>
+<p:notes xmlns:a="http://schemas.openxmlformats.org/drawingml/2006/main" xmlns:r="http://schemas.openxmlformats.org/officeDocument/2006/relationships" xmlns:p="http://schemas.openxmlformats.org/presentationml/2006/main">
+  <p:cSld>
+    <p:spTree>
+      <p:nvGrpSpPr>
+        <p:cNvPr id="1" name="">
+          <a:extLst>
+            <a:ext uri="{FF2B5EF4-FFF2-40B4-BE49-F238E27FC236}">
+              <a16:creationId xmlns:a16="http://schemas.microsoft.com/office/drawing/2014/main" id="{09BACBEB-A693-CDBC-2703-43CFFF67ACED}"/>
+            </a:ext>
+          </a:extLst>
+        </p:cNvPr>
+        <p:cNvGrpSpPr/>
+        <p:nvPr/>
+      </p:nvGrpSpPr>
+      <p:grpSpPr>
+        <a:xfrm>
+          <a:off x="0" y="0"/>
+          <a:ext cx="0" cy="0"/>
+          <a:chOff x="0" y="0"/>
+          <a:chExt cx="0" cy="0"/>
+        </a:xfrm>
+      </p:grpSpPr>
+      <p:sp>
+        <p:nvSpPr>
+          <p:cNvPr id="2" name="슬라이드 이미지 개체 틀 1">
+            <a:extLst>
+              <a:ext uri="{FF2B5EF4-FFF2-40B4-BE49-F238E27FC236}">
+                <a16:creationId xmlns:a16="http://schemas.microsoft.com/office/drawing/2014/main" id="{E9703CD5-1ECD-E4C3-C169-71EAE6688CC5}"/>
+              </a:ext>
+            </a:extLst>
+          </p:cNvPr>
+          <p:cNvSpPr>
+            <a:spLocks noGrp="1" noRot="1" noChangeAspect="1"/>
+          </p:cNvSpPr>
+          <p:nvPr>
+            <p:ph type="sldImg"/>
+          </p:nvPr>
+        </p:nvSpPr>
+        <p:spPr/>
+      </p:sp>
+      <p:sp>
+        <p:nvSpPr>
+          <p:cNvPr id="3" name="슬라이드 노트 개체 틀 2">
+            <a:extLst>
+              <a:ext uri="{FF2B5EF4-FFF2-40B4-BE49-F238E27FC236}">
+                <a16:creationId xmlns:a16="http://schemas.microsoft.com/office/drawing/2014/main" id="{6C081019-81F1-B1CE-969E-87ED18FE0D4B}"/>
+              </a:ext>
+            </a:extLst>
+          </p:cNvPr>
+          <p:cNvSpPr>
+            <a:spLocks noGrp="1"/>
+          </p:cNvSpPr>
+          <p:nvPr>
+            <p:ph type="body" idx="1"/>
+          </p:nvPr>
+        </p:nvSpPr>
+        <p:spPr/>
+        <p:txBody>
+          <a:bodyPr/>
+          <a:lstStyle/>
+          <a:p>
+            <a:endParaRPr lang="ko-KR" altLang="en-US" dirty="0"/>
+          </a:p>
+        </p:txBody>
+      </p:sp>
+      <p:sp>
+        <p:nvSpPr>
+          <p:cNvPr id="4" name="슬라이드 번호 개체 틀 3">
+            <a:extLst>
+              <a:ext uri="{FF2B5EF4-FFF2-40B4-BE49-F238E27FC236}">
+                <a16:creationId xmlns:a16="http://schemas.microsoft.com/office/drawing/2014/main" id="{35A2F7B1-10C8-D752-7CE3-C0C24FDC6C6E}"/>
+              </a:ext>
+            </a:extLst>
+          </p:cNvPr>
+          <p:cNvSpPr>
+            <a:spLocks noGrp="1"/>
+          </p:cNvSpPr>
+          <p:nvPr>
+            <p:ph type="sldNum" sz="quarter" idx="5"/>
+          </p:nvPr>
+        </p:nvSpPr>
+        <p:spPr/>
+        <p:txBody>
+          <a:bodyPr/>
+          <a:lstStyle/>
+          <a:p>
+            <a:fld id="{1840BF9F-FA8F-4CB1-839A-D4536A9CACB4}" type="slidenum">
+              <a:rPr lang="ko-KR" altLang="en-US" smtClean="0"/>
+              <a:t>6</a:t>
+            </a:fld>
+            <a:endParaRPr lang="ko-KR" altLang="en-US"/>
+          </a:p>
+        </p:txBody>
+      </p:sp>
+    </p:spTree>
+    <p:extLst>
+      <p:ext uri="{BB962C8B-B14F-4D97-AF65-F5344CB8AC3E}">
+        <p14:creationId xmlns:p14="http://schemas.microsoft.com/office/powerpoint/2010/main" val="3893468722"/>
+      </p:ext>
+    </p:extLst>
+  </p:cSld>
+  <p:clrMapOvr>
+    <a:masterClrMapping/>
+  </p:clrMapOvr>
+</p:notes>
+</file>
+
+<file path=ppt/notesSlides/notesSlide6.xml><?xml version="1.0" encoding="utf-8"?>
+<p:notes xmlns:a="http://schemas.openxmlformats.org/drawingml/2006/main" xmlns:r="http://schemas.openxmlformats.org/officeDocument/2006/relationships" xmlns:p="http://schemas.openxmlformats.org/presentationml/2006/main">
+  <p:cSld>
+    <p:spTree>
+      <p:nvGrpSpPr>
+        <p:cNvPr id="1" name="">
+          <a:extLst>
+            <a:ext uri="{FF2B5EF4-FFF2-40B4-BE49-F238E27FC236}">
+              <a16:creationId xmlns:a16="http://schemas.microsoft.com/office/drawing/2014/main" id="{69A00E51-36D4-51C0-A9F2-507BC3DB7EDC}"/>
+            </a:ext>
+          </a:extLst>
+        </p:cNvPr>
+        <p:cNvGrpSpPr/>
+        <p:nvPr/>
+      </p:nvGrpSpPr>
+      <p:grpSpPr>
+        <a:xfrm>
+          <a:off x="0" y="0"/>
+          <a:ext cx="0" cy="0"/>
+          <a:chOff x="0" y="0"/>
+          <a:chExt cx="0" cy="0"/>
+        </a:xfrm>
+      </p:grpSpPr>
+      <p:sp>
+        <p:nvSpPr>
+          <p:cNvPr id="2" name="슬라이드 이미지 개체 틀 1">
+            <a:extLst>
+              <a:ext uri="{FF2B5EF4-FFF2-40B4-BE49-F238E27FC236}">
+                <a16:creationId xmlns:a16="http://schemas.microsoft.com/office/drawing/2014/main" id="{E3075FFA-754B-624D-A4E7-539E86FE89BB}"/>
+              </a:ext>
+            </a:extLst>
+          </p:cNvPr>
+          <p:cNvSpPr>
+            <a:spLocks noGrp="1" noRot="1" noChangeAspect="1"/>
+          </p:cNvSpPr>
+          <p:nvPr>
+            <p:ph type="sldImg"/>
+          </p:nvPr>
+        </p:nvSpPr>
+        <p:spPr/>
+      </p:sp>
+      <p:sp>
+        <p:nvSpPr>
+          <p:cNvPr id="3" name="슬라이드 노트 개체 틀 2">
+            <a:extLst>
+              <a:ext uri="{FF2B5EF4-FFF2-40B4-BE49-F238E27FC236}">
+                <a16:creationId xmlns:a16="http://schemas.microsoft.com/office/drawing/2014/main" id="{5A55EABF-1646-5B9E-0777-B9022ABE67DE}"/>
+              </a:ext>
+            </a:extLst>
+          </p:cNvPr>
+          <p:cNvSpPr>
+            <a:spLocks noGrp="1"/>
+          </p:cNvSpPr>
+          <p:nvPr>
+            <p:ph type="body" idx="1"/>
+          </p:nvPr>
+        </p:nvSpPr>
+        <p:spPr/>
+        <p:txBody>
+          <a:bodyPr/>
+          <a:lstStyle/>
+          <a:p>
+            <a:endParaRPr lang="ko-KR" altLang="en-US" dirty="0"/>
+          </a:p>
+        </p:txBody>
+      </p:sp>
+      <p:sp>
+        <p:nvSpPr>
+          <p:cNvPr id="4" name="슬라이드 번호 개체 틀 3">
+            <a:extLst>
+              <a:ext uri="{FF2B5EF4-FFF2-40B4-BE49-F238E27FC236}">
+                <a16:creationId xmlns:a16="http://schemas.microsoft.com/office/drawing/2014/main" id="{3E84FDA4-ECB9-8679-88F2-8E288F61EB91}"/>
+              </a:ext>
+            </a:extLst>
+          </p:cNvPr>
+          <p:cNvSpPr>
+            <a:spLocks noGrp="1"/>
+          </p:cNvSpPr>
+          <p:nvPr>
+            <p:ph type="sldNum" sz="quarter" idx="5"/>
+          </p:nvPr>
+        </p:nvSpPr>
+        <p:spPr/>
+        <p:txBody>
+          <a:bodyPr/>
+          <a:lstStyle/>
+          <a:p>
+            <a:fld id="{1840BF9F-FA8F-4CB1-839A-D4536A9CACB4}" type="slidenum">
+              <a:rPr lang="ko-KR" altLang="en-US" smtClean="0"/>
+              <a:t>7</a:t>
+            </a:fld>
+            <a:endParaRPr lang="ko-KR" altLang="en-US"/>
+          </a:p>
+        </p:txBody>
+      </p:sp>
+    </p:spTree>
+    <p:extLst>
+      <p:ext uri="{BB962C8B-B14F-4D97-AF65-F5344CB8AC3E}">
+        <p14:creationId xmlns:p14="http://schemas.microsoft.com/office/powerpoint/2010/main" val="2738507105"/>
+      </p:ext>
+    </p:extLst>
+  </p:cSld>
+  <p:clrMapOvr>
+    <a:masterClrMapping/>
+  </p:clrMapOvr>
+</p:notes>
+</file>
+
+<file path=ppt/notesSlides/notesSlide7.xml><?xml version="1.0" encoding="utf-8"?>
+<p:notes xmlns:a="http://schemas.openxmlformats.org/drawingml/2006/main" xmlns:r="http://schemas.openxmlformats.org/officeDocument/2006/relationships" xmlns:p="http://schemas.openxmlformats.org/presentationml/2006/main">
+  <p:cSld>
+    <p:spTree>
+      <p:nvGrpSpPr>
+        <p:cNvPr id="1" name="">
+          <a:extLst>
+            <a:ext uri="{FF2B5EF4-FFF2-40B4-BE49-F238E27FC236}">
+              <a16:creationId xmlns:a16="http://schemas.microsoft.com/office/drawing/2014/main" id="{89DC016F-66A7-7119-FABC-8CDF93586984}"/>
+            </a:ext>
+          </a:extLst>
+        </p:cNvPr>
+        <p:cNvGrpSpPr/>
+        <p:nvPr/>
+      </p:nvGrpSpPr>
+      <p:grpSpPr>
+        <a:xfrm>
+          <a:off x="0" y="0"/>
+          <a:ext cx="0" cy="0"/>
+          <a:chOff x="0" y="0"/>
+          <a:chExt cx="0" cy="0"/>
+        </a:xfrm>
+      </p:grpSpPr>
+      <p:sp>
+        <p:nvSpPr>
+          <p:cNvPr id="2" name="슬라이드 이미지 개체 틀 1">
+            <a:extLst>
+              <a:ext uri="{FF2B5EF4-FFF2-40B4-BE49-F238E27FC236}">
+                <a16:creationId xmlns:a16="http://schemas.microsoft.com/office/drawing/2014/main" id="{84DACE20-3A5F-725F-0DA7-126F3A4718E0}"/>
+              </a:ext>
+            </a:extLst>
+          </p:cNvPr>
+          <p:cNvSpPr>
+            <a:spLocks noGrp="1" noRot="1" noChangeAspect="1"/>
+          </p:cNvSpPr>
+          <p:nvPr>
+            <p:ph type="sldImg"/>
+          </p:nvPr>
+        </p:nvSpPr>
+        <p:spPr/>
+      </p:sp>
+      <p:sp>
+        <p:nvSpPr>
+          <p:cNvPr id="3" name="슬라이드 노트 개체 틀 2">
+            <a:extLst>
+              <a:ext uri="{FF2B5EF4-FFF2-40B4-BE49-F238E27FC236}">
+                <a16:creationId xmlns:a16="http://schemas.microsoft.com/office/drawing/2014/main" id="{7A7FBF67-88C2-2591-B757-96C9A27C84BA}"/>
+              </a:ext>
+            </a:extLst>
+          </p:cNvPr>
+          <p:cNvSpPr>
+            <a:spLocks noGrp="1"/>
+          </p:cNvSpPr>
+          <p:nvPr>
+            <p:ph type="body" idx="1"/>
+          </p:nvPr>
+        </p:nvSpPr>
+        <p:spPr/>
+        <p:txBody>
+          <a:bodyPr/>
+          <a:lstStyle/>
+          <a:p>
+            <a:pPr marL="742950" lvl="1" indent="-285750">
+              <a:lnSpc>
+                <a:spcPct val="150000"/>
+              </a:lnSpc>
+              <a:buFont typeface="Arial" panose="020B0604020202020204" pitchFamily="34" charset="0"/>
+              <a:buChar char="•"/>
+            </a:pPr>
+            <a:r>
+              <a:rPr lang="en-US" altLang="ko-KR" sz="1200" dirty="0">
+                <a:latin typeface="Malgun Gothic"/>
+                <a:cs typeface="Malgun Gothic"/>
+              </a:rPr>
+              <a:t>-- </a:t>
+            </a:r>
+            <a:r>
+              <a:rPr lang="en-US" altLang="ko-KR" sz="1200" dirty="0" err="1">
+                <a:latin typeface="Malgun Gothic"/>
+                <a:cs typeface="Malgun Gothic"/>
+              </a:rPr>
+              <a:t>VehicleCollision</a:t>
+            </a:r>
+            <a:r>
+              <a:rPr lang="en-US" altLang="ko-KR" sz="1200" dirty="0">
+                <a:latin typeface="Malgun Gothic"/>
+                <a:cs typeface="Malgun Gothic"/>
+              </a:rPr>
+              <a:t>::</a:t>
+            </a:r>
+            <a:r>
+              <a:rPr lang="en-US" altLang="ko-KR" sz="1200" dirty="0" err="1">
+                <a:latin typeface="Malgun Gothic"/>
+                <a:cs typeface="Malgun Gothic"/>
+              </a:rPr>
+              <a:t>IsColliding</a:t>
+            </a:r>
+            <a:r>
+              <a:rPr lang="en-US" altLang="ko-KR" sz="1200" dirty="0">
+                <a:latin typeface="Malgun Gothic"/>
+                <a:cs typeface="Malgun Gothic"/>
+              </a:rPr>
+              <a:t> benchmark --</a:t>
+            </a:r>
+          </a:p>
+          <a:p>
+            <a:pPr marL="742950" lvl="1" indent="-285750">
+              <a:lnSpc>
+                <a:spcPct val="150000"/>
+              </a:lnSpc>
+              <a:buFont typeface="Arial" panose="020B0604020202020204" pitchFamily="34" charset="0"/>
+              <a:buChar char="•"/>
+            </a:pPr>
+            <a:r>
+              <a:rPr lang="en-US" altLang="ko-KR" sz="1200" dirty="0">
+                <a:latin typeface="Malgun Gothic"/>
+                <a:cs typeface="Malgun Gothic"/>
+              </a:rPr>
+              <a:t>[bench] </a:t>
+            </a:r>
+            <a:r>
+              <a:rPr lang="en-US" altLang="ko-KR" sz="1200" dirty="0" err="1">
+                <a:latin typeface="Malgun Gothic"/>
+                <a:cs typeface="Malgun Gothic"/>
+              </a:rPr>
+              <a:t>IsColliding</a:t>
+            </a:r>
+            <a:r>
+              <a:rPr lang="en-US" altLang="ko-KR" sz="1200" dirty="0">
+                <a:latin typeface="Malgun Gothic"/>
+                <a:cs typeface="Malgun Gothic"/>
+              </a:rPr>
+              <a:t> obstacles=  1  iterations=2000000  total= 111.13ms  avg= 0.056us/call  hits=1953</a:t>
+            </a:r>
+          </a:p>
+          <a:p>
+            <a:pPr marL="742950" lvl="1" indent="-285750">
+              <a:lnSpc>
+                <a:spcPct val="150000"/>
+              </a:lnSpc>
+              <a:buFont typeface="Arial" panose="020B0604020202020204" pitchFamily="34" charset="0"/>
+              <a:buChar char="•"/>
+            </a:pPr>
+            <a:r>
+              <a:rPr lang="en-US" altLang="ko-KR" sz="1200" dirty="0">
+                <a:latin typeface="Malgun Gothic"/>
+                <a:cs typeface="Malgun Gothic"/>
+              </a:rPr>
+              <a:t>[bench] </a:t>
+            </a:r>
+            <a:r>
+              <a:rPr lang="en-US" altLang="ko-KR" sz="1200" dirty="0" err="1">
+                <a:latin typeface="Malgun Gothic"/>
+                <a:cs typeface="Malgun Gothic"/>
+              </a:rPr>
+              <a:t>IsColliding</a:t>
+            </a:r>
+            <a:r>
+              <a:rPr lang="en-US" altLang="ko-KR" sz="1200" dirty="0">
+                <a:latin typeface="Malgun Gothic"/>
+                <a:cs typeface="Malgun Gothic"/>
+              </a:rPr>
+              <a:t> obstacles=  6  iterations= 333333  total=  54.67ms  avg= 0.164us/call  hits=1901</a:t>
+            </a:r>
+          </a:p>
+          <a:p>
+            <a:pPr marL="742950" lvl="1" indent="-285750">
+              <a:lnSpc>
+                <a:spcPct val="150000"/>
+              </a:lnSpc>
+              <a:buFont typeface="Arial" panose="020B0604020202020204" pitchFamily="34" charset="0"/>
+              <a:buChar char="•"/>
+            </a:pPr>
+            <a:r>
+              <a:rPr lang="en-US" altLang="ko-KR" sz="1200" dirty="0">
+                <a:latin typeface="Malgun Gothic"/>
+                <a:cs typeface="Malgun Gothic"/>
+              </a:rPr>
+              <a:t>[bench] </a:t>
+            </a:r>
+            <a:r>
+              <a:rPr lang="en-US" altLang="ko-KR" sz="1200" dirty="0" err="1">
+                <a:latin typeface="Malgun Gothic"/>
+                <a:cs typeface="Malgun Gothic"/>
+              </a:rPr>
+              <a:t>IsColliding</a:t>
+            </a:r>
+            <a:r>
+              <a:rPr lang="en-US" altLang="ko-KR" sz="1200" dirty="0">
+                <a:latin typeface="Malgun Gothic"/>
+                <a:cs typeface="Malgun Gothic"/>
+              </a:rPr>
+              <a:t> obstacles= 20  iterations= 100000  total=  46.64ms  avg= 0.466us/call  hits=2027</a:t>
+            </a:r>
+          </a:p>
+          <a:p>
+            <a:pPr marL="742950" lvl="1" indent="-285750">
+              <a:lnSpc>
+                <a:spcPct val="150000"/>
+              </a:lnSpc>
+              <a:buFont typeface="Arial" panose="020B0604020202020204" pitchFamily="34" charset="0"/>
+              <a:buChar char="•"/>
+            </a:pPr>
+            <a:r>
+              <a:rPr lang="en-US" altLang="ko-KR" sz="1200" dirty="0">
+                <a:latin typeface="Malgun Gothic"/>
+                <a:cs typeface="Malgun Gothic"/>
+              </a:rPr>
+              <a:t>[bench] </a:t>
+            </a:r>
+            <a:r>
+              <a:rPr lang="en-US" altLang="ko-KR" sz="1200" dirty="0" err="1">
+                <a:latin typeface="Malgun Gothic"/>
+                <a:cs typeface="Malgun Gothic"/>
+              </a:rPr>
+              <a:t>IsColliding</a:t>
+            </a:r>
+            <a:r>
+              <a:rPr lang="en-US" altLang="ko-KR" sz="1200" dirty="0">
+                <a:latin typeface="Malgun Gothic"/>
+                <a:cs typeface="Malgun Gothic"/>
+              </a:rPr>
+              <a:t> obstacles= 50  iterations=  40000  total=  44.47ms  avg= 1.112us/call  hits=1999</a:t>
+            </a:r>
+          </a:p>
+          <a:p>
+            <a:pPr marL="742950" lvl="1" indent="-285750">
+              <a:lnSpc>
+                <a:spcPct val="150000"/>
+              </a:lnSpc>
+              <a:buFont typeface="Arial" panose="020B0604020202020204" pitchFamily="34" charset="0"/>
+              <a:buChar char="•"/>
+            </a:pPr>
+            <a:r>
+              <a:rPr lang="en-US" altLang="ko-KR" sz="1200" dirty="0">
+                <a:latin typeface="Malgun Gothic"/>
+                <a:cs typeface="Malgun Gothic"/>
+              </a:rPr>
+              <a:t>[bench] </a:t>
+            </a:r>
+            <a:r>
+              <a:rPr lang="en-US" altLang="ko-KR" sz="1200" dirty="0" err="1">
+                <a:latin typeface="Malgun Gothic"/>
+                <a:cs typeface="Malgun Gothic"/>
+              </a:rPr>
+              <a:t>IsColliding</a:t>
+            </a:r>
+            <a:r>
+              <a:rPr lang="en-US" altLang="ko-KR" sz="1200" dirty="0">
+                <a:latin typeface="Malgun Gothic"/>
+                <a:cs typeface="Malgun Gothic"/>
+              </a:rPr>
+              <a:t> obstacles=200  iterations=  10000  total=  42.02ms  avg= 4.202us/call  hits=1846</a:t>
+            </a:r>
+          </a:p>
+          <a:p>
+            <a:pPr marL="742950" lvl="1" indent="-285750">
+              <a:lnSpc>
+                <a:spcPct val="150000"/>
+              </a:lnSpc>
+              <a:buFont typeface="Arial" panose="020B0604020202020204" pitchFamily="34" charset="0"/>
+              <a:buChar char="•"/>
+            </a:pPr>
+            <a:r>
+              <a:rPr lang="en-US" altLang="ko-KR" sz="1200" dirty="0">
+                <a:latin typeface="Malgun Gothic"/>
+                <a:cs typeface="Malgun Gothic"/>
+              </a:rPr>
+              <a:t>[bench] </a:t>
+            </a:r>
+            <a:r>
+              <a:rPr lang="en-US" altLang="ko-KR" sz="1200" dirty="0" err="1">
+                <a:latin typeface="Malgun Gothic"/>
+                <a:cs typeface="Malgun Gothic"/>
+              </a:rPr>
+              <a:t>IsColliding</a:t>
+            </a:r>
+            <a:r>
+              <a:rPr lang="en-US" altLang="ko-KR" sz="1200" dirty="0">
+                <a:latin typeface="Malgun Gothic"/>
+                <a:cs typeface="Malgun Gothic"/>
+              </a:rPr>
+              <a:t> obstacles=500  iterations=   4000  total=  38.97ms  avg= 9.742us/call  hits=1576</a:t>
+            </a:r>
+          </a:p>
+          <a:p>
+            <a:pPr marL="742950" lvl="1" indent="-285750">
+              <a:lnSpc>
+                <a:spcPct val="150000"/>
+              </a:lnSpc>
+              <a:buFont typeface="Arial" panose="020B0604020202020204" pitchFamily="34" charset="0"/>
+              <a:buChar char="•"/>
+            </a:pPr>
+            <a:r>
+              <a:rPr lang="ko-KR" altLang="ko-KR" sz="1200" dirty="0" err="1"/>
+              <a:t>Bounding</a:t>
+            </a:r>
+            <a:r>
+              <a:rPr lang="ko-KR" altLang="ko-KR" sz="1200" dirty="0"/>
+              <a:t> </a:t>
+            </a:r>
+            <a:r>
+              <a:rPr lang="ko-KR" altLang="ko-KR" sz="1200" dirty="0" err="1"/>
+              <a:t>Circle</a:t>
+            </a:r>
+            <a:r>
+              <a:rPr lang="en-US" altLang="ko-KR" sz="1200" dirty="0"/>
+              <a:t> </a:t>
+            </a:r>
+            <a:r>
+              <a:rPr lang="ko-KR" altLang="en-US" sz="1200" dirty="0"/>
+              <a:t>우선 거르기</a:t>
+            </a:r>
+            <a:r>
+              <a:rPr lang="en-US" altLang="ko-KR" sz="1200" dirty="0"/>
+              <a:t>, </a:t>
+            </a:r>
+            <a:r>
+              <a:rPr lang="ko-KR" altLang="en-US" sz="1200" dirty="0"/>
+              <a:t>코드 최적화 후</a:t>
+            </a:r>
+            <a:endParaRPr lang="en-US" altLang="ko-KR" sz="1200" dirty="0"/>
+          </a:p>
+          <a:p>
+            <a:pPr marL="742950" lvl="1" indent="-285750">
+              <a:lnSpc>
+                <a:spcPct val="150000"/>
+              </a:lnSpc>
+              <a:buFont typeface="Arial" panose="020B0604020202020204" pitchFamily="34" charset="0"/>
+              <a:buChar char="•"/>
+            </a:pPr>
+            <a:r>
+              <a:rPr lang="en-US" altLang="ko-KR" sz="1200" dirty="0">
+                <a:latin typeface="Malgun Gothic"/>
+                <a:cs typeface="Malgun Gothic"/>
+              </a:rPr>
+              <a:t>[bench] </a:t>
+            </a:r>
+            <a:r>
+              <a:rPr lang="en-US" altLang="ko-KR" sz="1200" dirty="0" err="1">
+                <a:latin typeface="Malgun Gothic"/>
+                <a:cs typeface="Malgun Gothic"/>
+              </a:rPr>
+              <a:t>IsColliding</a:t>
+            </a:r>
+            <a:r>
+              <a:rPr lang="en-US" altLang="ko-KR" sz="1200" dirty="0">
+                <a:latin typeface="Malgun Gothic"/>
+                <a:cs typeface="Malgun Gothic"/>
+              </a:rPr>
+              <a:t> obstacles=  1  iterations=2000000  total=  74.19ms  avg= 0.037us/call  hits=1953</a:t>
+            </a:r>
+          </a:p>
+          <a:p>
+            <a:pPr marL="742950" lvl="1" indent="-285750">
+              <a:lnSpc>
+                <a:spcPct val="150000"/>
+              </a:lnSpc>
+              <a:buFont typeface="Arial" panose="020B0604020202020204" pitchFamily="34" charset="0"/>
+              <a:buChar char="•"/>
+            </a:pPr>
+            <a:r>
+              <a:rPr lang="en-US" altLang="ko-KR" sz="1200" dirty="0">
+                <a:latin typeface="Malgun Gothic"/>
+                <a:cs typeface="Malgun Gothic"/>
+              </a:rPr>
+              <a:t>[bench] </a:t>
+            </a:r>
+            <a:r>
+              <a:rPr lang="en-US" altLang="ko-KR" sz="1200" dirty="0" err="1">
+                <a:latin typeface="Malgun Gothic"/>
+                <a:cs typeface="Malgun Gothic"/>
+              </a:rPr>
+              <a:t>IsColliding</a:t>
+            </a:r>
+            <a:r>
+              <a:rPr lang="en-US" altLang="ko-KR" sz="1200" dirty="0">
+                <a:latin typeface="Malgun Gothic"/>
+                <a:cs typeface="Malgun Gothic"/>
+              </a:rPr>
+              <a:t> obstacles=  6  iterations= 333333  total=  18.95ms  avg= 0.057us/call  hits=1901</a:t>
+            </a:r>
+          </a:p>
+          <a:p>
+            <a:pPr marL="742950" lvl="1" indent="-285750">
+              <a:lnSpc>
+                <a:spcPct val="150000"/>
+              </a:lnSpc>
+              <a:buFont typeface="Arial" panose="020B0604020202020204" pitchFamily="34" charset="0"/>
+              <a:buChar char="•"/>
+            </a:pPr>
+            <a:r>
+              <a:rPr lang="en-US" altLang="ko-KR" sz="1200" dirty="0">
+                <a:latin typeface="Malgun Gothic"/>
+                <a:cs typeface="Malgun Gothic"/>
+              </a:rPr>
+              <a:t>[bench] </a:t>
+            </a:r>
+            <a:r>
+              <a:rPr lang="en-US" altLang="ko-KR" sz="1200" dirty="0" err="1">
+                <a:latin typeface="Malgun Gothic"/>
+                <a:cs typeface="Malgun Gothic"/>
+              </a:rPr>
+              <a:t>IsColliding</a:t>
+            </a:r>
+            <a:r>
+              <a:rPr lang="en-US" altLang="ko-KR" sz="1200" dirty="0">
+                <a:latin typeface="Malgun Gothic"/>
+                <a:cs typeface="Malgun Gothic"/>
+              </a:rPr>
+              <a:t> obstacles= 20  iterations= 100000  total=  10.30ms  avg= 0.103us/call  hits=2027</a:t>
+            </a:r>
+          </a:p>
+          <a:p>
+            <a:pPr marL="742950" lvl="1" indent="-285750">
+              <a:lnSpc>
+                <a:spcPct val="150000"/>
+              </a:lnSpc>
+              <a:buFont typeface="Arial" panose="020B0604020202020204" pitchFamily="34" charset="0"/>
+              <a:buChar char="•"/>
+            </a:pPr>
+            <a:r>
+              <a:rPr lang="en-US" altLang="ko-KR" sz="1200" dirty="0">
+                <a:latin typeface="Malgun Gothic"/>
+                <a:cs typeface="Malgun Gothic"/>
+              </a:rPr>
+              <a:t>[bench] </a:t>
+            </a:r>
+            <a:r>
+              <a:rPr lang="en-US" altLang="ko-KR" sz="1200" dirty="0" err="1">
+                <a:latin typeface="Malgun Gothic"/>
+                <a:cs typeface="Malgun Gothic"/>
+              </a:rPr>
+              <a:t>IsColliding</a:t>
+            </a:r>
+            <a:r>
+              <a:rPr lang="en-US" altLang="ko-KR" sz="1200" dirty="0">
+                <a:latin typeface="Malgun Gothic"/>
+                <a:cs typeface="Malgun Gothic"/>
+              </a:rPr>
+              <a:t> obstacles= 50  iterations=  40000  total=   8.07ms  avg= 0.202us/call  hits=1999</a:t>
+            </a:r>
+          </a:p>
+          <a:p>
+            <a:pPr marL="742950" lvl="1" indent="-285750">
+              <a:lnSpc>
+                <a:spcPct val="150000"/>
+              </a:lnSpc>
+              <a:buFont typeface="Arial" panose="020B0604020202020204" pitchFamily="34" charset="0"/>
+              <a:buChar char="•"/>
+            </a:pPr>
+            <a:r>
+              <a:rPr lang="en-US" altLang="ko-KR" sz="1200" dirty="0">
+                <a:latin typeface="Malgun Gothic"/>
+                <a:cs typeface="Malgun Gothic"/>
+              </a:rPr>
+              <a:t>[bench] </a:t>
+            </a:r>
+            <a:r>
+              <a:rPr lang="en-US" altLang="ko-KR" sz="1200" dirty="0" err="1">
+                <a:latin typeface="Malgun Gothic"/>
+                <a:cs typeface="Malgun Gothic"/>
+              </a:rPr>
+              <a:t>IsColliding</a:t>
+            </a:r>
+            <a:r>
+              <a:rPr lang="en-US" altLang="ko-KR" sz="1200" dirty="0">
+                <a:latin typeface="Malgun Gothic"/>
+                <a:cs typeface="Malgun Gothic"/>
+              </a:rPr>
+              <a:t> obstacles=200  iterations=  10000  total=   6.09ms  avg= 0.609us/call  hits=1846</a:t>
+            </a:r>
+          </a:p>
+          <a:p>
+            <a:pPr marL="742950" lvl="1" indent="-285750">
+              <a:lnSpc>
+                <a:spcPct val="150000"/>
+              </a:lnSpc>
+              <a:buFont typeface="Arial" panose="020B0604020202020204" pitchFamily="34" charset="0"/>
+              <a:buChar char="•"/>
+            </a:pPr>
+            <a:r>
+              <a:rPr lang="en-US" altLang="ko-KR" sz="1200" dirty="0">
+                <a:latin typeface="Malgun Gothic"/>
+                <a:cs typeface="Malgun Gothic"/>
+              </a:rPr>
+              <a:t>[bench] </a:t>
+            </a:r>
+            <a:r>
+              <a:rPr lang="en-US" altLang="ko-KR" sz="1200" dirty="0" err="1">
+                <a:latin typeface="Malgun Gothic"/>
+                <a:cs typeface="Malgun Gothic"/>
+              </a:rPr>
+              <a:t>IsColliding</a:t>
+            </a:r>
+            <a:r>
+              <a:rPr lang="en-US" altLang="ko-KR" sz="1200" dirty="0">
+                <a:latin typeface="Malgun Gothic"/>
+                <a:cs typeface="Malgun Gothic"/>
+              </a:rPr>
+              <a:t> obstacles=500  iterations=   4000  total=   5.30ms  avg= 1.325us/call  hits=1576</a:t>
+            </a:r>
+          </a:p>
+          <a:p>
+            <a:endParaRPr lang="ko-KR" altLang="en-US" dirty="0"/>
+          </a:p>
+        </p:txBody>
+      </p:sp>
+      <p:sp>
+        <p:nvSpPr>
+          <p:cNvPr id="4" name="슬라이드 번호 개체 틀 3">
+            <a:extLst>
+              <a:ext uri="{FF2B5EF4-FFF2-40B4-BE49-F238E27FC236}">
+                <a16:creationId xmlns:a16="http://schemas.microsoft.com/office/drawing/2014/main" id="{2875EF84-17CC-4C41-1B45-6BE2F9599E5E}"/>
+              </a:ext>
+            </a:extLst>
+          </p:cNvPr>
+          <p:cNvSpPr>
+            <a:spLocks noGrp="1"/>
+          </p:cNvSpPr>
+          <p:nvPr>
+            <p:ph type="sldNum" sz="quarter" idx="5"/>
+          </p:nvPr>
+        </p:nvSpPr>
+        <p:spPr/>
+        <p:txBody>
+          <a:bodyPr/>
+          <a:lstStyle/>
+          <a:p>
+            <a:fld id="{1840BF9F-FA8F-4CB1-839A-D4536A9CACB4}" type="slidenum">
+              <a:rPr lang="ko-KR" altLang="en-US" smtClean="0"/>
+              <a:t>8</a:t>
+            </a:fld>
+            <a:endParaRPr lang="ko-KR" altLang="en-US"/>
+          </a:p>
+        </p:txBody>
+      </p:sp>
+    </p:spTree>
+    <p:extLst>
+      <p:ext uri="{BB962C8B-B14F-4D97-AF65-F5344CB8AC3E}">
+        <p14:creationId xmlns:p14="http://schemas.microsoft.com/office/powerpoint/2010/main" val="2958399647"/>
+      </p:ext>
+    </p:extLst>
+  </p:cSld>
+  <p:clrMapOvr>
+    <a:masterClrMapping/>
+  </p:clrMapOvr>
+</p:notes>
+</file>
+
+<file path=ppt/notesSlides/notesSlide8.xml><?xml version="1.0" encoding="utf-8"?>
 <p:notes xmlns:a="http://schemas.openxmlformats.org/drawingml/2006/main" xmlns:r="http://schemas.openxmlformats.org/officeDocument/2006/relationships" xmlns:p="http://schemas.openxmlformats.org/presentationml/2006/main">
   <p:cSld>
     <p:spTree>
@@ -1148,7 +1584,7 @@
           <a:p>
             <a:fld id="{1840BF9F-FA8F-4CB1-839A-D4536A9CACB4}" type="slidenum">
               <a:rPr lang="ko-KR" altLang="en-US" smtClean="0"/>
-              <a:t>5</a:t>
+              <a:t>9</a:t>
             </a:fld>
             <a:endParaRPr lang="ko-KR" altLang="en-US"/>
           </a:p>
@@ -1316,7 +1752,7 @@
           <a:p>
             <a:fld id="{1D8BD707-D9CF-40AE-B4C6-C98DA3205C09}" type="datetimeFigureOut">
               <a:rPr lang="en-US"/>
-              <a:t>7/27/2026</a:t>
+              <a:t>7/29/2026</a:t>
             </a:fld>
             <a:endParaRPr lang="en-US"/>
           </a:p>
@@ -1491,7 +1927,7 @@
           <a:p>
             <a:fld id="{1D8BD707-D9CF-40AE-B4C6-C98DA3205C09}" type="datetimeFigureOut">
               <a:rPr lang="en-US"/>
-              <a:t>7/27/2026</a:t>
+              <a:t>7/29/2026</a:t>
             </a:fld>
             <a:endParaRPr lang="en-US"/>
           </a:p>
@@ -1705,7 +2141,7 @@
           <a:p>
             <a:fld id="{1D8BD707-D9CF-40AE-B4C6-C98DA3205C09}" type="datetimeFigureOut">
               <a:rPr lang="en-US"/>
-              <a:t>7/27/2026</a:t>
+              <a:t>7/29/2026</a:t>
             </a:fld>
             <a:endParaRPr lang="en-US"/>
           </a:p>
@@ -1853,7 +2289,7 @@
           <a:p>
             <a:fld id="{1D8BD707-D9CF-40AE-B4C6-C98DA3205C09}" type="datetimeFigureOut">
               <a:rPr lang="en-US"/>
-              <a:t>7/27/2026</a:t>
+              <a:t>7/29/2026</a:t>
             </a:fld>
             <a:endParaRPr lang="en-US"/>
           </a:p>
@@ -1972,7 +2408,7 @@
           <a:p>
             <a:fld id="{1D8BD707-D9CF-40AE-B4C6-C98DA3205C09}" type="datetimeFigureOut">
               <a:rPr lang="en-US"/>
-              <a:t>7/27/2026</a:t>
+              <a:t>7/29/2026</a:t>
             </a:fld>
             <a:endParaRPr lang="en-US"/>
           </a:p>
@@ -2195,7 +2631,7 @@
           <a:p>
             <a:fld id="{1D8BD707-D9CF-40AE-B4C6-C98DA3205C09}" type="datetimeFigureOut">
               <a:rPr lang="en-US"/>
-              <a:t>7/27/2026</a:t>
+              <a:t>7/29/2026</a:t>
             </a:fld>
             <a:endParaRPr lang="en-US"/>
           </a:p>
@@ -2705,7 +3141,7 @@
         <p:spPr>
           <a:xfrm>
             <a:off x="1028700" y="1520351"/>
-            <a:ext cx="10134600" cy="3374706"/>
+            <a:ext cx="10134600" cy="3051541"/>
           </a:xfrm>
           <a:prstGeom prst="rect">
             <a:avLst/>
@@ -2953,41 +3389,21 @@
               <a:buChar char="•"/>
             </a:pPr>
             <a:r>
+              <a:rPr lang="en-US" altLang="ko-KR" sz="1400" dirty="0">
+                <a:latin typeface="Malgun Gothic"/>
+                <a:cs typeface="Malgun Gothic"/>
+              </a:rPr>
+              <a:t>OBB </a:t>
+            </a:r>
+            <a:r>
               <a:rPr lang="ko-KR" altLang="en-US" sz="1400" dirty="0">
                 <a:latin typeface="Malgun Gothic"/>
                 <a:cs typeface="Malgun Gothic"/>
               </a:rPr>
-              <a:t>주차 개선</a:t>
+              <a:t>최적화</a:t>
             </a:r>
             <a:endParaRPr lang="en-US" altLang="ko-KR" sz="1400" dirty="0">
               <a:latin typeface="Malgun Gothic"/>
-              <a:cs typeface="Malgun Gothic"/>
-            </a:endParaRPr>
-          </a:p>
-          <a:p>
-            <a:pPr marL="742950" lvl="1" indent="-285750">
-              <a:lnSpc>
-                <a:spcPct val="150000"/>
-              </a:lnSpc>
-              <a:buFont typeface="Arial" panose="020B0604020202020204" pitchFamily="34" charset="0"/>
-              <a:buChar char="•"/>
-            </a:pPr>
-            <a:r>
-              <a:rPr lang="en-US" altLang="ko-KR" sz="1400" dirty="0">
-                <a:latin typeface="Malgun Gothic"/>
-                <a:cs typeface="Malgun Gothic"/>
-              </a:rPr>
-              <a:t>Hybrid A*</a:t>
-            </a:r>
-            <a:r>
-              <a:rPr lang="ko-KR" altLang="en-US" sz="1400" dirty="0">
-                <a:latin typeface="Malgun Gothic"/>
-                <a:cs typeface="Malgun Gothic"/>
-              </a:rPr>
-              <a:t>성능 측정</a:t>
-            </a:r>
-            <a:endParaRPr lang="en-US" altLang="ko-KR" sz="1600" dirty="0">
-              <a:latin typeface="+mn-ea"/>
               <a:cs typeface="Malgun Gothic"/>
             </a:endParaRPr>
           </a:p>
@@ -3322,7 +3738,7 @@
             </a:r>
             <a:r>
               <a:rPr lang="ko-KR" altLang="en-US" spc="-25" dirty="0"/>
-              <a:t>최적화</a:t>
+              <a:t>대규모 수정</a:t>
             </a:r>
             <a:endParaRPr spc="-25" dirty="0"/>
           </a:p>
@@ -3382,6 +3798,4081 @@
             <a:extLst>
               <a:ext uri="{FF2B5EF4-FFF2-40B4-BE49-F238E27FC236}">
                 <a16:creationId xmlns:a16="http://schemas.microsoft.com/office/drawing/2014/main" id="{9E32851F-5CA3-4F15-215B-873F94B2F368}"/>
+              </a:ext>
+            </a:extLst>
+          </p:cNvPr>
+          <p:cNvSpPr txBox="1">
+            <a:spLocks/>
+          </p:cNvSpPr>
+          <p:nvPr/>
+        </p:nvSpPr>
+        <p:spPr>
+          <a:xfrm>
+            <a:off x="1028700" y="1520351"/>
+            <a:ext cx="10134600" cy="3390095"/>
+          </a:xfrm>
+          <a:prstGeom prst="rect">
+            <a:avLst/>
+          </a:prstGeom>
+        </p:spPr>
+        <p:txBody>
+          <a:bodyPr wrap="square" lIns="0" tIns="0" rIns="0" bIns="0">
+            <a:spAutoFit/>
+          </a:bodyPr>
+          <a:lstStyle>
+            <a:lvl1pPr marL="0">
+              <a:defRPr b="0" i="0">
+                <a:solidFill>
+                  <a:schemeClr val="tx1"/>
+                </a:solidFill>
+                <a:latin typeface="+mn-lt"/>
+                <a:ea typeface="+mn-ea"/>
+                <a:cs typeface="+mn-cs"/>
+              </a:defRPr>
+            </a:lvl1pPr>
+            <a:lvl2pPr marL="457200">
+              <a:defRPr>
+                <a:latin typeface="+mn-lt"/>
+                <a:ea typeface="+mn-ea"/>
+                <a:cs typeface="+mn-cs"/>
+              </a:defRPr>
+            </a:lvl2pPr>
+            <a:lvl3pPr marL="914400">
+              <a:defRPr>
+                <a:latin typeface="+mn-lt"/>
+                <a:ea typeface="+mn-ea"/>
+                <a:cs typeface="+mn-cs"/>
+              </a:defRPr>
+            </a:lvl3pPr>
+            <a:lvl4pPr marL="1371600">
+              <a:defRPr>
+                <a:latin typeface="+mn-lt"/>
+                <a:ea typeface="+mn-ea"/>
+                <a:cs typeface="+mn-cs"/>
+              </a:defRPr>
+            </a:lvl4pPr>
+            <a:lvl5pPr marL="1828800">
+              <a:defRPr>
+                <a:latin typeface="+mn-lt"/>
+                <a:ea typeface="+mn-ea"/>
+                <a:cs typeface="+mn-cs"/>
+              </a:defRPr>
+            </a:lvl5pPr>
+            <a:lvl6pPr marL="2286000">
+              <a:defRPr>
+                <a:latin typeface="+mn-lt"/>
+                <a:ea typeface="+mn-ea"/>
+                <a:cs typeface="+mn-cs"/>
+              </a:defRPr>
+            </a:lvl6pPr>
+            <a:lvl7pPr marL="2743200">
+              <a:defRPr>
+                <a:latin typeface="+mn-lt"/>
+                <a:ea typeface="+mn-ea"/>
+                <a:cs typeface="+mn-cs"/>
+              </a:defRPr>
+            </a:lvl7pPr>
+            <a:lvl8pPr marL="3200400">
+              <a:defRPr>
+                <a:latin typeface="+mn-lt"/>
+                <a:ea typeface="+mn-ea"/>
+                <a:cs typeface="+mn-cs"/>
+              </a:defRPr>
+            </a:lvl8pPr>
+            <a:lvl9pPr marL="3657600">
+              <a:defRPr>
+                <a:latin typeface="+mn-lt"/>
+                <a:ea typeface="+mn-ea"/>
+                <a:cs typeface="+mn-cs"/>
+              </a:defRPr>
+            </a:lvl9pPr>
+          </a:lstStyle>
+          <a:p>
+            <a:pPr marL="285750" indent="-285750">
+              <a:lnSpc>
+                <a:spcPct val="200000"/>
+              </a:lnSpc>
+              <a:buFont typeface="Arial" panose="020B0604020202020204" pitchFamily="34" charset="0"/>
+              <a:buChar char="•"/>
+            </a:pPr>
+            <a:r>
+              <a:rPr lang="ko-KR" altLang="en-US" sz="1600" dirty="0">
+                <a:latin typeface="+mn-ea"/>
+                <a:cs typeface="Malgun Gothic"/>
+              </a:rPr>
+              <a:t>기존의 문제</a:t>
+            </a:r>
+            <a:endParaRPr lang="en-US" altLang="ko-KR" sz="1200" dirty="0">
+              <a:latin typeface="Malgun Gothic"/>
+              <a:cs typeface="Malgun Gothic"/>
+            </a:endParaRPr>
+          </a:p>
+          <a:p>
+            <a:pPr marL="742950" lvl="1" indent="-285750">
+              <a:lnSpc>
+                <a:spcPct val="150000"/>
+              </a:lnSpc>
+              <a:buFont typeface="Arial" panose="020B0604020202020204" pitchFamily="34" charset="0"/>
+              <a:buChar char="•"/>
+            </a:pPr>
+            <a:r>
+              <a:rPr lang="ko-KR" altLang="en-US" sz="1400" dirty="0"/>
+              <a:t>차선에 종속적 </a:t>
+            </a:r>
+            <a:endParaRPr lang="en-US" altLang="ko-KR" sz="1400" dirty="0"/>
+          </a:p>
+          <a:p>
+            <a:pPr marL="742950" lvl="1" indent="-285750">
+              <a:lnSpc>
+                <a:spcPct val="150000"/>
+              </a:lnSpc>
+              <a:buFont typeface="Arial" panose="020B0604020202020204" pitchFamily="34" charset="0"/>
+              <a:buChar char="•"/>
+            </a:pPr>
+            <a:r>
+              <a:rPr lang="ko-KR" altLang="en-US" sz="1400" dirty="0"/>
+              <a:t>돌발 행동 표현 어려움</a:t>
+            </a:r>
+            <a:endParaRPr lang="en-US" altLang="ko-KR" sz="1400" dirty="0"/>
+          </a:p>
+          <a:p>
+            <a:pPr marL="285750" indent="-285750">
+              <a:lnSpc>
+                <a:spcPct val="200000"/>
+              </a:lnSpc>
+              <a:buFont typeface="Arial" panose="020B0604020202020204" pitchFamily="34" charset="0"/>
+              <a:buChar char="•"/>
+            </a:pPr>
+            <a:r>
+              <a:rPr lang="ko-KR" altLang="en-US" sz="1600" dirty="0">
+                <a:latin typeface="+mn-ea"/>
+                <a:cs typeface="Malgun Gothic"/>
+              </a:rPr>
+              <a:t>수정 방향</a:t>
+            </a:r>
+            <a:endParaRPr lang="en-US" altLang="ko-KR" sz="1200" dirty="0">
+              <a:latin typeface="Malgun Gothic"/>
+              <a:cs typeface="Malgun Gothic"/>
+            </a:endParaRPr>
+          </a:p>
+          <a:p>
+            <a:pPr marL="742950" lvl="1" indent="-285750">
+              <a:lnSpc>
+                <a:spcPct val="150000"/>
+              </a:lnSpc>
+              <a:buFont typeface="Arial" panose="020B0604020202020204" pitchFamily="34" charset="0"/>
+              <a:buChar char="•"/>
+            </a:pPr>
+            <a:r>
+              <a:rPr lang="ko-KR" altLang="en-US" sz="1400" dirty="0"/>
+              <a:t>도로 데이터 표현 방식 변경</a:t>
+            </a:r>
+            <a:endParaRPr lang="en-US" altLang="ko-KR" sz="1400" dirty="0"/>
+          </a:p>
+          <a:p>
+            <a:pPr marL="742950" lvl="1" indent="-285750">
+              <a:lnSpc>
+                <a:spcPct val="150000"/>
+              </a:lnSpc>
+              <a:buFont typeface="Arial" panose="020B0604020202020204" pitchFamily="34" charset="0"/>
+              <a:buChar char="•"/>
+            </a:pPr>
+            <a:r>
+              <a:rPr lang="ko-KR" altLang="en-US" sz="1400" dirty="0"/>
+              <a:t>주행 행동 후보 평가 후 선택</a:t>
+            </a:r>
+            <a:endParaRPr lang="en-US" altLang="ko-KR" sz="1400" dirty="0"/>
+          </a:p>
+          <a:p>
+            <a:pPr marL="742950" lvl="1" indent="-285750">
+              <a:lnSpc>
+                <a:spcPct val="150000"/>
+              </a:lnSpc>
+              <a:buFont typeface="Arial" panose="020B0604020202020204" pitchFamily="34" charset="0"/>
+              <a:buChar char="•"/>
+            </a:pPr>
+            <a:endParaRPr lang="en-US" altLang="ko-KR" sz="1200" dirty="0"/>
+          </a:p>
+          <a:p>
+            <a:pPr marL="742950" lvl="1" indent="-285750">
+              <a:lnSpc>
+                <a:spcPct val="150000"/>
+              </a:lnSpc>
+              <a:buFont typeface="Arial" panose="020B0604020202020204" pitchFamily="34" charset="0"/>
+              <a:buChar char="•"/>
+            </a:pPr>
+            <a:endParaRPr lang="en-US" altLang="ko-KR" sz="1200" dirty="0">
+              <a:latin typeface="Malgun Gothic"/>
+              <a:cs typeface="Malgun Gothic"/>
+            </a:endParaRPr>
+          </a:p>
+          <a:p>
+            <a:pPr marL="742950" lvl="1" indent="-285750">
+              <a:lnSpc>
+                <a:spcPct val="150000"/>
+              </a:lnSpc>
+              <a:buFont typeface="Arial" panose="020B0604020202020204" pitchFamily="34" charset="0"/>
+              <a:buChar char="•"/>
+            </a:pPr>
+            <a:endParaRPr lang="en-US" altLang="ko-KR" sz="1200" dirty="0">
+              <a:latin typeface="Malgun Gothic"/>
+              <a:cs typeface="Malgun Gothic"/>
+            </a:endParaRPr>
+          </a:p>
+          <a:p>
+            <a:pPr marL="742950" lvl="1" indent="-285750">
+              <a:lnSpc>
+                <a:spcPct val="150000"/>
+              </a:lnSpc>
+              <a:buFont typeface="Arial" panose="020B0604020202020204" pitchFamily="34" charset="0"/>
+              <a:buChar char="•"/>
+            </a:pPr>
+            <a:endParaRPr lang="en-US" altLang="ko-KR" sz="1400" dirty="0">
+              <a:latin typeface="+mn-ea"/>
+            </a:endParaRPr>
+          </a:p>
+        </p:txBody>
+      </p:sp>
+    </p:spTree>
+    <p:extLst>
+      <p:ext uri="{BB962C8B-B14F-4D97-AF65-F5344CB8AC3E}">
+        <p14:creationId xmlns:p14="http://schemas.microsoft.com/office/powerpoint/2010/main" val="3488653225"/>
+      </p:ext>
+    </p:extLst>
+  </p:cSld>
+  <p:clrMapOvr>
+    <a:masterClrMapping/>
+  </p:clrMapOvr>
+</p:sld>
+</file>
+
+<file path=ppt/slides/slide5.xml><?xml version="1.0" encoding="utf-8"?>
+<p:sld xmlns:a="http://schemas.openxmlformats.org/drawingml/2006/main" xmlns:r="http://schemas.openxmlformats.org/officeDocument/2006/relationships" xmlns:p="http://schemas.openxmlformats.org/presentationml/2006/main">
+  <p:cSld>
+    <p:spTree>
+      <p:nvGrpSpPr>
+        <p:cNvPr id="1" name="">
+          <a:extLst>
+            <a:ext uri="{FF2B5EF4-FFF2-40B4-BE49-F238E27FC236}">
+              <a16:creationId xmlns:a16="http://schemas.microsoft.com/office/drawing/2014/main" id="{BB3E8BBD-F5EA-6314-3D4E-CBB0B614CDC6}"/>
+            </a:ext>
+          </a:extLst>
+        </p:cNvPr>
+        <p:cNvGrpSpPr/>
+        <p:nvPr/>
+      </p:nvGrpSpPr>
+      <p:grpSpPr>
+        <a:xfrm>
+          <a:off x="0" y="0"/>
+          <a:ext cx="0" cy="0"/>
+          <a:chOff x="0" y="0"/>
+          <a:chExt cx="0" cy="0"/>
+        </a:xfrm>
+      </p:grpSpPr>
+      <p:sp>
+        <p:nvSpPr>
+          <p:cNvPr id="2" name="object 2" descr="$PPTXTitle">
+            <a:extLst>
+              <a:ext uri="{FF2B5EF4-FFF2-40B4-BE49-F238E27FC236}">
+                <a16:creationId xmlns:a16="http://schemas.microsoft.com/office/drawing/2014/main" id="{D855F8D9-4299-929F-85BC-69DA9DD1092E}"/>
+              </a:ext>
+            </a:extLst>
+          </p:cNvPr>
+          <p:cNvSpPr txBox="1">
+            <a:spLocks noGrp="1"/>
+          </p:cNvSpPr>
+          <p:nvPr>
+            <p:ph type="title"/>
+          </p:nvPr>
+        </p:nvSpPr>
+        <p:spPr>
+          <a:prstGeom prst="rect">
+            <a:avLst/>
+          </a:prstGeom>
+        </p:spPr>
+        <p:txBody>
+          <a:bodyPr vert="horz" wrap="square" lIns="0" tIns="12065" rIns="0" bIns="0" rtlCol="0">
+            <a:spAutoFit/>
+          </a:bodyPr>
+          <a:lstStyle/>
+          <a:p>
+            <a:pPr marL="12700">
+              <a:lnSpc>
+                <a:spcPct val="100000"/>
+              </a:lnSpc>
+              <a:spcBef>
+                <a:spcPts val="95"/>
+              </a:spcBef>
+            </a:pPr>
+            <a:r>
+              <a:rPr lang="ko-KR" altLang="en-US" spc="-25" dirty="0"/>
+              <a:t>작업내용 </a:t>
+            </a:r>
+            <a:r>
+              <a:rPr lang="en-US" altLang="ko-KR" spc="-25" dirty="0"/>
+              <a:t>– </a:t>
+            </a:r>
+            <a:r>
+              <a:rPr lang="ko-KR" altLang="en-US" spc="-25" dirty="0"/>
+              <a:t>대규모 수정</a:t>
+            </a:r>
+            <a:endParaRPr spc="-25" dirty="0"/>
+          </a:p>
+        </p:txBody>
+      </p:sp>
+      <p:sp>
+        <p:nvSpPr>
+          <p:cNvPr id="4" name="object 4">
+            <a:extLst>
+              <a:ext uri="{FF2B5EF4-FFF2-40B4-BE49-F238E27FC236}">
+                <a16:creationId xmlns:a16="http://schemas.microsoft.com/office/drawing/2014/main" id="{E81EDFFC-82C8-F70B-E4D7-8249D22C4710}"/>
+              </a:ext>
+            </a:extLst>
+          </p:cNvPr>
+          <p:cNvSpPr/>
+          <p:nvPr/>
+        </p:nvSpPr>
+        <p:spPr>
+          <a:xfrm>
+            <a:off x="838200" y="1311910"/>
+            <a:ext cx="10515600" cy="0"/>
+          </a:xfrm>
+          <a:custGeom>
+            <a:avLst/>
+            <a:gdLst/>
+            <a:ahLst/>
+            <a:cxnLst/>
+            <a:rect l="l" t="t" r="r" b="b"/>
+            <a:pathLst>
+              <a:path w="10515600">
+                <a:moveTo>
+                  <a:pt x="0" y="0"/>
+                </a:moveTo>
+                <a:lnTo>
+                  <a:pt x="10515600" y="0"/>
+                </a:lnTo>
+              </a:path>
+            </a:pathLst>
+          </a:custGeom>
+          <a:ln w="28575">
+            <a:solidFill>
+              <a:srgbClr val="CF3C1C"/>
+            </a:solidFill>
+          </a:ln>
+        </p:spPr>
+        <p:txBody>
+          <a:bodyPr wrap="square" lIns="0" tIns="0" rIns="0" bIns="0" rtlCol="0"/>
+          <a:lstStyle/>
+          <a:p>
+            <a:endParaRPr/>
+          </a:p>
+        </p:txBody>
+      </p:sp>
+      <p:graphicFrame>
+        <p:nvGraphicFramePr>
+          <p:cNvPr id="5" name="object 6">
+            <a:extLst>
+              <a:ext uri="{FF2B5EF4-FFF2-40B4-BE49-F238E27FC236}">
+                <a16:creationId xmlns:a16="http://schemas.microsoft.com/office/drawing/2014/main" id="{1CF40312-CA9E-73BD-CCFF-C6212F069981}"/>
+              </a:ext>
+            </a:extLst>
+          </p:cNvPr>
+          <p:cNvGraphicFramePr>
+            <a:graphicFrameLocks noGrp="1"/>
+          </p:cNvGraphicFramePr>
+          <p:nvPr>
+            <p:extLst>
+              <p:ext uri="{D42A27DB-BD31-4B8C-83A1-F6EECF244321}">
+                <p14:modId xmlns:p14="http://schemas.microsoft.com/office/powerpoint/2010/main" val="3096893554"/>
+              </p:ext>
+            </p:extLst>
+          </p:nvPr>
+        </p:nvGraphicFramePr>
+        <p:xfrm>
+          <a:off x="1371600" y="2085975"/>
+          <a:ext cx="8785225" cy="3333750"/>
+        </p:xfrm>
+        <a:graphic>
+          <a:graphicData uri="http://schemas.openxmlformats.org/drawingml/2006/table">
+            <a:tbl>
+              <a:tblPr firstRow="1" bandRow="1">
+                <a:tableStyleId>{2D5ABB26-0587-4C30-8999-92F81FD0307C}</a:tableStyleId>
+              </a:tblPr>
+              <a:tblGrid>
+                <a:gridCol w="1376680">
+                  <a:extLst>
+                    <a:ext uri="{9D8B030D-6E8A-4147-A177-3AD203B41FA5}">
+                      <a16:colId xmlns:a16="http://schemas.microsoft.com/office/drawing/2014/main" val="20000"/>
+                    </a:ext>
+                  </a:extLst>
+                </a:gridCol>
+                <a:gridCol w="4070985">
+                  <a:extLst>
+                    <a:ext uri="{9D8B030D-6E8A-4147-A177-3AD203B41FA5}">
+                      <a16:colId xmlns:a16="http://schemas.microsoft.com/office/drawing/2014/main" val="20001"/>
+                    </a:ext>
+                  </a:extLst>
+                </a:gridCol>
+                <a:gridCol w="3337560">
+                  <a:extLst>
+                    <a:ext uri="{9D8B030D-6E8A-4147-A177-3AD203B41FA5}">
+                      <a16:colId xmlns:a16="http://schemas.microsoft.com/office/drawing/2014/main" val="20002"/>
+                    </a:ext>
+                  </a:extLst>
+                </a:gridCol>
+              </a:tblGrid>
+              <a:tr h="370205">
+                <a:tc>
+                  <a:txBody>
+                    <a:bodyPr/>
+                    <a:lstStyle/>
+                    <a:p>
+                      <a:pPr algn="ctr">
+                        <a:lnSpc>
+                          <a:spcPct val="100000"/>
+                        </a:lnSpc>
+                        <a:spcBef>
+                          <a:spcPts val="720"/>
+                        </a:spcBef>
+                      </a:pPr>
+                      <a:r>
+                        <a:rPr lang="ko-KR" altLang="en-US" sz="1200" spc="-25" dirty="0">
+                          <a:latin typeface="Malgun Gothic"/>
+                          <a:cs typeface="Malgun Gothic"/>
+                        </a:rPr>
+                        <a:t>기능</a:t>
+                      </a:r>
+                      <a:endParaRPr sz="1200" dirty="0">
+                        <a:latin typeface="Malgun Gothic"/>
+                        <a:cs typeface="Malgun Gothic"/>
+                      </a:endParaRPr>
+                    </a:p>
+                  </a:txBody>
+                  <a:tcPr marL="0" marR="0" marT="91440" marB="0">
+                    <a:lnL w="6350">
+                      <a:solidFill>
+                        <a:srgbClr val="D1D1D1"/>
+                      </a:solidFill>
+                      <a:prstDash val="solid"/>
+                    </a:lnL>
+                    <a:lnR w="6350">
+                      <a:solidFill>
+                        <a:srgbClr val="D1D1D1"/>
+                      </a:solidFill>
+                      <a:prstDash val="solid"/>
+                    </a:lnR>
+                    <a:lnT w="6350">
+                      <a:solidFill>
+                        <a:srgbClr val="D1D1D1"/>
+                      </a:solidFill>
+                      <a:prstDash val="solid"/>
+                    </a:lnT>
+                    <a:lnB w="12700">
+                      <a:solidFill>
+                        <a:srgbClr val="000000"/>
+                      </a:solidFill>
+                      <a:prstDash val="solid"/>
+                    </a:lnB>
+                  </a:tcPr>
+                </a:tc>
+                <a:tc>
+                  <a:txBody>
+                    <a:bodyPr/>
+                    <a:lstStyle/>
+                    <a:p>
+                      <a:pPr algn="ctr">
+                        <a:lnSpc>
+                          <a:spcPct val="100000"/>
+                        </a:lnSpc>
+                        <a:spcBef>
+                          <a:spcPts val="720"/>
+                        </a:spcBef>
+                      </a:pPr>
+                      <a:r>
+                        <a:rPr lang="ko-KR" altLang="en-US" sz="1200" spc="-25" dirty="0" err="1">
+                          <a:latin typeface="Malgun Gothic"/>
+                          <a:cs typeface="Malgun Gothic"/>
+                        </a:rPr>
+                        <a:t>변경전</a:t>
+                      </a:r>
+                      <a:endParaRPr sz="1200" dirty="0">
+                        <a:latin typeface="Malgun Gothic"/>
+                        <a:cs typeface="Malgun Gothic"/>
+                      </a:endParaRPr>
+                    </a:p>
+                  </a:txBody>
+                  <a:tcPr marL="0" marR="0" marT="91440" marB="0">
+                    <a:lnL w="6350">
+                      <a:solidFill>
+                        <a:srgbClr val="D1D1D1"/>
+                      </a:solidFill>
+                      <a:prstDash val="solid"/>
+                    </a:lnL>
+                    <a:lnR w="6350">
+                      <a:solidFill>
+                        <a:srgbClr val="D1D1D1"/>
+                      </a:solidFill>
+                      <a:prstDash val="solid"/>
+                    </a:lnR>
+                    <a:lnT w="6350">
+                      <a:solidFill>
+                        <a:srgbClr val="D1D1D1"/>
+                      </a:solidFill>
+                      <a:prstDash val="solid"/>
+                    </a:lnT>
+                    <a:lnB w="12700">
+                      <a:solidFill>
+                        <a:srgbClr val="000000"/>
+                      </a:solidFill>
+                      <a:prstDash val="solid"/>
+                    </a:lnB>
+                  </a:tcPr>
+                </a:tc>
+                <a:tc>
+                  <a:txBody>
+                    <a:bodyPr/>
+                    <a:lstStyle/>
+                    <a:p>
+                      <a:pPr marL="2540" algn="ctr">
+                        <a:lnSpc>
+                          <a:spcPct val="100000"/>
+                        </a:lnSpc>
+                        <a:spcBef>
+                          <a:spcPts val="720"/>
+                        </a:spcBef>
+                      </a:pPr>
+                      <a:r>
+                        <a:rPr lang="ko-KR" altLang="en-US" sz="1200" spc="-25" dirty="0" err="1">
+                          <a:latin typeface="Malgun Gothic"/>
+                          <a:cs typeface="Malgun Gothic"/>
+                        </a:rPr>
+                        <a:t>변경후</a:t>
+                      </a:r>
+                      <a:endParaRPr sz="1200" dirty="0">
+                        <a:latin typeface="Malgun Gothic"/>
+                        <a:cs typeface="Malgun Gothic"/>
+                      </a:endParaRPr>
+                    </a:p>
+                  </a:txBody>
+                  <a:tcPr marL="0" marR="0" marT="91440" marB="0">
+                    <a:lnL w="6350">
+                      <a:solidFill>
+                        <a:srgbClr val="D1D1D1"/>
+                      </a:solidFill>
+                      <a:prstDash val="solid"/>
+                    </a:lnL>
+                    <a:lnR w="6350">
+                      <a:solidFill>
+                        <a:srgbClr val="D1D1D1"/>
+                      </a:solidFill>
+                      <a:prstDash val="solid"/>
+                    </a:lnR>
+                    <a:lnT w="6350">
+                      <a:solidFill>
+                        <a:srgbClr val="D1D1D1"/>
+                      </a:solidFill>
+                      <a:prstDash val="solid"/>
+                    </a:lnT>
+                    <a:lnB w="12700">
+                      <a:solidFill>
+                        <a:srgbClr val="000000"/>
+                      </a:solidFill>
+                      <a:prstDash val="solid"/>
+                    </a:lnB>
+                  </a:tcPr>
+                </a:tc>
+                <a:extLst>
+                  <a:ext uri="{0D108BD9-81ED-4DB2-BD59-A6C34878D82A}">
+                    <a16:rowId xmlns:a16="http://schemas.microsoft.com/office/drawing/2014/main" val="10000"/>
+                  </a:ext>
+                </a:extLst>
+              </a:tr>
+              <a:tr h="370205">
+                <a:tc>
+                  <a:txBody>
+                    <a:bodyPr/>
+                    <a:lstStyle/>
+                    <a:p>
+                      <a:pPr marL="635" algn="ctr">
+                        <a:lnSpc>
+                          <a:spcPct val="100000"/>
+                        </a:lnSpc>
+                        <a:spcBef>
+                          <a:spcPts val="720"/>
+                        </a:spcBef>
+                      </a:pPr>
+                      <a:r>
+                        <a:rPr lang="ko-KR" altLang="en-US" sz="1200" spc="-25" dirty="0">
+                          <a:latin typeface="Malgun Gothic"/>
+                          <a:cs typeface="Malgun Gothic"/>
+                        </a:rPr>
+                        <a:t>가속도 제어</a:t>
+                      </a:r>
+                      <a:endParaRPr sz="1200" dirty="0">
+                        <a:latin typeface="Malgun Gothic"/>
+                        <a:cs typeface="Malgun Gothic"/>
+                      </a:endParaRPr>
+                    </a:p>
+                  </a:txBody>
+                  <a:tcPr marL="0" marR="0" marT="91440" marB="0">
+                    <a:lnL w="6350">
+                      <a:solidFill>
+                        <a:srgbClr val="D1D1D1"/>
+                      </a:solidFill>
+                      <a:prstDash val="solid"/>
+                    </a:lnL>
+                    <a:lnR w="6350">
+                      <a:solidFill>
+                        <a:srgbClr val="D1D1D1"/>
+                      </a:solidFill>
+                      <a:prstDash val="solid"/>
+                    </a:lnR>
+                    <a:lnT w="12700">
+                      <a:solidFill>
+                        <a:srgbClr val="000000"/>
+                      </a:solidFill>
+                      <a:prstDash val="solid"/>
+                    </a:lnT>
+                    <a:lnB w="6350">
+                      <a:solidFill>
+                        <a:srgbClr val="D1D1D1"/>
+                      </a:solidFill>
+                      <a:prstDash val="solid"/>
+                    </a:lnB>
+                    <a:solidFill>
+                      <a:schemeClr val="bg1"/>
+                    </a:solidFill>
+                  </a:tcPr>
+                </a:tc>
+                <a:tc>
+                  <a:txBody>
+                    <a:bodyPr/>
+                    <a:lstStyle/>
+                    <a:p>
+                      <a:pPr algn="ctr">
+                        <a:lnSpc>
+                          <a:spcPct val="100000"/>
+                        </a:lnSpc>
+                        <a:spcBef>
+                          <a:spcPts val="720"/>
+                        </a:spcBef>
+                      </a:pPr>
+                      <a:r>
+                        <a:rPr lang="en-US" altLang="ko-KR" sz="1200" b="1" spc="-20" dirty="0">
+                          <a:latin typeface="Malgun Gothic"/>
+                          <a:cs typeface="Malgun Gothic"/>
+                        </a:rPr>
+                        <a:t>IDM</a:t>
+                      </a:r>
+                      <a:endParaRPr sz="1200" dirty="0">
+                        <a:latin typeface="Malgun Gothic"/>
+                        <a:cs typeface="Malgun Gothic"/>
+                      </a:endParaRPr>
+                    </a:p>
+                  </a:txBody>
+                  <a:tcPr marL="0" marR="0" marT="91440" marB="0">
+                    <a:lnL w="6350">
+                      <a:solidFill>
+                        <a:srgbClr val="D1D1D1"/>
+                      </a:solidFill>
+                      <a:prstDash val="solid"/>
+                    </a:lnL>
+                    <a:lnR w="6350">
+                      <a:solidFill>
+                        <a:srgbClr val="D1D1D1"/>
+                      </a:solidFill>
+                      <a:prstDash val="solid"/>
+                    </a:lnR>
+                    <a:lnT w="12700">
+                      <a:solidFill>
+                        <a:srgbClr val="000000"/>
+                      </a:solidFill>
+                      <a:prstDash val="solid"/>
+                    </a:lnT>
+                    <a:lnB w="6350">
+                      <a:solidFill>
+                        <a:srgbClr val="D1D1D1"/>
+                      </a:solidFill>
+                      <a:prstDash val="solid"/>
+                    </a:lnB>
+                    <a:solidFill>
+                      <a:schemeClr val="bg1"/>
+                    </a:solidFill>
+                  </a:tcPr>
+                </a:tc>
+                <a:tc>
+                  <a:txBody>
+                    <a:bodyPr/>
+                    <a:lstStyle/>
+                    <a:p>
+                      <a:pPr marL="2540" algn="ctr">
+                        <a:lnSpc>
+                          <a:spcPct val="100000"/>
+                        </a:lnSpc>
+                        <a:spcBef>
+                          <a:spcPts val="720"/>
+                        </a:spcBef>
+                      </a:pPr>
+                      <a:r>
+                        <a:rPr lang="ko-KR" altLang="en-US" sz="1200" b="1" dirty="0">
+                          <a:latin typeface="Malgun Gothic"/>
+                          <a:cs typeface="Malgun Gothic"/>
+                        </a:rPr>
+                        <a:t>앞차 가속도 </a:t>
+                      </a:r>
+                      <a:r>
+                        <a:rPr lang="ko-KR" altLang="en-US" sz="1200" b="1" dirty="0" err="1">
+                          <a:latin typeface="Malgun Gothic"/>
+                          <a:cs typeface="Malgun Gothic"/>
+                        </a:rPr>
+                        <a:t>피드포워드</a:t>
+                      </a:r>
+                      <a:r>
+                        <a:rPr lang="ko-KR" altLang="en-US" sz="1200" b="1" dirty="0">
+                          <a:latin typeface="Malgun Gothic"/>
+                          <a:cs typeface="Malgun Gothic"/>
+                        </a:rPr>
+                        <a:t> </a:t>
+                      </a:r>
+                      <a:r>
+                        <a:rPr lang="en-US" altLang="ko-KR" sz="1200" b="1" dirty="0">
+                          <a:latin typeface="Malgun Gothic"/>
+                          <a:cs typeface="Malgun Gothic"/>
+                        </a:rPr>
+                        <a:t>+ </a:t>
+                      </a:r>
+                      <a:r>
+                        <a:rPr lang="ko-KR" altLang="en-US" sz="1200" b="1" dirty="0">
+                          <a:latin typeface="Malgun Gothic"/>
+                          <a:cs typeface="Malgun Gothic"/>
+                        </a:rPr>
+                        <a:t>플랜 속도 피드백</a:t>
+                      </a:r>
+                      <a:endParaRPr sz="1200" dirty="0">
+                        <a:latin typeface="Malgun Gothic"/>
+                        <a:cs typeface="Malgun Gothic"/>
+                      </a:endParaRPr>
+                    </a:p>
+                  </a:txBody>
+                  <a:tcPr marL="0" marR="0" marT="91440" marB="0">
+                    <a:lnL w="6350">
+                      <a:solidFill>
+                        <a:srgbClr val="D1D1D1"/>
+                      </a:solidFill>
+                      <a:prstDash val="solid"/>
+                    </a:lnL>
+                    <a:lnR w="6350">
+                      <a:solidFill>
+                        <a:srgbClr val="D1D1D1"/>
+                      </a:solidFill>
+                      <a:prstDash val="solid"/>
+                    </a:lnR>
+                    <a:lnT w="12700">
+                      <a:solidFill>
+                        <a:srgbClr val="000000"/>
+                      </a:solidFill>
+                      <a:prstDash val="solid"/>
+                    </a:lnT>
+                    <a:lnB w="6350">
+                      <a:solidFill>
+                        <a:srgbClr val="D1D1D1"/>
+                      </a:solidFill>
+                      <a:prstDash val="solid"/>
+                    </a:lnB>
+                    <a:solidFill>
+                      <a:schemeClr val="bg1"/>
+                    </a:solidFill>
+                  </a:tcPr>
+                </a:tc>
+                <a:extLst>
+                  <a:ext uri="{0D108BD9-81ED-4DB2-BD59-A6C34878D82A}">
+                    <a16:rowId xmlns:a16="http://schemas.microsoft.com/office/drawing/2014/main" val="10001"/>
+                  </a:ext>
+                </a:extLst>
+              </a:tr>
+              <a:tr h="370840">
+                <a:tc>
+                  <a:txBody>
+                    <a:bodyPr/>
+                    <a:lstStyle/>
+                    <a:p>
+                      <a:pPr marL="635" algn="ctr">
+                        <a:lnSpc>
+                          <a:spcPct val="100000"/>
+                        </a:lnSpc>
+                        <a:spcBef>
+                          <a:spcPts val="720"/>
+                        </a:spcBef>
+                      </a:pPr>
+                      <a:r>
+                        <a:rPr lang="ko-KR" altLang="en-US" sz="1200" spc="-25" dirty="0">
+                          <a:latin typeface="Malgun Gothic"/>
+                          <a:cs typeface="Malgun Gothic"/>
+                        </a:rPr>
+                        <a:t>차선 변경</a:t>
+                      </a:r>
+                      <a:endParaRPr sz="1200" dirty="0">
+                        <a:latin typeface="Malgun Gothic"/>
+                        <a:cs typeface="Malgun Gothic"/>
+                      </a:endParaRPr>
+                    </a:p>
+                  </a:txBody>
+                  <a:tcPr marL="0" marR="0" marT="91440" marB="0">
+                    <a:lnL w="6350">
+                      <a:solidFill>
+                        <a:srgbClr val="D1D1D1"/>
+                      </a:solidFill>
+                      <a:prstDash val="solid"/>
+                    </a:lnL>
+                    <a:lnR w="6350">
+                      <a:solidFill>
+                        <a:srgbClr val="D1D1D1"/>
+                      </a:solidFill>
+                      <a:prstDash val="solid"/>
+                    </a:lnR>
+                    <a:lnT w="6350">
+                      <a:solidFill>
+                        <a:srgbClr val="D1D1D1"/>
+                      </a:solidFill>
+                      <a:prstDash val="solid"/>
+                    </a:lnT>
+                    <a:lnB w="6350">
+                      <a:solidFill>
+                        <a:srgbClr val="D1D1D1"/>
+                      </a:solidFill>
+                      <a:prstDash val="solid"/>
+                    </a:lnB>
+                    <a:solidFill>
+                      <a:schemeClr val="bg1"/>
+                    </a:solidFill>
+                  </a:tcPr>
+                </a:tc>
+                <a:tc>
+                  <a:txBody>
+                    <a:bodyPr/>
+                    <a:lstStyle/>
+                    <a:p>
+                      <a:pPr algn="ctr">
+                        <a:lnSpc>
+                          <a:spcPct val="100000"/>
+                        </a:lnSpc>
+                        <a:spcBef>
+                          <a:spcPts val="720"/>
+                        </a:spcBef>
+                      </a:pPr>
+                      <a:r>
+                        <a:rPr lang="en-US" sz="1200" b="1" dirty="0">
+                          <a:latin typeface="Malgun Gothic"/>
+                          <a:cs typeface="Malgun Gothic"/>
+                        </a:rPr>
+                        <a:t>MOBIL</a:t>
+                      </a:r>
+                      <a:endParaRPr sz="1200" dirty="0">
+                        <a:latin typeface="Malgun Gothic"/>
+                        <a:cs typeface="Malgun Gothic"/>
+                      </a:endParaRPr>
+                    </a:p>
+                  </a:txBody>
+                  <a:tcPr marL="0" marR="0" marT="91440" marB="0">
+                    <a:lnL w="6350">
+                      <a:solidFill>
+                        <a:srgbClr val="D1D1D1"/>
+                      </a:solidFill>
+                      <a:prstDash val="solid"/>
+                    </a:lnL>
+                    <a:lnR w="6350">
+                      <a:solidFill>
+                        <a:srgbClr val="D1D1D1"/>
+                      </a:solidFill>
+                      <a:prstDash val="solid"/>
+                    </a:lnR>
+                    <a:lnT w="6350">
+                      <a:solidFill>
+                        <a:srgbClr val="D1D1D1"/>
+                      </a:solidFill>
+                      <a:prstDash val="solid"/>
+                    </a:lnT>
+                    <a:lnB w="6350">
+                      <a:solidFill>
+                        <a:srgbClr val="D1D1D1"/>
+                      </a:solidFill>
+                      <a:prstDash val="solid"/>
+                    </a:lnB>
+                    <a:solidFill>
+                      <a:schemeClr val="bg1"/>
+                    </a:solidFill>
+                  </a:tcPr>
+                </a:tc>
+                <a:tc>
+                  <a:txBody>
+                    <a:bodyPr/>
+                    <a:lstStyle/>
+                    <a:p>
+                      <a:pPr algn="ctr">
+                        <a:lnSpc>
+                          <a:spcPct val="100000"/>
+                        </a:lnSpc>
+                        <a:spcBef>
+                          <a:spcPts val="720"/>
+                        </a:spcBef>
+                      </a:pPr>
+                      <a:r>
+                        <a:rPr sz="1200" b="1" spc="-20" dirty="0">
+                          <a:latin typeface="Malgun Gothic"/>
+                          <a:cs typeface="Malgun Gothic"/>
+                        </a:rPr>
+                        <a:t>BT,</a:t>
+                      </a:r>
+                      <a:r>
+                        <a:rPr sz="1200" b="1" spc="-35" dirty="0">
+                          <a:latin typeface="Malgun Gothic"/>
+                          <a:cs typeface="Malgun Gothic"/>
+                        </a:rPr>
+                        <a:t> </a:t>
+                      </a:r>
+                      <a:r>
+                        <a:rPr sz="1200" b="1" dirty="0">
+                          <a:latin typeface="Malgun Gothic"/>
+                          <a:cs typeface="Malgun Gothic"/>
+                        </a:rPr>
+                        <a:t>스플라인</a:t>
+                      </a:r>
+                      <a:r>
+                        <a:rPr sz="1200" b="1" spc="-45" dirty="0">
+                          <a:latin typeface="Malgun Gothic"/>
+                          <a:cs typeface="Malgun Gothic"/>
+                        </a:rPr>
+                        <a:t> </a:t>
+                      </a:r>
+                      <a:r>
+                        <a:rPr sz="1200" b="1" dirty="0">
+                          <a:latin typeface="Malgun Gothic"/>
+                          <a:cs typeface="Malgun Gothic"/>
+                        </a:rPr>
+                        <a:t>그래프,</a:t>
+                      </a:r>
+                      <a:r>
+                        <a:rPr sz="1200" b="1" spc="-40" dirty="0">
+                          <a:latin typeface="Malgun Gothic"/>
+                          <a:cs typeface="Malgun Gothic"/>
+                        </a:rPr>
+                        <a:t> </a:t>
+                      </a:r>
+                      <a:r>
+                        <a:rPr sz="1200" b="1" dirty="0">
+                          <a:latin typeface="Malgun Gothic"/>
+                          <a:cs typeface="Malgun Gothic"/>
+                        </a:rPr>
+                        <a:t>A*,</a:t>
+                      </a:r>
+                      <a:r>
+                        <a:rPr sz="1200" b="1" spc="-30" dirty="0">
+                          <a:latin typeface="Malgun Gothic"/>
+                          <a:cs typeface="Malgun Gothic"/>
+                        </a:rPr>
+                        <a:t> </a:t>
+                      </a:r>
+                      <a:r>
+                        <a:rPr sz="1200" b="1" dirty="0">
+                          <a:latin typeface="Malgun Gothic"/>
+                          <a:cs typeface="Malgun Gothic"/>
+                        </a:rPr>
+                        <a:t>PurePursuit</a:t>
+                      </a:r>
+                      <a:r>
+                        <a:rPr sz="1200" b="1" spc="-40" dirty="0">
+                          <a:latin typeface="Malgun Gothic"/>
+                          <a:cs typeface="Malgun Gothic"/>
+                        </a:rPr>
+                        <a:t> </a:t>
+                      </a:r>
+                      <a:r>
+                        <a:rPr sz="1200" b="1" dirty="0">
+                          <a:latin typeface="Malgun Gothic"/>
+                          <a:cs typeface="Malgun Gothic"/>
+                        </a:rPr>
+                        <a:t>+</a:t>
+                      </a:r>
+                      <a:r>
+                        <a:rPr sz="1200" b="1" spc="-40" dirty="0">
+                          <a:latin typeface="Malgun Gothic"/>
+                          <a:cs typeface="Malgun Gothic"/>
+                        </a:rPr>
+                        <a:t> </a:t>
+                      </a:r>
+                      <a:r>
+                        <a:rPr sz="1200" b="1" spc="-25" dirty="0">
+                          <a:latin typeface="Malgun Gothic"/>
+                          <a:cs typeface="Malgun Gothic"/>
+                        </a:rPr>
+                        <a:t>PID</a:t>
+                      </a:r>
+                      <a:endParaRPr sz="1200" dirty="0">
+                        <a:latin typeface="Malgun Gothic"/>
+                        <a:cs typeface="Malgun Gothic"/>
+                      </a:endParaRPr>
+                    </a:p>
+                  </a:txBody>
+                  <a:tcPr marL="0" marR="0" marT="91440" marB="0">
+                    <a:lnL w="6350">
+                      <a:solidFill>
+                        <a:srgbClr val="D1D1D1"/>
+                      </a:solidFill>
+                      <a:prstDash val="solid"/>
+                    </a:lnL>
+                    <a:lnR w="6350">
+                      <a:solidFill>
+                        <a:srgbClr val="D1D1D1"/>
+                      </a:solidFill>
+                      <a:prstDash val="solid"/>
+                    </a:lnR>
+                    <a:lnT w="6350">
+                      <a:solidFill>
+                        <a:srgbClr val="D1D1D1"/>
+                      </a:solidFill>
+                      <a:prstDash val="solid"/>
+                    </a:lnT>
+                    <a:lnB w="6350" cap="flat" cmpd="sng" algn="ctr">
+                      <a:solidFill>
+                        <a:srgbClr val="D1D1D1"/>
+                      </a:solidFill>
+                      <a:prstDash val="solid"/>
+                      <a:round/>
+                      <a:headEnd type="none" w="med" len="med"/>
+                      <a:tailEnd type="none" w="med" len="med"/>
+                    </a:lnB>
+                    <a:solidFill>
+                      <a:schemeClr val="bg1"/>
+                    </a:solidFill>
+                  </a:tcPr>
+                </a:tc>
+                <a:extLst>
+                  <a:ext uri="{0D108BD9-81ED-4DB2-BD59-A6C34878D82A}">
+                    <a16:rowId xmlns:a16="http://schemas.microsoft.com/office/drawing/2014/main" val="10002"/>
+                  </a:ext>
+                </a:extLst>
+              </a:tr>
+              <a:tr h="370205">
+                <a:tc>
+                  <a:txBody>
+                    <a:bodyPr/>
+                    <a:lstStyle/>
+                    <a:p>
+                      <a:pPr marL="635" algn="ctr">
+                        <a:lnSpc>
+                          <a:spcPct val="100000"/>
+                        </a:lnSpc>
+                        <a:spcBef>
+                          <a:spcPts val="720"/>
+                        </a:spcBef>
+                      </a:pPr>
+                      <a:r>
+                        <a:rPr lang="ko-KR" altLang="en-US" sz="1200" dirty="0">
+                          <a:latin typeface="Malgun Gothic"/>
+                          <a:cs typeface="Malgun Gothic"/>
+                        </a:rPr>
+                        <a:t>안전거리 유지</a:t>
+                      </a:r>
+                      <a:endParaRPr sz="1200" dirty="0">
+                        <a:latin typeface="Malgun Gothic"/>
+                        <a:cs typeface="Malgun Gothic"/>
+                      </a:endParaRPr>
+                    </a:p>
+                  </a:txBody>
+                  <a:tcPr marL="0" marR="0" marT="91440" marB="0">
+                    <a:lnL w="6350">
+                      <a:solidFill>
+                        <a:srgbClr val="D1D1D1"/>
+                      </a:solidFill>
+                      <a:prstDash val="solid"/>
+                    </a:lnL>
+                    <a:lnR w="6350">
+                      <a:solidFill>
+                        <a:srgbClr val="D1D1D1"/>
+                      </a:solidFill>
+                      <a:prstDash val="solid"/>
+                    </a:lnR>
+                    <a:lnT w="6350">
+                      <a:solidFill>
+                        <a:srgbClr val="D1D1D1"/>
+                      </a:solidFill>
+                      <a:prstDash val="solid"/>
+                    </a:lnT>
+                    <a:lnB w="6350">
+                      <a:solidFill>
+                        <a:srgbClr val="D1D1D1"/>
+                      </a:solidFill>
+                      <a:prstDash val="solid"/>
+                    </a:lnB>
+                    <a:solidFill>
+                      <a:schemeClr val="bg1"/>
+                    </a:solidFill>
+                  </a:tcPr>
+                </a:tc>
+                <a:tc>
+                  <a:txBody>
+                    <a:bodyPr/>
+                    <a:lstStyle/>
+                    <a:p>
+                      <a:pPr algn="ctr">
+                        <a:lnSpc>
+                          <a:spcPct val="100000"/>
+                        </a:lnSpc>
+                        <a:spcBef>
+                          <a:spcPts val="720"/>
+                        </a:spcBef>
+                      </a:pPr>
+                      <a:r>
+                        <a:rPr lang="en-US" altLang="ko-KR" sz="1200" b="1" spc="-20" dirty="0">
+                          <a:latin typeface="Malgun Gothic"/>
+                          <a:cs typeface="Malgun Gothic"/>
+                        </a:rPr>
+                        <a:t>IDM</a:t>
+                      </a:r>
+                      <a:endParaRPr sz="1200" dirty="0">
+                        <a:latin typeface="Malgun Gothic"/>
+                        <a:cs typeface="Malgun Gothic"/>
+                      </a:endParaRPr>
+                    </a:p>
+                  </a:txBody>
+                  <a:tcPr marL="0" marR="0" marT="91440" marB="0">
+                    <a:lnL w="6350">
+                      <a:solidFill>
+                        <a:srgbClr val="D1D1D1"/>
+                      </a:solidFill>
+                      <a:prstDash val="solid"/>
+                    </a:lnL>
+                    <a:lnR w="6350" cap="flat" cmpd="sng" algn="ctr">
+                      <a:solidFill>
+                        <a:srgbClr val="D1D1D1"/>
+                      </a:solidFill>
+                      <a:prstDash val="solid"/>
+                      <a:round/>
+                      <a:headEnd type="none" w="med" len="med"/>
+                      <a:tailEnd type="none" w="med" len="med"/>
+                    </a:lnR>
+                    <a:lnT w="6350">
+                      <a:solidFill>
+                        <a:srgbClr val="D1D1D1"/>
+                      </a:solidFill>
+                      <a:prstDash val="solid"/>
+                    </a:lnT>
+                    <a:lnB w="6350" cap="flat" cmpd="sng" algn="ctr">
+                      <a:solidFill>
+                        <a:srgbClr val="D1D1D1"/>
+                      </a:solidFill>
+                      <a:prstDash val="solid"/>
+                      <a:round/>
+                      <a:headEnd type="none" w="med" len="med"/>
+                      <a:tailEnd type="none" w="med" len="med"/>
+                    </a:lnB>
+                    <a:solidFill>
+                      <a:schemeClr val="bg1"/>
+                    </a:solidFill>
+                  </a:tcPr>
+                </a:tc>
+                <a:tc>
+                  <a:txBody>
+                    <a:bodyPr/>
+                    <a:lstStyle/>
+                    <a:p>
+                      <a:pPr marL="635" algn="ctr">
+                        <a:lnSpc>
+                          <a:spcPct val="100000"/>
+                        </a:lnSpc>
+                        <a:spcBef>
+                          <a:spcPts val="725"/>
+                        </a:spcBef>
+                      </a:pPr>
+                      <a:r>
+                        <a:rPr lang="en-US" sz="1200" b="1" dirty="0">
+                          <a:latin typeface="Malgun Gothic"/>
+                          <a:cs typeface="Malgun Gothic"/>
+                        </a:rPr>
+                        <a:t>Reeds-Shepp, Hybrid A*</a:t>
+                      </a:r>
+                      <a:endParaRPr sz="1200" b="1" dirty="0">
+                        <a:latin typeface="Malgun Gothic"/>
+                        <a:cs typeface="Malgun Gothic"/>
+                      </a:endParaRPr>
+                    </a:p>
+                  </a:txBody>
+                  <a:tcPr marL="0" marR="0" marT="92075" marB="0">
+                    <a:lnL w="6350">
+                      <a:solidFill>
+                        <a:srgbClr val="D1D1D1"/>
+                      </a:solidFill>
+                      <a:prstDash val="solid"/>
+                    </a:lnL>
+                    <a:lnR w="6350">
+                      <a:solidFill>
+                        <a:srgbClr val="D1D1D1"/>
+                      </a:solidFill>
+                      <a:prstDash val="solid"/>
+                    </a:lnR>
+                    <a:lnT w="6350">
+                      <a:solidFill>
+                        <a:srgbClr val="D1D1D1"/>
+                      </a:solidFill>
+                      <a:prstDash val="solid"/>
+                    </a:lnT>
+                    <a:lnB w="6350" cap="flat" cmpd="sng" algn="ctr">
+                      <a:solidFill>
+                        <a:srgbClr val="D1D1D1"/>
+                      </a:solidFill>
+                      <a:prstDash val="solid"/>
+                      <a:round/>
+                      <a:headEnd type="none" w="med" len="med"/>
+                      <a:tailEnd type="none" w="med" len="med"/>
+                    </a:lnB>
+                    <a:solidFill>
+                      <a:schemeClr val="bg1"/>
+                    </a:solidFill>
+                  </a:tcPr>
+                </a:tc>
+                <a:extLst>
+                  <a:ext uri="{0D108BD9-81ED-4DB2-BD59-A6C34878D82A}">
+                    <a16:rowId xmlns:a16="http://schemas.microsoft.com/office/drawing/2014/main" val="10003"/>
+                  </a:ext>
+                </a:extLst>
+              </a:tr>
+              <a:tr h="370205">
+                <a:tc>
+                  <a:txBody>
+                    <a:bodyPr/>
+                    <a:lstStyle/>
+                    <a:p>
+                      <a:pPr marL="635" algn="ctr">
+                        <a:lnSpc>
+                          <a:spcPct val="100000"/>
+                        </a:lnSpc>
+                        <a:spcBef>
+                          <a:spcPts val="720"/>
+                        </a:spcBef>
+                      </a:pPr>
+                      <a:r>
+                        <a:rPr lang="ko-KR" altLang="en-US" sz="1200" spc="-25" dirty="0">
+                          <a:latin typeface="Malgun Gothic"/>
+                          <a:cs typeface="Malgun Gothic"/>
+                        </a:rPr>
+                        <a:t>신호 준수</a:t>
+                      </a:r>
+                      <a:endParaRPr sz="1200" dirty="0">
+                        <a:latin typeface="Malgun Gothic"/>
+                        <a:cs typeface="Malgun Gothic"/>
+                      </a:endParaRPr>
+                    </a:p>
+                  </a:txBody>
+                  <a:tcPr marL="0" marR="0" marT="91440" marB="0">
+                    <a:lnL w="6350">
+                      <a:solidFill>
+                        <a:srgbClr val="D1D1D1"/>
+                      </a:solidFill>
+                      <a:prstDash val="solid"/>
+                    </a:lnL>
+                    <a:lnR w="6350" cap="flat" cmpd="sng" algn="ctr">
+                      <a:solidFill>
+                        <a:srgbClr val="D1D1D1"/>
+                      </a:solidFill>
+                      <a:prstDash val="solid"/>
+                      <a:round/>
+                      <a:headEnd type="none" w="med" len="med"/>
+                      <a:tailEnd type="none" w="med" len="med"/>
+                    </a:lnR>
+                    <a:lnT w="6350">
+                      <a:solidFill>
+                        <a:srgbClr val="D1D1D1"/>
+                      </a:solidFill>
+                      <a:prstDash val="solid"/>
+                    </a:lnT>
+                    <a:lnB w="6350">
+                      <a:solidFill>
+                        <a:srgbClr val="D1D1D1"/>
+                      </a:solidFill>
+                      <a:prstDash val="solid"/>
+                    </a:lnB>
+                    <a:solidFill>
+                      <a:schemeClr val="bg1"/>
+                    </a:solidFill>
+                  </a:tcPr>
+                </a:tc>
+                <a:tc>
+                  <a:txBody>
+                    <a:bodyPr/>
+                    <a:lstStyle/>
+                    <a:p>
+                      <a:pPr algn="ctr">
+                        <a:lnSpc>
+                          <a:spcPct val="100000"/>
+                        </a:lnSpc>
+                        <a:spcBef>
+                          <a:spcPts val="720"/>
+                        </a:spcBef>
+                      </a:pPr>
+                      <a:r>
+                        <a:rPr lang="en-US" sz="1200" b="1" dirty="0">
+                          <a:latin typeface="Malgun Gothic"/>
+                          <a:cs typeface="Malgun Gothic"/>
+                        </a:rPr>
+                        <a:t>IDM </a:t>
+                      </a:r>
+                      <a:r>
+                        <a:rPr lang="ko-KR" altLang="en-US" sz="1200" b="1" dirty="0">
+                          <a:latin typeface="Malgun Gothic"/>
+                          <a:cs typeface="Malgun Gothic"/>
+                        </a:rPr>
+                        <a:t>가상 장애물 추가</a:t>
+                      </a:r>
+                      <a:endParaRPr sz="1200" dirty="0">
+                        <a:latin typeface="Malgun Gothic"/>
+                        <a:cs typeface="Malgun Gothic"/>
+                      </a:endParaRPr>
+                    </a:p>
+                  </a:txBody>
+                  <a:tcPr marL="0" marR="0" marT="91440" marB="0">
+                    <a:lnL w="6350">
+                      <a:solidFill>
+                        <a:srgbClr val="D1D1D1"/>
+                      </a:solidFill>
+                      <a:prstDash val="solid"/>
+                    </a:lnL>
+                    <a:lnR w="6350" cap="flat" cmpd="sng" algn="ctr">
+                      <a:solidFill>
+                        <a:srgbClr val="D1D1D1"/>
+                      </a:solidFill>
+                      <a:prstDash val="solid"/>
+                      <a:round/>
+                      <a:headEnd type="none" w="med" len="med"/>
+                      <a:tailEnd type="none" w="med" len="med"/>
+                    </a:lnR>
+                    <a:lnT w="6350">
+                      <a:solidFill>
+                        <a:srgbClr val="D1D1D1"/>
+                      </a:solidFill>
+                      <a:prstDash val="solid"/>
+                    </a:lnT>
+                    <a:lnB w="6350">
+                      <a:solidFill>
+                        <a:srgbClr val="D1D1D1"/>
+                      </a:solidFill>
+                      <a:prstDash val="solid"/>
+                    </a:lnB>
+                    <a:solidFill>
+                      <a:schemeClr val="bg1"/>
+                    </a:solidFill>
+                  </a:tcPr>
+                </a:tc>
+                <a:tc>
+                  <a:txBody>
+                    <a:bodyPr/>
+                    <a:lstStyle/>
+                    <a:p>
+                      <a:pPr algn="ctr">
+                        <a:lnSpc>
+                          <a:spcPct val="100000"/>
+                        </a:lnSpc>
+                        <a:spcBef>
+                          <a:spcPts val="720"/>
+                        </a:spcBef>
+                      </a:pPr>
+                      <a:r>
+                        <a:rPr lang="en-US" sz="1200" b="1" spc="-20" dirty="0">
+                          <a:latin typeface="Malgun Gothic"/>
+                          <a:cs typeface="Malgun Gothic"/>
+                        </a:rPr>
+                        <a:t>IDM, MOBIL</a:t>
+                      </a:r>
+                      <a:endParaRPr sz="1200" dirty="0">
+                        <a:latin typeface="Malgun Gothic"/>
+                        <a:cs typeface="Malgun Gothic"/>
+                      </a:endParaRPr>
+                    </a:p>
+                  </a:txBody>
+                  <a:tcPr marL="0" marR="0" marT="91440" marB="0">
+                    <a:lnL w="6350" cap="flat" cmpd="sng" algn="ctr">
+                      <a:solidFill>
+                        <a:srgbClr val="D1D1D1"/>
+                      </a:solidFill>
+                      <a:prstDash val="solid"/>
+                      <a:round/>
+                      <a:headEnd type="none" w="med" len="med"/>
+                      <a:tailEnd type="none" w="med" len="med"/>
+                    </a:lnL>
+                    <a:lnR w="6350">
+                      <a:solidFill>
+                        <a:srgbClr val="D1D1D1"/>
+                      </a:solidFill>
+                      <a:prstDash val="solid"/>
+                    </a:lnR>
+                    <a:lnT w="6350">
+                      <a:solidFill>
+                        <a:srgbClr val="D1D1D1"/>
+                      </a:solidFill>
+                      <a:prstDash val="solid"/>
+                    </a:lnT>
+                    <a:lnB w="6350">
+                      <a:solidFill>
+                        <a:srgbClr val="D1D1D1"/>
+                      </a:solidFill>
+                      <a:prstDash val="solid"/>
+                    </a:lnB>
+                    <a:solidFill>
+                      <a:schemeClr val="bg1"/>
+                    </a:solidFill>
+                  </a:tcPr>
+                </a:tc>
+                <a:extLst>
+                  <a:ext uri="{0D108BD9-81ED-4DB2-BD59-A6C34878D82A}">
+                    <a16:rowId xmlns:a16="http://schemas.microsoft.com/office/drawing/2014/main" val="10004"/>
+                  </a:ext>
+                </a:extLst>
+              </a:tr>
+              <a:tr h="370205">
+                <a:tc>
+                  <a:txBody>
+                    <a:bodyPr/>
+                    <a:lstStyle/>
+                    <a:p>
+                      <a:pPr marL="635" algn="ctr">
+                        <a:lnSpc>
+                          <a:spcPct val="100000"/>
+                        </a:lnSpc>
+                        <a:spcBef>
+                          <a:spcPts val="725"/>
+                        </a:spcBef>
+                      </a:pPr>
+                      <a:r>
+                        <a:rPr lang="ko-KR" altLang="en-US" sz="1200" spc="-25" dirty="0">
+                          <a:latin typeface="Malgun Gothic"/>
+                          <a:cs typeface="Malgun Gothic"/>
+                        </a:rPr>
+                        <a:t>추월</a:t>
+                      </a:r>
+                      <a:endParaRPr sz="1200" dirty="0">
+                        <a:latin typeface="Malgun Gothic"/>
+                        <a:cs typeface="Malgun Gothic"/>
+                      </a:endParaRPr>
+                    </a:p>
+                  </a:txBody>
+                  <a:tcPr marL="0" marR="0" marT="92075" marB="0">
+                    <a:lnL w="6350">
+                      <a:solidFill>
+                        <a:srgbClr val="D1D1D1"/>
+                      </a:solidFill>
+                      <a:prstDash val="solid"/>
+                    </a:lnL>
+                    <a:lnR w="6350" cap="flat" cmpd="sng" algn="ctr">
+                      <a:solidFill>
+                        <a:srgbClr val="D1D1D1"/>
+                      </a:solidFill>
+                      <a:prstDash val="solid"/>
+                      <a:round/>
+                      <a:headEnd type="none" w="med" len="med"/>
+                      <a:tailEnd type="none" w="med" len="med"/>
+                    </a:lnR>
+                    <a:lnT w="6350">
+                      <a:solidFill>
+                        <a:srgbClr val="D1D1D1"/>
+                      </a:solidFill>
+                      <a:prstDash val="solid"/>
+                    </a:lnT>
+                    <a:lnB w="6350">
+                      <a:solidFill>
+                        <a:srgbClr val="D1D1D1"/>
+                      </a:solidFill>
+                      <a:prstDash val="solid"/>
+                    </a:lnB>
+                    <a:solidFill>
+                      <a:schemeClr val="bg1"/>
+                    </a:solidFill>
+                  </a:tcPr>
+                </a:tc>
+                <a:tc>
+                  <a:txBody>
+                    <a:bodyPr/>
+                    <a:lstStyle/>
+                    <a:p>
+                      <a:pPr algn="ctr">
+                        <a:lnSpc>
+                          <a:spcPct val="100000"/>
+                        </a:lnSpc>
+                        <a:spcBef>
+                          <a:spcPts val="720"/>
+                        </a:spcBef>
+                      </a:pPr>
+                      <a:r>
+                        <a:rPr lang="en-US" altLang="ko-KR" sz="1200" b="1" dirty="0">
+                          <a:latin typeface="Malgun Gothic"/>
+                          <a:cs typeface="Malgun Gothic"/>
+                        </a:rPr>
+                        <a:t>-</a:t>
+                      </a:r>
+                      <a:endParaRPr lang="ko-KR" altLang="en-US" sz="1200" dirty="0">
+                        <a:latin typeface="Malgun Gothic"/>
+                        <a:cs typeface="Malgun Gothic"/>
+                      </a:endParaRPr>
+                    </a:p>
+                  </a:txBody>
+                  <a:tcPr marL="0" marR="0" marT="91440" marB="0">
+                    <a:lnL w="6350">
+                      <a:solidFill>
+                        <a:srgbClr val="D1D1D1"/>
+                      </a:solidFill>
+                      <a:prstDash val="solid"/>
+                    </a:lnL>
+                    <a:lnR w="6350" cap="flat" cmpd="sng" algn="ctr">
+                      <a:solidFill>
+                        <a:srgbClr val="D1D1D1"/>
+                      </a:solidFill>
+                      <a:prstDash val="solid"/>
+                      <a:round/>
+                      <a:headEnd type="none" w="med" len="med"/>
+                      <a:tailEnd type="none" w="med" len="med"/>
+                    </a:lnR>
+                    <a:lnT w="6350">
+                      <a:solidFill>
+                        <a:srgbClr val="D1D1D1"/>
+                      </a:solidFill>
+                      <a:prstDash val="solid"/>
+                    </a:lnT>
+                    <a:lnB w="6350">
+                      <a:solidFill>
+                        <a:srgbClr val="D1D1D1"/>
+                      </a:solidFill>
+                      <a:prstDash val="solid"/>
+                    </a:lnB>
+                    <a:solidFill>
+                      <a:schemeClr val="bg1"/>
+                    </a:solidFill>
+                  </a:tcPr>
+                </a:tc>
+                <a:tc>
+                  <a:txBody>
+                    <a:bodyPr/>
+                    <a:lstStyle/>
+                    <a:p>
+                      <a:pPr marL="635" algn="ctr">
+                        <a:lnSpc>
+                          <a:spcPct val="100000"/>
+                        </a:lnSpc>
+                        <a:spcBef>
+                          <a:spcPts val="725"/>
+                        </a:spcBef>
+                      </a:pPr>
+                      <a:endParaRPr sz="1200" b="1" dirty="0">
+                        <a:latin typeface="Malgun Gothic"/>
+                        <a:cs typeface="Malgun Gothic"/>
+                      </a:endParaRPr>
+                    </a:p>
+                  </a:txBody>
+                  <a:tcPr marL="0" marR="0" marT="92075" marB="0">
+                    <a:lnL w="6350" cap="flat" cmpd="sng" algn="ctr">
+                      <a:solidFill>
+                        <a:srgbClr val="D1D1D1"/>
+                      </a:solidFill>
+                      <a:prstDash val="solid"/>
+                      <a:round/>
+                      <a:headEnd type="none" w="med" len="med"/>
+                      <a:tailEnd type="none" w="med" len="med"/>
+                    </a:lnL>
+                    <a:lnR w="6350">
+                      <a:solidFill>
+                        <a:srgbClr val="D1D1D1"/>
+                      </a:solidFill>
+                      <a:prstDash val="solid"/>
+                    </a:lnR>
+                    <a:lnT w="6350" cap="flat" cmpd="sng" algn="ctr">
+                      <a:solidFill>
+                        <a:srgbClr val="D1D1D1"/>
+                      </a:solidFill>
+                      <a:prstDash val="solid"/>
+                      <a:round/>
+                      <a:headEnd type="none" w="med" len="med"/>
+                      <a:tailEnd type="none" w="med" len="med"/>
+                    </a:lnT>
+                    <a:lnB w="6350">
+                      <a:solidFill>
+                        <a:srgbClr val="D1D1D1"/>
+                      </a:solidFill>
+                      <a:prstDash val="solid"/>
+                    </a:lnB>
+                    <a:solidFill>
+                      <a:schemeClr val="bg1"/>
+                    </a:solidFill>
+                  </a:tcPr>
+                </a:tc>
+                <a:extLst>
+                  <a:ext uri="{0D108BD9-81ED-4DB2-BD59-A6C34878D82A}">
+                    <a16:rowId xmlns:a16="http://schemas.microsoft.com/office/drawing/2014/main" val="10005"/>
+                  </a:ext>
+                </a:extLst>
+              </a:tr>
+              <a:tr h="370840">
+                <a:tc>
+                  <a:txBody>
+                    <a:bodyPr/>
+                    <a:lstStyle/>
+                    <a:p>
+                      <a:pPr marL="635" algn="ctr">
+                        <a:lnSpc>
+                          <a:spcPct val="100000"/>
+                        </a:lnSpc>
+                        <a:spcBef>
+                          <a:spcPts val="725"/>
+                        </a:spcBef>
+                      </a:pPr>
+                      <a:r>
+                        <a:rPr lang="ko-KR" altLang="en-US" sz="1200" spc="-25" dirty="0">
+                          <a:latin typeface="Malgun Gothic"/>
+                          <a:cs typeface="Malgun Gothic"/>
+                        </a:rPr>
+                        <a:t>도로 합류</a:t>
+                      </a:r>
+                      <a:endParaRPr sz="1200" dirty="0">
+                        <a:latin typeface="Malgun Gothic"/>
+                        <a:cs typeface="Malgun Gothic"/>
+                      </a:endParaRPr>
+                    </a:p>
+                  </a:txBody>
+                  <a:tcPr marL="0" marR="0" marT="92075" marB="0">
+                    <a:lnL w="6350">
+                      <a:solidFill>
+                        <a:srgbClr val="D1D1D1"/>
+                      </a:solidFill>
+                      <a:prstDash val="solid"/>
+                    </a:lnL>
+                    <a:lnR w="6350">
+                      <a:solidFill>
+                        <a:srgbClr val="D1D1D1"/>
+                      </a:solidFill>
+                      <a:prstDash val="solid"/>
+                    </a:lnR>
+                    <a:lnT w="6350">
+                      <a:solidFill>
+                        <a:srgbClr val="D1D1D1"/>
+                      </a:solidFill>
+                      <a:prstDash val="solid"/>
+                    </a:lnT>
+                    <a:lnB w="6350">
+                      <a:solidFill>
+                        <a:srgbClr val="D1D1D1"/>
+                      </a:solidFill>
+                      <a:prstDash val="solid"/>
+                    </a:lnB>
+                    <a:solidFill>
+                      <a:schemeClr val="bg1"/>
+                    </a:solidFill>
+                  </a:tcPr>
+                </a:tc>
+                <a:tc>
+                  <a:txBody>
+                    <a:bodyPr/>
+                    <a:lstStyle/>
+                    <a:p>
+                      <a:pPr marL="1270" marR="0" lvl="0" indent="0" algn="ctr" defTabSz="914400" eaLnBrk="1" fontAlgn="auto" latinLnBrk="0" hangingPunct="1">
+                        <a:lnSpc>
+                          <a:spcPct val="100000"/>
+                        </a:lnSpc>
+                        <a:spcBef>
+                          <a:spcPts val="725"/>
+                        </a:spcBef>
+                        <a:spcAft>
+                          <a:spcPts val="0"/>
+                        </a:spcAft>
+                        <a:buClrTx/>
+                        <a:buSzTx/>
+                        <a:buFontTx/>
+                        <a:buNone/>
+                        <a:tabLst/>
+                        <a:defRPr/>
+                      </a:pPr>
+                      <a:r>
+                        <a:rPr lang="en-US" altLang="ko-KR" sz="1200" b="1" dirty="0">
+                          <a:latin typeface="Malgun Gothic"/>
+                          <a:cs typeface="Malgun Gothic"/>
+                        </a:rPr>
+                        <a:t>IDM </a:t>
+                      </a:r>
+                      <a:r>
+                        <a:rPr lang="ko-KR" altLang="en-US" sz="1200" b="1" dirty="0">
+                          <a:latin typeface="Malgun Gothic"/>
+                          <a:cs typeface="Malgun Gothic"/>
+                        </a:rPr>
+                        <a:t>가상 장애물 추가 </a:t>
+                      </a:r>
+                      <a:r>
+                        <a:rPr lang="en-US" altLang="ko-KR" sz="1200" b="1" dirty="0">
+                          <a:latin typeface="Malgun Gothic"/>
+                          <a:cs typeface="Malgun Gothic"/>
+                        </a:rPr>
+                        <a:t>+ MOBIL</a:t>
+                      </a:r>
+                      <a:endParaRPr lang="ko-KR" altLang="en-US" sz="1200" dirty="0">
+                        <a:latin typeface="Malgun Gothic"/>
+                        <a:cs typeface="Malgun Gothic"/>
+                      </a:endParaRPr>
+                    </a:p>
+                  </a:txBody>
+                  <a:tcPr marL="0" marR="0" marT="92075" marB="0">
+                    <a:lnL w="6350">
+                      <a:solidFill>
+                        <a:srgbClr val="D1D1D1"/>
+                      </a:solidFill>
+                      <a:prstDash val="solid"/>
+                    </a:lnL>
+                    <a:lnR w="6350">
+                      <a:solidFill>
+                        <a:srgbClr val="D1D1D1"/>
+                      </a:solidFill>
+                      <a:prstDash val="solid"/>
+                    </a:lnR>
+                    <a:lnT w="6350" cap="flat" cmpd="sng" algn="ctr">
+                      <a:solidFill>
+                        <a:srgbClr val="D1D1D1"/>
+                      </a:solidFill>
+                      <a:prstDash val="solid"/>
+                      <a:round/>
+                      <a:headEnd type="none" w="med" len="med"/>
+                      <a:tailEnd type="none" w="med" len="med"/>
+                    </a:lnT>
+                    <a:lnB w="6350">
+                      <a:solidFill>
+                        <a:srgbClr val="D1D1D1"/>
+                      </a:solidFill>
+                      <a:prstDash val="solid"/>
+                    </a:lnB>
+                    <a:solidFill>
+                      <a:schemeClr val="bg1"/>
+                    </a:solidFill>
+                  </a:tcPr>
+                </a:tc>
+                <a:tc>
+                  <a:txBody>
+                    <a:bodyPr/>
+                    <a:lstStyle/>
+                    <a:p>
+                      <a:pPr marL="635" algn="ctr">
+                        <a:lnSpc>
+                          <a:spcPct val="100000"/>
+                        </a:lnSpc>
+                        <a:spcBef>
+                          <a:spcPts val="725"/>
+                        </a:spcBef>
+                      </a:pPr>
+                      <a:r>
+                        <a:rPr sz="1200" b="1" dirty="0">
+                          <a:latin typeface="Malgun Gothic"/>
+                          <a:cs typeface="Malgun Gothic"/>
+                        </a:rPr>
+                        <a:t>파라미터</a:t>
+                      </a:r>
+                      <a:r>
+                        <a:rPr sz="1200" b="1" spc="-5" dirty="0">
+                          <a:latin typeface="Malgun Gothic"/>
+                          <a:cs typeface="Malgun Gothic"/>
+                        </a:rPr>
+                        <a:t> </a:t>
+                      </a:r>
+                      <a:r>
+                        <a:rPr sz="1200" b="1" spc="-25" dirty="0">
+                          <a:latin typeface="Malgun Gothic"/>
+                          <a:cs typeface="Malgun Gothic"/>
+                        </a:rPr>
+                        <a:t>튜닝</a:t>
+                      </a:r>
+                      <a:endParaRPr sz="1200" dirty="0">
+                        <a:latin typeface="Malgun Gothic"/>
+                        <a:cs typeface="Malgun Gothic"/>
+                      </a:endParaRPr>
+                    </a:p>
+                  </a:txBody>
+                  <a:tcPr marL="0" marR="0" marT="92075" marB="0">
+                    <a:lnL w="6350">
+                      <a:solidFill>
+                        <a:srgbClr val="D1D1D1"/>
+                      </a:solidFill>
+                      <a:prstDash val="solid"/>
+                    </a:lnL>
+                    <a:lnR w="6350">
+                      <a:solidFill>
+                        <a:srgbClr val="D1D1D1"/>
+                      </a:solidFill>
+                      <a:prstDash val="solid"/>
+                    </a:lnR>
+                    <a:lnT w="6350" cap="flat" cmpd="sng" algn="ctr">
+                      <a:solidFill>
+                        <a:srgbClr val="D1D1D1"/>
+                      </a:solidFill>
+                      <a:prstDash val="solid"/>
+                      <a:round/>
+                      <a:headEnd type="none" w="med" len="med"/>
+                      <a:tailEnd type="none" w="med" len="med"/>
+                    </a:lnT>
+                    <a:lnB w="6350">
+                      <a:solidFill>
+                        <a:srgbClr val="D1D1D1"/>
+                      </a:solidFill>
+                      <a:prstDash val="solid"/>
+                    </a:lnB>
+                    <a:solidFill>
+                      <a:schemeClr val="bg1"/>
+                    </a:solidFill>
+                  </a:tcPr>
+                </a:tc>
+                <a:extLst>
+                  <a:ext uri="{0D108BD9-81ED-4DB2-BD59-A6C34878D82A}">
+                    <a16:rowId xmlns:a16="http://schemas.microsoft.com/office/drawing/2014/main" val="10006"/>
+                  </a:ext>
+                </a:extLst>
+              </a:tr>
+              <a:tr h="370205">
+                <a:tc>
+                  <a:txBody>
+                    <a:bodyPr/>
+                    <a:lstStyle/>
+                    <a:p>
+                      <a:pPr marL="635" algn="ctr">
+                        <a:lnSpc>
+                          <a:spcPct val="100000"/>
+                        </a:lnSpc>
+                        <a:spcBef>
+                          <a:spcPts val="725"/>
+                        </a:spcBef>
+                      </a:pPr>
+                      <a:r>
+                        <a:rPr lang="ko-KR" altLang="en-US" sz="1200" spc="-25" dirty="0">
+                          <a:latin typeface="Malgun Gothic"/>
+                          <a:cs typeface="Malgun Gothic"/>
+                        </a:rPr>
+                        <a:t>장애물 회피</a:t>
+                      </a:r>
+                      <a:endParaRPr sz="1200" dirty="0">
+                        <a:latin typeface="Malgun Gothic"/>
+                        <a:cs typeface="Malgun Gothic"/>
+                      </a:endParaRPr>
+                    </a:p>
+                  </a:txBody>
+                  <a:tcPr marL="0" marR="0" marT="92075" marB="0">
+                    <a:lnL w="6350">
+                      <a:solidFill>
+                        <a:srgbClr val="D1D1D1"/>
+                      </a:solidFill>
+                      <a:prstDash val="solid"/>
+                    </a:lnL>
+                    <a:lnR w="6350">
+                      <a:solidFill>
+                        <a:srgbClr val="D1D1D1"/>
+                      </a:solidFill>
+                      <a:prstDash val="solid"/>
+                    </a:lnR>
+                    <a:lnT w="6350">
+                      <a:solidFill>
+                        <a:srgbClr val="D1D1D1"/>
+                      </a:solidFill>
+                      <a:prstDash val="solid"/>
+                    </a:lnT>
+                    <a:lnB w="6350">
+                      <a:solidFill>
+                        <a:srgbClr val="D1D1D1"/>
+                      </a:solidFill>
+                      <a:prstDash val="solid"/>
+                    </a:lnB>
+                    <a:solidFill>
+                      <a:schemeClr val="bg1"/>
+                    </a:solidFill>
+                  </a:tcPr>
+                </a:tc>
+                <a:tc>
+                  <a:txBody>
+                    <a:bodyPr/>
+                    <a:lstStyle/>
+                    <a:p>
+                      <a:pPr marL="1270" algn="ctr">
+                        <a:lnSpc>
+                          <a:spcPct val="100000"/>
+                        </a:lnSpc>
+                        <a:spcBef>
+                          <a:spcPts val="725"/>
+                        </a:spcBef>
+                      </a:pPr>
+                      <a:r>
+                        <a:rPr lang="en-US" sz="1200" b="1" dirty="0">
+                          <a:latin typeface="Malgun Gothic"/>
+                          <a:cs typeface="Malgun Gothic"/>
+                        </a:rPr>
+                        <a:t>-</a:t>
+                      </a:r>
+                      <a:endParaRPr sz="1200" dirty="0">
+                        <a:latin typeface="Malgun Gothic"/>
+                        <a:cs typeface="Malgun Gothic"/>
+                      </a:endParaRPr>
+                    </a:p>
+                  </a:txBody>
+                  <a:tcPr marL="0" marR="0" marT="92075" marB="0">
+                    <a:lnL w="6350">
+                      <a:solidFill>
+                        <a:srgbClr val="D1D1D1"/>
+                      </a:solidFill>
+                      <a:prstDash val="solid"/>
+                    </a:lnL>
+                    <a:lnR w="6350">
+                      <a:solidFill>
+                        <a:srgbClr val="D1D1D1"/>
+                      </a:solidFill>
+                      <a:prstDash val="solid"/>
+                    </a:lnR>
+                    <a:lnT w="6350">
+                      <a:solidFill>
+                        <a:srgbClr val="D1D1D1"/>
+                      </a:solidFill>
+                      <a:prstDash val="solid"/>
+                    </a:lnT>
+                    <a:lnB w="6350">
+                      <a:solidFill>
+                        <a:srgbClr val="D1D1D1"/>
+                      </a:solidFill>
+                      <a:prstDash val="solid"/>
+                    </a:lnB>
+                    <a:solidFill>
+                      <a:schemeClr val="bg1"/>
+                    </a:solidFill>
+                  </a:tcPr>
+                </a:tc>
+                <a:tc>
+                  <a:txBody>
+                    <a:bodyPr/>
+                    <a:lstStyle/>
+                    <a:p>
+                      <a:pPr marL="635" algn="ctr">
+                        <a:lnSpc>
+                          <a:spcPct val="100000"/>
+                        </a:lnSpc>
+                        <a:spcBef>
+                          <a:spcPts val="725"/>
+                        </a:spcBef>
+                      </a:pPr>
+                      <a:r>
+                        <a:rPr sz="1200" b="1" dirty="0">
+                          <a:latin typeface="Malgun Gothic"/>
+                          <a:cs typeface="Malgun Gothic"/>
+                        </a:rPr>
+                        <a:t>공간</a:t>
+                      </a:r>
+                      <a:r>
+                        <a:rPr sz="1200" b="1" spc="-35" dirty="0">
+                          <a:latin typeface="Malgun Gothic"/>
+                          <a:cs typeface="Malgun Gothic"/>
+                        </a:rPr>
+                        <a:t> </a:t>
+                      </a:r>
+                      <a:r>
+                        <a:rPr sz="1200" b="1" dirty="0">
+                          <a:latin typeface="Malgun Gothic"/>
+                          <a:cs typeface="Malgun Gothic"/>
+                        </a:rPr>
+                        <a:t>분할,</a:t>
+                      </a:r>
+                      <a:r>
+                        <a:rPr sz="1200" b="1" spc="-20" dirty="0">
+                          <a:latin typeface="Malgun Gothic"/>
+                          <a:cs typeface="Malgun Gothic"/>
+                        </a:rPr>
+                        <a:t> </a:t>
+                      </a:r>
+                      <a:r>
+                        <a:rPr sz="1200" b="1" dirty="0">
+                          <a:latin typeface="Malgun Gothic"/>
+                          <a:cs typeface="Malgun Gothic"/>
+                        </a:rPr>
+                        <a:t>AI/렌더링</a:t>
+                      </a:r>
+                      <a:r>
+                        <a:rPr sz="1200" b="1" spc="-20" dirty="0">
+                          <a:latin typeface="Malgun Gothic"/>
+                          <a:cs typeface="Malgun Gothic"/>
+                        </a:rPr>
+                        <a:t> </a:t>
+                      </a:r>
+                      <a:r>
+                        <a:rPr sz="1200" b="1" spc="-10" dirty="0">
+                          <a:latin typeface="Malgun Gothic"/>
+                          <a:cs typeface="Malgun Gothic"/>
+                        </a:rPr>
+                        <a:t>LOD,</a:t>
+                      </a:r>
+                      <a:r>
+                        <a:rPr sz="1200" b="1" spc="-25" dirty="0">
+                          <a:latin typeface="Malgun Gothic"/>
+                          <a:cs typeface="Malgun Gothic"/>
+                        </a:rPr>
+                        <a:t> ECS</a:t>
+                      </a:r>
+                      <a:endParaRPr sz="1200">
+                        <a:latin typeface="Malgun Gothic"/>
+                        <a:cs typeface="Malgun Gothic"/>
+                      </a:endParaRPr>
+                    </a:p>
+                  </a:txBody>
+                  <a:tcPr marL="0" marR="0" marT="92075" marB="0">
+                    <a:lnL w="6350">
+                      <a:solidFill>
+                        <a:srgbClr val="D1D1D1"/>
+                      </a:solidFill>
+                      <a:prstDash val="solid"/>
+                    </a:lnL>
+                    <a:lnR w="6350">
+                      <a:solidFill>
+                        <a:srgbClr val="D1D1D1"/>
+                      </a:solidFill>
+                      <a:prstDash val="solid"/>
+                    </a:lnR>
+                    <a:lnT w="6350">
+                      <a:solidFill>
+                        <a:srgbClr val="D1D1D1"/>
+                      </a:solidFill>
+                      <a:prstDash val="solid"/>
+                    </a:lnT>
+                    <a:lnB w="6350">
+                      <a:solidFill>
+                        <a:srgbClr val="D1D1D1"/>
+                      </a:solidFill>
+                      <a:prstDash val="solid"/>
+                    </a:lnB>
+                    <a:solidFill>
+                      <a:schemeClr val="bg1"/>
+                    </a:solidFill>
+                  </a:tcPr>
+                </a:tc>
+                <a:extLst>
+                  <a:ext uri="{0D108BD9-81ED-4DB2-BD59-A6C34878D82A}">
+                    <a16:rowId xmlns:a16="http://schemas.microsoft.com/office/drawing/2014/main" val="10007"/>
+                  </a:ext>
+                </a:extLst>
+              </a:tr>
+              <a:tr h="370840">
+                <a:tc>
+                  <a:txBody>
+                    <a:bodyPr/>
+                    <a:lstStyle/>
+                    <a:p>
+                      <a:pPr marL="635" algn="ctr">
+                        <a:lnSpc>
+                          <a:spcPct val="100000"/>
+                        </a:lnSpc>
+                        <a:spcBef>
+                          <a:spcPts val="725"/>
+                        </a:spcBef>
+                      </a:pPr>
+                      <a:endParaRPr sz="1200" dirty="0">
+                        <a:latin typeface="Malgun Gothic"/>
+                        <a:cs typeface="Malgun Gothic"/>
+                      </a:endParaRPr>
+                    </a:p>
+                  </a:txBody>
+                  <a:tcPr marL="0" marR="0" marT="92075" marB="0">
+                    <a:lnL w="6350">
+                      <a:solidFill>
+                        <a:srgbClr val="D1D1D1"/>
+                      </a:solidFill>
+                      <a:prstDash val="solid"/>
+                    </a:lnL>
+                    <a:lnR w="6350">
+                      <a:solidFill>
+                        <a:srgbClr val="D1D1D1"/>
+                      </a:solidFill>
+                      <a:prstDash val="solid"/>
+                    </a:lnR>
+                    <a:lnT w="6350">
+                      <a:solidFill>
+                        <a:srgbClr val="D1D1D1"/>
+                      </a:solidFill>
+                      <a:prstDash val="solid"/>
+                    </a:lnT>
+                    <a:lnB w="6350">
+                      <a:solidFill>
+                        <a:srgbClr val="D1D1D1"/>
+                      </a:solidFill>
+                      <a:prstDash val="solid"/>
+                    </a:lnB>
+                    <a:solidFill>
+                      <a:schemeClr val="bg1"/>
+                    </a:solidFill>
+                  </a:tcPr>
+                </a:tc>
+                <a:tc>
+                  <a:txBody>
+                    <a:bodyPr/>
+                    <a:lstStyle/>
+                    <a:p>
+                      <a:pPr marL="1270" algn="ctr">
+                        <a:lnSpc>
+                          <a:spcPct val="100000"/>
+                        </a:lnSpc>
+                        <a:spcBef>
+                          <a:spcPts val="725"/>
+                        </a:spcBef>
+                      </a:pPr>
+                      <a:endParaRPr sz="1200" dirty="0">
+                        <a:latin typeface="Malgun Gothic"/>
+                        <a:cs typeface="Malgun Gothic"/>
+                      </a:endParaRPr>
+                    </a:p>
+                  </a:txBody>
+                  <a:tcPr marL="0" marR="0" marT="92075" marB="0">
+                    <a:lnL w="6350">
+                      <a:solidFill>
+                        <a:srgbClr val="D1D1D1"/>
+                      </a:solidFill>
+                      <a:prstDash val="solid"/>
+                    </a:lnL>
+                    <a:lnR w="6350">
+                      <a:solidFill>
+                        <a:srgbClr val="D1D1D1"/>
+                      </a:solidFill>
+                      <a:prstDash val="solid"/>
+                    </a:lnR>
+                    <a:lnT w="6350">
+                      <a:solidFill>
+                        <a:srgbClr val="D1D1D1"/>
+                      </a:solidFill>
+                      <a:prstDash val="solid"/>
+                    </a:lnT>
+                    <a:lnB w="6350">
+                      <a:solidFill>
+                        <a:srgbClr val="D1D1D1"/>
+                      </a:solidFill>
+                      <a:prstDash val="solid"/>
+                    </a:lnB>
+                    <a:solidFill>
+                      <a:schemeClr val="bg1"/>
+                    </a:solidFill>
+                  </a:tcPr>
+                </a:tc>
+                <a:tc>
+                  <a:txBody>
+                    <a:bodyPr/>
+                    <a:lstStyle/>
+                    <a:p>
+                      <a:pPr>
+                        <a:lnSpc>
+                          <a:spcPct val="100000"/>
+                        </a:lnSpc>
+                      </a:pPr>
+                      <a:endParaRPr sz="1300" dirty="0">
+                        <a:latin typeface="Times New Roman"/>
+                        <a:cs typeface="Times New Roman"/>
+                      </a:endParaRPr>
+                    </a:p>
+                  </a:txBody>
+                  <a:tcPr marL="0" marR="0" marT="0" marB="0">
+                    <a:lnL w="6350">
+                      <a:solidFill>
+                        <a:srgbClr val="D1D1D1"/>
+                      </a:solidFill>
+                      <a:prstDash val="solid"/>
+                    </a:lnL>
+                    <a:lnR w="6350">
+                      <a:solidFill>
+                        <a:srgbClr val="D1D1D1"/>
+                      </a:solidFill>
+                      <a:prstDash val="solid"/>
+                    </a:lnR>
+                    <a:lnT w="6350">
+                      <a:solidFill>
+                        <a:srgbClr val="D1D1D1"/>
+                      </a:solidFill>
+                      <a:prstDash val="solid"/>
+                    </a:lnT>
+                    <a:lnB w="6350">
+                      <a:solidFill>
+                        <a:srgbClr val="D1D1D1"/>
+                      </a:solidFill>
+                      <a:prstDash val="solid"/>
+                    </a:lnB>
+                    <a:solidFill>
+                      <a:schemeClr val="bg1"/>
+                    </a:solidFill>
+                  </a:tcPr>
+                </a:tc>
+                <a:extLst>
+                  <a:ext uri="{0D108BD9-81ED-4DB2-BD59-A6C34878D82A}">
+                    <a16:rowId xmlns:a16="http://schemas.microsoft.com/office/drawing/2014/main" val="10008"/>
+                  </a:ext>
+                </a:extLst>
+              </a:tr>
+            </a:tbl>
+          </a:graphicData>
+        </a:graphic>
+      </p:graphicFrame>
+    </p:spTree>
+    <p:extLst>
+      <p:ext uri="{BB962C8B-B14F-4D97-AF65-F5344CB8AC3E}">
+        <p14:creationId xmlns:p14="http://schemas.microsoft.com/office/powerpoint/2010/main" val="3625843109"/>
+      </p:ext>
+    </p:extLst>
+  </p:cSld>
+  <p:clrMapOvr>
+    <a:masterClrMapping/>
+  </p:clrMapOvr>
+</p:sld>
+</file>
+
+<file path=ppt/slides/slide6.xml><?xml version="1.0" encoding="utf-8"?>
+<p:sld xmlns:a="http://schemas.openxmlformats.org/drawingml/2006/main" xmlns:r="http://schemas.openxmlformats.org/officeDocument/2006/relationships" xmlns:p="http://schemas.openxmlformats.org/presentationml/2006/main">
+  <p:cSld>
+    <p:spTree>
+      <p:nvGrpSpPr>
+        <p:cNvPr id="1" name="">
+          <a:extLst>
+            <a:ext uri="{FF2B5EF4-FFF2-40B4-BE49-F238E27FC236}">
+              <a16:creationId xmlns:a16="http://schemas.microsoft.com/office/drawing/2014/main" id="{F32DC2F8-1AB2-BEB3-2792-84548B45FB44}"/>
+            </a:ext>
+          </a:extLst>
+        </p:cNvPr>
+        <p:cNvGrpSpPr/>
+        <p:nvPr/>
+      </p:nvGrpSpPr>
+      <p:grpSpPr>
+        <a:xfrm>
+          <a:off x="0" y="0"/>
+          <a:ext cx="0" cy="0"/>
+          <a:chOff x="0" y="0"/>
+          <a:chExt cx="0" cy="0"/>
+        </a:xfrm>
+      </p:grpSpPr>
+      <p:sp>
+        <p:nvSpPr>
+          <p:cNvPr id="2" name="object 2" descr="$PPTXTitle">
+            <a:extLst>
+              <a:ext uri="{FF2B5EF4-FFF2-40B4-BE49-F238E27FC236}">
+                <a16:creationId xmlns:a16="http://schemas.microsoft.com/office/drawing/2014/main" id="{54132864-A5EB-2D1B-68CD-F46B1FA12C25}"/>
+              </a:ext>
+            </a:extLst>
+          </p:cNvPr>
+          <p:cNvSpPr txBox="1">
+            <a:spLocks noGrp="1"/>
+          </p:cNvSpPr>
+          <p:nvPr>
+            <p:ph type="title"/>
+          </p:nvPr>
+        </p:nvSpPr>
+        <p:spPr>
+          <a:prstGeom prst="rect">
+            <a:avLst/>
+          </a:prstGeom>
+        </p:spPr>
+        <p:txBody>
+          <a:bodyPr vert="horz" wrap="square" lIns="0" tIns="12065" rIns="0" bIns="0" rtlCol="0">
+            <a:spAutoFit/>
+          </a:bodyPr>
+          <a:lstStyle/>
+          <a:p>
+            <a:pPr marL="12700">
+              <a:lnSpc>
+                <a:spcPct val="100000"/>
+              </a:lnSpc>
+              <a:spcBef>
+                <a:spcPts val="95"/>
+              </a:spcBef>
+            </a:pPr>
+            <a:r>
+              <a:rPr lang="ko-KR" altLang="en-US" spc="-25" dirty="0"/>
+              <a:t>작업내용 </a:t>
+            </a:r>
+            <a:r>
+              <a:rPr lang="en-US" altLang="ko-KR" spc="-25" dirty="0"/>
+              <a:t>– </a:t>
+            </a:r>
+            <a:r>
+              <a:rPr lang="ko-KR" altLang="en-US" spc="-25" dirty="0"/>
+              <a:t>도로 데이터 변경</a:t>
+            </a:r>
+            <a:endParaRPr spc="-25" dirty="0"/>
+          </a:p>
+        </p:txBody>
+      </p:sp>
+      <p:sp>
+        <p:nvSpPr>
+          <p:cNvPr id="4" name="object 4">
+            <a:extLst>
+              <a:ext uri="{FF2B5EF4-FFF2-40B4-BE49-F238E27FC236}">
+                <a16:creationId xmlns:a16="http://schemas.microsoft.com/office/drawing/2014/main" id="{CE20E845-1A36-1E17-1AF3-914B5B2DCA99}"/>
+              </a:ext>
+            </a:extLst>
+          </p:cNvPr>
+          <p:cNvSpPr/>
+          <p:nvPr/>
+        </p:nvSpPr>
+        <p:spPr>
+          <a:xfrm>
+            <a:off x="838200" y="1311910"/>
+            <a:ext cx="10515600" cy="0"/>
+          </a:xfrm>
+          <a:custGeom>
+            <a:avLst/>
+            <a:gdLst/>
+            <a:ahLst/>
+            <a:cxnLst/>
+            <a:rect l="l" t="t" r="r" b="b"/>
+            <a:pathLst>
+              <a:path w="10515600">
+                <a:moveTo>
+                  <a:pt x="0" y="0"/>
+                </a:moveTo>
+                <a:lnTo>
+                  <a:pt x="10515600" y="0"/>
+                </a:lnTo>
+              </a:path>
+            </a:pathLst>
+          </a:custGeom>
+          <a:ln w="28575">
+            <a:solidFill>
+              <a:srgbClr val="CF3C1C"/>
+            </a:solidFill>
+          </a:ln>
+        </p:spPr>
+        <p:txBody>
+          <a:bodyPr wrap="square" lIns="0" tIns="0" rIns="0" bIns="0" rtlCol="0"/>
+          <a:lstStyle/>
+          <a:p>
+            <a:endParaRPr/>
+          </a:p>
+        </p:txBody>
+      </p:sp>
+      <p:sp>
+        <p:nvSpPr>
+          <p:cNvPr id="7" name="내용 개체 틀 2">
+            <a:extLst>
+              <a:ext uri="{FF2B5EF4-FFF2-40B4-BE49-F238E27FC236}">
+                <a16:creationId xmlns:a16="http://schemas.microsoft.com/office/drawing/2014/main" id="{0657723E-4F33-B27C-A034-63B60427F1BC}"/>
+              </a:ext>
+            </a:extLst>
+          </p:cNvPr>
+          <p:cNvSpPr txBox="1">
+            <a:spLocks/>
+          </p:cNvSpPr>
+          <p:nvPr/>
+        </p:nvSpPr>
+        <p:spPr>
+          <a:xfrm>
+            <a:off x="1028700" y="1520351"/>
+            <a:ext cx="10134600" cy="3390095"/>
+          </a:xfrm>
+          <a:prstGeom prst="rect">
+            <a:avLst/>
+          </a:prstGeom>
+        </p:spPr>
+        <p:txBody>
+          <a:bodyPr wrap="square" lIns="0" tIns="0" rIns="0" bIns="0">
+            <a:spAutoFit/>
+          </a:bodyPr>
+          <a:lstStyle>
+            <a:lvl1pPr marL="0">
+              <a:defRPr b="0" i="0">
+                <a:solidFill>
+                  <a:schemeClr val="tx1"/>
+                </a:solidFill>
+                <a:latin typeface="+mn-lt"/>
+                <a:ea typeface="+mn-ea"/>
+                <a:cs typeface="+mn-cs"/>
+              </a:defRPr>
+            </a:lvl1pPr>
+            <a:lvl2pPr marL="457200">
+              <a:defRPr>
+                <a:latin typeface="+mn-lt"/>
+                <a:ea typeface="+mn-ea"/>
+                <a:cs typeface="+mn-cs"/>
+              </a:defRPr>
+            </a:lvl2pPr>
+            <a:lvl3pPr marL="914400">
+              <a:defRPr>
+                <a:latin typeface="+mn-lt"/>
+                <a:ea typeface="+mn-ea"/>
+                <a:cs typeface="+mn-cs"/>
+              </a:defRPr>
+            </a:lvl3pPr>
+            <a:lvl4pPr marL="1371600">
+              <a:defRPr>
+                <a:latin typeface="+mn-lt"/>
+                <a:ea typeface="+mn-ea"/>
+                <a:cs typeface="+mn-cs"/>
+              </a:defRPr>
+            </a:lvl4pPr>
+            <a:lvl5pPr marL="1828800">
+              <a:defRPr>
+                <a:latin typeface="+mn-lt"/>
+                <a:ea typeface="+mn-ea"/>
+                <a:cs typeface="+mn-cs"/>
+              </a:defRPr>
+            </a:lvl5pPr>
+            <a:lvl6pPr marL="2286000">
+              <a:defRPr>
+                <a:latin typeface="+mn-lt"/>
+                <a:ea typeface="+mn-ea"/>
+                <a:cs typeface="+mn-cs"/>
+              </a:defRPr>
+            </a:lvl6pPr>
+            <a:lvl7pPr marL="2743200">
+              <a:defRPr>
+                <a:latin typeface="+mn-lt"/>
+                <a:ea typeface="+mn-ea"/>
+                <a:cs typeface="+mn-cs"/>
+              </a:defRPr>
+            </a:lvl7pPr>
+            <a:lvl8pPr marL="3200400">
+              <a:defRPr>
+                <a:latin typeface="+mn-lt"/>
+                <a:ea typeface="+mn-ea"/>
+                <a:cs typeface="+mn-cs"/>
+              </a:defRPr>
+            </a:lvl8pPr>
+            <a:lvl9pPr marL="3657600">
+              <a:defRPr>
+                <a:latin typeface="+mn-lt"/>
+                <a:ea typeface="+mn-ea"/>
+                <a:cs typeface="+mn-cs"/>
+              </a:defRPr>
+            </a:lvl9pPr>
+          </a:lstStyle>
+          <a:p>
+            <a:pPr marL="285750" indent="-285750">
+              <a:lnSpc>
+                <a:spcPct val="200000"/>
+              </a:lnSpc>
+              <a:buFont typeface="Arial" panose="020B0604020202020204" pitchFamily="34" charset="0"/>
+              <a:buChar char="•"/>
+            </a:pPr>
+            <a:r>
+              <a:rPr lang="ko-KR" altLang="en-US" sz="1600" dirty="0">
+                <a:latin typeface="+mn-ea"/>
+                <a:cs typeface="Malgun Gothic"/>
+              </a:rPr>
+              <a:t>기존 도로 데이터 구조</a:t>
+            </a:r>
+            <a:endParaRPr lang="en-US" altLang="ko-KR" sz="1200" dirty="0">
+              <a:latin typeface="Malgun Gothic"/>
+              <a:cs typeface="Malgun Gothic"/>
+            </a:endParaRPr>
+          </a:p>
+          <a:p>
+            <a:pPr marL="742950" lvl="1" indent="-285750">
+              <a:lnSpc>
+                <a:spcPct val="150000"/>
+              </a:lnSpc>
+              <a:buFont typeface="Arial" panose="020B0604020202020204" pitchFamily="34" charset="0"/>
+              <a:buChar char="•"/>
+            </a:pPr>
+            <a:r>
+              <a:rPr lang="en-US" altLang="ko-KR" sz="1400" dirty="0"/>
+              <a:t>Road : </a:t>
+            </a:r>
+            <a:r>
+              <a:rPr lang="ko-KR" altLang="en-US" sz="1400" dirty="0"/>
+              <a:t>메타 데이터 컨테이너 </a:t>
+            </a:r>
+            <a:r>
+              <a:rPr lang="en-US" altLang="ko-KR" sz="1400" dirty="0"/>
+              <a:t>(</a:t>
+            </a:r>
+            <a:r>
+              <a:rPr lang="ko-KR" altLang="en-US" sz="1400" dirty="0"/>
+              <a:t>제한속도 등</a:t>
+            </a:r>
+            <a:r>
+              <a:rPr lang="en-US" altLang="ko-KR" sz="1400" dirty="0"/>
+              <a:t>)</a:t>
+            </a:r>
+          </a:p>
+          <a:p>
+            <a:pPr marL="742950" lvl="1" indent="-285750">
+              <a:lnSpc>
+                <a:spcPct val="150000"/>
+              </a:lnSpc>
+              <a:buFont typeface="Arial" panose="020B0604020202020204" pitchFamily="34" charset="0"/>
+              <a:buChar char="•"/>
+            </a:pPr>
+            <a:r>
+              <a:rPr lang="en-US" altLang="ko-KR" sz="1400" dirty="0"/>
+              <a:t>Lane : </a:t>
+            </a:r>
+            <a:r>
+              <a:rPr lang="ko-KR" altLang="en-US" sz="1400" dirty="0"/>
+              <a:t>각각 독립된 레인</a:t>
+            </a:r>
+            <a:r>
+              <a:rPr lang="en-US" altLang="ko-KR" sz="1400" dirty="0"/>
+              <a:t>, </a:t>
+            </a:r>
+            <a:r>
+              <a:rPr lang="ko-KR" altLang="en-US" sz="1400" dirty="0"/>
+              <a:t>같은 방향 옆차선만 </a:t>
+            </a:r>
+            <a:r>
+              <a:rPr lang="en-US" altLang="ko-KR" sz="1400" dirty="0"/>
+              <a:t>left,</a:t>
+            </a:r>
+            <a:r>
+              <a:rPr lang="ko-KR" altLang="en-US" sz="1400" dirty="0"/>
+              <a:t> </a:t>
+            </a:r>
+            <a:r>
+              <a:rPr lang="en-US" altLang="ko-KR" sz="1400" dirty="0"/>
+              <a:t>right</a:t>
+            </a:r>
+            <a:r>
+              <a:rPr lang="ko-KR" altLang="en-US" sz="1400" dirty="0"/>
+              <a:t>로 연결되어 있음</a:t>
+            </a:r>
+            <a:r>
+              <a:rPr lang="en-US" altLang="ko-KR" sz="1400" dirty="0"/>
+              <a:t>, Road ID</a:t>
+            </a:r>
+            <a:r>
+              <a:rPr lang="ko-KR" altLang="en-US" sz="1400" dirty="0"/>
+              <a:t> 로 메타데이터 참조</a:t>
+            </a:r>
+            <a:endParaRPr lang="en-US" altLang="ko-KR" sz="1400" dirty="0"/>
+          </a:p>
+          <a:p>
+            <a:pPr marL="285750" indent="-285750">
+              <a:lnSpc>
+                <a:spcPct val="200000"/>
+              </a:lnSpc>
+              <a:buFont typeface="Arial" panose="020B0604020202020204" pitchFamily="34" charset="0"/>
+              <a:buChar char="•"/>
+            </a:pPr>
+            <a:r>
+              <a:rPr lang="ko-KR" altLang="en-US" sz="1600" dirty="0">
+                <a:latin typeface="+mn-ea"/>
+                <a:cs typeface="Malgun Gothic"/>
+              </a:rPr>
+              <a:t>변경 후 도로 데이터 구조</a:t>
+            </a:r>
+            <a:endParaRPr lang="en-US" altLang="ko-KR" sz="1200" dirty="0">
+              <a:latin typeface="Malgun Gothic"/>
+              <a:cs typeface="Malgun Gothic"/>
+            </a:endParaRPr>
+          </a:p>
+          <a:p>
+            <a:pPr marL="742950" lvl="1" indent="-285750">
+              <a:lnSpc>
+                <a:spcPct val="150000"/>
+              </a:lnSpc>
+              <a:buFont typeface="Arial" panose="020B0604020202020204" pitchFamily="34" charset="0"/>
+              <a:buChar char="•"/>
+            </a:pPr>
+            <a:r>
+              <a:rPr lang="en-US" altLang="ko-KR" sz="1400" dirty="0"/>
+              <a:t>Road : </a:t>
+            </a:r>
+            <a:r>
+              <a:rPr lang="ko-KR" altLang="en-US" sz="1400" dirty="0"/>
+              <a:t>중심선</a:t>
+            </a:r>
+            <a:r>
+              <a:rPr lang="en-US" altLang="ko-KR" sz="1400" dirty="0"/>
+              <a:t>, </a:t>
+            </a:r>
+            <a:r>
+              <a:rPr lang="ko-KR" altLang="en-US" sz="1400" dirty="0"/>
+              <a:t>위치</a:t>
+            </a:r>
+            <a:endParaRPr lang="en-US" altLang="ko-KR" sz="1400" dirty="0"/>
+          </a:p>
+          <a:p>
+            <a:pPr marL="742950" lvl="1" indent="-285750">
+              <a:lnSpc>
+                <a:spcPct val="150000"/>
+              </a:lnSpc>
+              <a:buFont typeface="Arial" panose="020B0604020202020204" pitchFamily="34" charset="0"/>
+              <a:buChar char="•"/>
+            </a:pPr>
+            <a:r>
+              <a:rPr lang="en-US" altLang="ko-KR" sz="1400" dirty="0"/>
+              <a:t>Lane  : Road</a:t>
+            </a:r>
+            <a:r>
+              <a:rPr lang="ko-KR" altLang="en-US" sz="1400" dirty="0"/>
+              <a:t>의 중심선의 </a:t>
+            </a:r>
+            <a:r>
+              <a:rPr lang="en-US" altLang="ko-KR" sz="1400" dirty="0"/>
+              <a:t>(</a:t>
+            </a:r>
+            <a:r>
+              <a:rPr lang="ko-KR" altLang="en-US" sz="1400" dirty="0"/>
+              <a:t>횡방향 오프셋</a:t>
+            </a:r>
+            <a:r>
+              <a:rPr lang="en-US" altLang="ko-KR" sz="1400" dirty="0"/>
+              <a:t>, </a:t>
+            </a:r>
+            <a:r>
+              <a:rPr lang="ko-KR" altLang="en-US" sz="1400" dirty="0"/>
+              <a:t>진행방향</a:t>
+            </a:r>
+            <a:r>
+              <a:rPr lang="en-US" altLang="ko-KR" sz="1400" dirty="0"/>
+              <a:t>, </a:t>
+            </a:r>
+            <a:r>
+              <a:rPr lang="ko-KR" altLang="en-US" sz="1400" dirty="0"/>
+              <a:t>타입</a:t>
+            </a:r>
+            <a:r>
+              <a:rPr lang="en-US" altLang="ko-KR" sz="1400" dirty="0"/>
+              <a:t>) </a:t>
+            </a:r>
+            <a:r>
+              <a:rPr lang="ko-KR" altLang="en-US" sz="1400" dirty="0"/>
+              <a:t>으로 표현됨</a:t>
+            </a:r>
+            <a:endParaRPr lang="en-US" altLang="ko-KR" sz="1400" dirty="0"/>
+          </a:p>
+          <a:p>
+            <a:pPr marL="742950" lvl="1" indent="-285750">
+              <a:lnSpc>
+                <a:spcPct val="150000"/>
+              </a:lnSpc>
+              <a:buFont typeface="Arial" panose="020B0604020202020204" pitchFamily="34" charset="0"/>
+              <a:buChar char="•"/>
+            </a:pPr>
+            <a:endParaRPr lang="en-US" altLang="ko-KR" sz="1200" dirty="0"/>
+          </a:p>
+          <a:p>
+            <a:pPr marL="742950" lvl="1" indent="-285750">
+              <a:lnSpc>
+                <a:spcPct val="150000"/>
+              </a:lnSpc>
+              <a:buFont typeface="Arial" panose="020B0604020202020204" pitchFamily="34" charset="0"/>
+              <a:buChar char="•"/>
+            </a:pPr>
+            <a:endParaRPr lang="en-US" altLang="ko-KR" sz="1200" dirty="0">
+              <a:latin typeface="Malgun Gothic"/>
+              <a:cs typeface="Malgun Gothic"/>
+            </a:endParaRPr>
+          </a:p>
+          <a:p>
+            <a:pPr marL="742950" lvl="1" indent="-285750">
+              <a:lnSpc>
+                <a:spcPct val="150000"/>
+              </a:lnSpc>
+              <a:buFont typeface="Arial" panose="020B0604020202020204" pitchFamily="34" charset="0"/>
+              <a:buChar char="•"/>
+            </a:pPr>
+            <a:endParaRPr lang="en-US" altLang="ko-KR" sz="1200" dirty="0">
+              <a:latin typeface="Malgun Gothic"/>
+              <a:cs typeface="Malgun Gothic"/>
+            </a:endParaRPr>
+          </a:p>
+          <a:p>
+            <a:pPr marL="742950" lvl="1" indent="-285750">
+              <a:lnSpc>
+                <a:spcPct val="150000"/>
+              </a:lnSpc>
+              <a:buFont typeface="Arial" panose="020B0604020202020204" pitchFamily="34" charset="0"/>
+              <a:buChar char="•"/>
+            </a:pPr>
+            <a:endParaRPr lang="en-US" altLang="ko-KR" sz="1400" dirty="0">
+              <a:latin typeface="+mn-ea"/>
+            </a:endParaRPr>
+          </a:p>
+        </p:txBody>
+      </p:sp>
+      <p:sp>
+        <p:nvSpPr>
+          <p:cNvPr id="3" name="직사각형 2">
+            <a:extLst>
+              <a:ext uri="{FF2B5EF4-FFF2-40B4-BE49-F238E27FC236}">
+                <a16:creationId xmlns:a16="http://schemas.microsoft.com/office/drawing/2014/main" id="{81D19127-CAB4-EDB9-AF04-485D9800B1C3}"/>
+              </a:ext>
+            </a:extLst>
+          </p:cNvPr>
+          <p:cNvSpPr/>
+          <p:nvPr/>
+        </p:nvSpPr>
+        <p:spPr>
+          <a:xfrm>
+            <a:off x="1295400" y="4191000"/>
+            <a:ext cx="4038600" cy="2362200"/>
+          </a:xfrm>
+          <a:prstGeom prst="rect">
+            <a:avLst/>
+          </a:prstGeom>
+          <a:solidFill>
+            <a:schemeClr val="bg1">
+              <a:lumMod val="65000"/>
+            </a:schemeClr>
+          </a:solidFill>
+          <a:ln>
+            <a:noFill/>
+          </a:ln>
+        </p:spPr>
+        <p:style>
+          <a:lnRef idx="2">
+            <a:schemeClr val="accent1">
+              <a:shade val="15000"/>
+            </a:schemeClr>
+          </a:lnRef>
+          <a:fillRef idx="1">
+            <a:schemeClr val="accent1"/>
+          </a:fillRef>
+          <a:effectRef idx="0">
+            <a:schemeClr val="accent1"/>
+          </a:effectRef>
+          <a:fontRef idx="minor">
+            <a:schemeClr val="lt1"/>
+          </a:fontRef>
+        </p:style>
+        <p:txBody>
+          <a:bodyPr rtlCol="0" anchor="ctr"/>
+          <a:lstStyle/>
+          <a:p>
+            <a:pPr algn="ctr"/>
+            <a:endParaRPr lang="ko-KR" altLang="en-US"/>
+          </a:p>
+        </p:txBody>
+      </p:sp>
+      <p:cxnSp>
+        <p:nvCxnSpPr>
+          <p:cNvPr id="6" name="직선 연결선 5">
+            <a:extLst>
+              <a:ext uri="{FF2B5EF4-FFF2-40B4-BE49-F238E27FC236}">
+                <a16:creationId xmlns:a16="http://schemas.microsoft.com/office/drawing/2014/main" id="{A1BC53B9-6F9F-F793-DB07-7C79BF30EEB0}"/>
+              </a:ext>
+            </a:extLst>
+          </p:cNvPr>
+          <p:cNvCxnSpPr>
+            <a:stCxn id="3" idx="0"/>
+            <a:endCxn id="3" idx="2"/>
+          </p:cNvCxnSpPr>
+          <p:nvPr/>
+        </p:nvCxnSpPr>
+        <p:spPr>
+          <a:xfrm>
+            <a:off x="3314700" y="4191000"/>
+            <a:ext cx="0" cy="2362200"/>
+          </a:xfrm>
+          <a:prstGeom prst="line">
+            <a:avLst/>
+          </a:prstGeom>
+          <a:ln w="76200"/>
+        </p:spPr>
+        <p:style>
+          <a:lnRef idx="1">
+            <a:schemeClr val="accent6"/>
+          </a:lnRef>
+          <a:fillRef idx="0">
+            <a:schemeClr val="accent6"/>
+          </a:fillRef>
+          <a:effectRef idx="0">
+            <a:schemeClr val="accent6"/>
+          </a:effectRef>
+          <a:fontRef idx="minor">
+            <a:schemeClr val="tx1"/>
+          </a:fontRef>
+        </p:style>
+      </p:cxnSp>
+      <p:cxnSp>
+        <p:nvCxnSpPr>
+          <p:cNvPr id="9" name="직선 연결선 8">
+            <a:extLst>
+              <a:ext uri="{FF2B5EF4-FFF2-40B4-BE49-F238E27FC236}">
+                <a16:creationId xmlns:a16="http://schemas.microsoft.com/office/drawing/2014/main" id="{7225333A-5812-2089-8CC4-F5D448C6A529}"/>
+              </a:ext>
+            </a:extLst>
+          </p:cNvPr>
+          <p:cNvCxnSpPr/>
+          <p:nvPr/>
+        </p:nvCxnSpPr>
+        <p:spPr>
+          <a:xfrm>
+            <a:off x="4267200" y="4191000"/>
+            <a:ext cx="0" cy="2362200"/>
+          </a:xfrm>
+          <a:prstGeom prst="line">
+            <a:avLst/>
+          </a:prstGeom>
+          <a:ln w="19050" cap="flat" cmpd="sng" algn="ctr">
+            <a:solidFill>
+              <a:schemeClr val="bg1"/>
+            </a:solidFill>
+            <a:prstDash val="dash"/>
+            <a:round/>
+            <a:headEnd type="none" w="med" len="med"/>
+            <a:tailEnd type="none" w="med" len="med"/>
+          </a:ln>
+        </p:spPr>
+        <p:style>
+          <a:lnRef idx="0">
+            <a:scrgbClr r="0" g="0" b="0"/>
+          </a:lnRef>
+          <a:fillRef idx="0">
+            <a:scrgbClr r="0" g="0" b="0"/>
+          </a:fillRef>
+          <a:effectRef idx="0">
+            <a:scrgbClr r="0" g="0" b="0"/>
+          </a:effectRef>
+          <a:fontRef idx="minor">
+            <a:schemeClr val="tx1"/>
+          </a:fontRef>
+        </p:style>
+      </p:cxnSp>
+      <p:cxnSp>
+        <p:nvCxnSpPr>
+          <p:cNvPr id="12" name="직선 연결선 11">
+            <a:extLst>
+              <a:ext uri="{FF2B5EF4-FFF2-40B4-BE49-F238E27FC236}">
+                <a16:creationId xmlns:a16="http://schemas.microsoft.com/office/drawing/2014/main" id="{01A5F782-DF87-E9A5-88E2-36420A72DD56}"/>
+              </a:ext>
+            </a:extLst>
+          </p:cNvPr>
+          <p:cNvCxnSpPr/>
+          <p:nvPr/>
+        </p:nvCxnSpPr>
+        <p:spPr>
+          <a:xfrm>
+            <a:off x="2286000" y="4191000"/>
+            <a:ext cx="0" cy="2362200"/>
+          </a:xfrm>
+          <a:prstGeom prst="line">
+            <a:avLst/>
+          </a:prstGeom>
+          <a:ln w="19050" cap="flat" cmpd="sng" algn="ctr">
+            <a:solidFill>
+              <a:schemeClr val="bg1"/>
+            </a:solidFill>
+            <a:prstDash val="dash"/>
+            <a:round/>
+            <a:headEnd type="none" w="med" len="med"/>
+            <a:tailEnd type="none" w="med" len="med"/>
+          </a:ln>
+        </p:spPr>
+        <p:style>
+          <a:lnRef idx="0">
+            <a:scrgbClr r="0" g="0" b="0"/>
+          </a:lnRef>
+          <a:fillRef idx="0">
+            <a:scrgbClr r="0" g="0" b="0"/>
+          </a:fillRef>
+          <a:effectRef idx="0">
+            <a:scrgbClr r="0" g="0" b="0"/>
+          </a:effectRef>
+          <a:fontRef idx="minor">
+            <a:schemeClr val="tx1"/>
+          </a:fontRef>
+        </p:style>
+      </p:cxnSp>
+      <p:cxnSp>
+        <p:nvCxnSpPr>
+          <p:cNvPr id="23" name="직선 화살표 연결선 22">
+            <a:extLst>
+              <a:ext uri="{FF2B5EF4-FFF2-40B4-BE49-F238E27FC236}">
+                <a16:creationId xmlns:a16="http://schemas.microsoft.com/office/drawing/2014/main" id="{52B0D128-87E0-738F-5BC3-4F3D65142E1A}"/>
+              </a:ext>
+            </a:extLst>
+          </p:cNvPr>
+          <p:cNvCxnSpPr>
+            <a:cxnSpLocks/>
+          </p:cNvCxnSpPr>
+          <p:nvPr/>
+        </p:nvCxnSpPr>
+        <p:spPr>
+          <a:xfrm>
+            <a:off x="2819400" y="4495800"/>
+            <a:ext cx="0" cy="1676400"/>
+          </a:xfrm>
+          <a:prstGeom prst="straightConnector1">
+            <a:avLst/>
+          </a:prstGeom>
+          <a:ln>
+            <a:solidFill>
+              <a:srgbClr val="FF0000"/>
+            </a:solidFill>
+            <a:tailEnd type="triangle"/>
+          </a:ln>
+        </p:spPr>
+        <p:style>
+          <a:lnRef idx="1">
+            <a:schemeClr val="accent1"/>
+          </a:lnRef>
+          <a:fillRef idx="0">
+            <a:schemeClr val="accent1"/>
+          </a:fillRef>
+          <a:effectRef idx="0">
+            <a:schemeClr val="accent1"/>
+          </a:effectRef>
+          <a:fontRef idx="minor">
+            <a:schemeClr val="tx1"/>
+          </a:fontRef>
+        </p:style>
+      </p:cxnSp>
+      <p:cxnSp>
+        <p:nvCxnSpPr>
+          <p:cNvPr id="25" name="직선 화살표 연결선 24">
+            <a:extLst>
+              <a:ext uri="{FF2B5EF4-FFF2-40B4-BE49-F238E27FC236}">
+                <a16:creationId xmlns:a16="http://schemas.microsoft.com/office/drawing/2014/main" id="{3C0279AB-F252-70D3-E21C-6106EA0BF504}"/>
+              </a:ext>
+            </a:extLst>
+          </p:cNvPr>
+          <p:cNvCxnSpPr/>
+          <p:nvPr/>
+        </p:nvCxnSpPr>
+        <p:spPr>
+          <a:xfrm flipV="1">
+            <a:off x="3810000" y="4495800"/>
+            <a:ext cx="0" cy="1676400"/>
+          </a:xfrm>
+          <a:prstGeom prst="straightConnector1">
+            <a:avLst/>
+          </a:prstGeom>
+          <a:ln>
+            <a:solidFill>
+              <a:srgbClr val="FF0000"/>
+            </a:solidFill>
+            <a:tailEnd type="triangle"/>
+          </a:ln>
+        </p:spPr>
+        <p:style>
+          <a:lnRef idx="1">
+            <a:schemeClr val="accent1"/>
+          </a:lnRef>
+          <a:fillRef idx="0">
+            <a:schemeClr val="accent1"/>
+          </a:fillRef>
+          <a:effectRef idx="0">
+            <a:schemeClr val="accent1"/>
+          </a:effectRef>
+          <a:fontRef idx="minor">
+            <a:schemeClr val="tx1"/>
+          </a:fontRef>
+        </p:style>
+      </p:cxnSp>
+      <p:cxnSp>
+        <p:nvCxnSpPr>
+          <p:cNvPr id="26" name="직선 화살표 연결선 25">
+            <a:extLst>
+              <a:ext uri="{FF2B5EF4-FFF2-40B4-BE49-F238E27FC236}">
+                <a16:creationId xmlns:a16="http://schemas.microsoft.com/office/drawing/2014/main" id="{A856E99F-6E0B-A033-D809-F704FF78D67D}"/>
+              </a:ext>
+            </a:extLst>
+          </p:cNvPr>
+          <p:cNvCxnSpPr/>
+          <p:nvPr/>
+        </p:nvCxnSpPr>
+        <p:spPr>
+          <a:xfrm flipV="1">
+            <a:off x="4876800" y="4495800"/>
+            <a:ext cx="0" cy="1676400"/>
+          </a:xfrm>
+          <a:prstGeom prst="straightConnector1">
+            <a:avLst/>
+          </a:prstGeom>
+          <a:ln>
+            <a:solidFill>
+              <a:srgbClr val="FF0000"/>
+            </a:solidFill>
+            <a:tailEnd type="triangle"/>
+          </a:ln>
+        </p:spPr>
+        <p:style>
+          <a:lnRef idx="1">
+            <a:schemeClr val="accent1"/>
+          </a:lnRef>
+          <a:fillRef idx="0">
+            <a:schemeClr val="accent1"/>
+          </a:fillRef>
+          <a:effectRef idx="0">
+            <a:schemeClr val="accent1"/>
+          </a:effectRef>
+          <a:fontRef idx="minor">
+            <a:schemeClr val="tx1"/>
+          </a:fontRef>
+        </p:style>
+      </p:cxnSp>
+      <p:cxnSp>
+        <p:nvCxnSpPr>
+          <p:cNvPr id="29" name="직선 화살표 연결선 28">
+            <a:extLst>
+              <a:ext uri="{FF2B5EF4-FFF2-40B4-BE49-F238E27FC236}">
+                <a16:creationId xmlns:a16="http://schemas.microsoft.com/office/drawing/2014/main" id="{698A359F-0E59-F201-61F8-20623F718CE9}"/>
+              </a:ext>
+            </a:extLst>
+          </p:cNvPr>
+          <p:cNvCxnSpPr>
+            <a:cxnSpLocks/>
+          </p:cNvCxnSpPr>
+          <p:nvPr/>
+        </p:nvCxnSpPr>
+        <p:spPr>
+          <a:xfrm>
+            <a:off x="1752600" y="4495800"/>
+            <a:ext cx="0" cy="1676400"/>
+          </a:xfrm>
+          <a:prstGeom prst="straightConnector1">
+            <a:avLst/>
+          </a:prstGeom>
+          <a:ln>
+            <a:solidFill>
+              <a:srgbClr val="FF0000"/>
+            </a:solidFill>
+            <a:tailEnd type="triangle"/>
+          </a:ln>
+        </p:spPr>
+        <p:style>
+          <a:lnRef idx="1">
+            <a:schemeClr val="accent1"/>
+          </a:lnRef>
+          <a:fillRef idx="0">
+            <a:schemeClr val="accent1"/>
+          </a:fillRef>
+          <a:effectRef idx="0">
+            <a:schemeClr val="accent1"/>
+          </a:effectRef>
+          <a:fontRef idx="minor">
+            <a:schemeClr val="tx1"/>
+          </a:fontRef>
+        </p:style>
+      </p:cxnSp>
+      <p:sp>
+        <p:nvSpPr>
+          <p:cNvPr id="30" name="직사각형 29">
+            <a:extLst>
+              <a:ext uri="{FF2B5EF4-FFF2-40B4-BE49-F238E27FC236}">
+                <a16:creationId xmlns:a16="http://schemas.microsoft.com/office/drawing/2014/main" id="{E431BADA-B0F4-BBC2-BA36-70074067CD66}"/>
+              </a:ext>
+            </a:extLst>
+          </p:cNvPr>
+          <p:cNvSpPr/>
+          <p:nvPr/>
+        </p:nvSpPr>
+        <p:spPr>
+          <a:xfrm>
+            <a:off x="6629400" y="4156549"/>
+            <a:ext cx="4038600" cy="2362200"/>
+          </a:xfrm>
+          <a:prstGeom prst="rect">
+            <a:avLst/>
+          </a:prstGeom>
+          <a:solidFill>
+            <a:schemeClr val="bg1">
+              <a:lumMod val="65000"/>
+            </a:schemeClr>
+          </a:solidFill>
+          <a:ln>
+            <a:noFill/>
+          </a:ln>
+        </p:spPr>
+        <p:style>
+          <a:lnRef idx="2">
+            <a:schemeClr val="accent1">
+              <a:shade val="15000"/>
+            </a:schemeClr>
+          </a:lnRef>
+          <a:fillRef idx="1">
+            <a:schemeClr val="accent1"/>
+          </a:fillRef>
+          <a:effectRef idx="0">
+            <a:schemeClr val="accent1"/>
+          </a:effectRef>
+          <a:fontRef idx="minor">
+            <a:schemeClr val="lt1"/>
+          </a:fontRef>
+        </p:style>
+        <p:txBody>
+          <a:bodyPr rtlCol="0" anchor="ctr"/>
+          <a:lstStyle/>
+          <a:p>
+            <a:pPr algn="ctr"/>
+            <a:endParaRPr lang="ko-KR" altLang="en-US"/>
+          </a:p>
+        </p:txBody>
+      </p:sp>
+      <p:cxnSp>
+        <p:nvCxnSpPr>
+          <p:cNvPr id="31" name="직선 연결선 30">
+            <a:extLst>
+              <a:ext uri="{FF2B5EF4-FFF2-40B4-BE49-F238E27FC236}">
+                <a16:creationId xmlns:a16="http://schemas.microsoft.com/office/drawing/2014/main" id="{C6F335AC-6206-2A1B-F036-621E1D8E9995}"/>
+              </a:ext>
+            </a:extLst>
+          </p:cNvPr>
+          <p:cNvCxnSpPr>
+            <a:stCxn id="30" idx="0"/>
+            <a:endCxn id="30" idx="2"/>
+          </p:cNvCxnSpPr>
+          <p:nvPr/>
+        </p:nvCxnSpPr>
+        <p:spPr>
+          <a:xfrm>
+            <a:off x="8648700" y="4156549"/>
+            <a:ext cx="0" cy="2362200"/>
+          </a:xfrm>
+          <a:prstGeom prst="line">
+            <a:avLst/>
+          </a:prstGeom>
+          <a:ln w="76200"/>
+        </p:spPr>
+        <p:style>
+          <a:lnRef idx="1">
+            <a:schemeClr val="accent6"/>
+          </a:lnRef>
+          <a:fillRef idx="0">
+            <a:schemeClr val="accent6"/>
+          </a:fillRef>
+          <a:effectRef idx="0">
+            <a:schemeClr val="accent6"/>
+          </a:effectRef>
+          <a:fontRef idx="minor">
+            <a:schemeClr val="tx1"/>
+          </a:fontRef>
+        </p:style>
+      </p:cxnSp>
+      <p:cxnSp>
+        <p:nvCxnSpPr>
+          <p:cNvPr id="32" name="직선 연결선 31">
+            <a:extLst>
+              <a:ext uri="{FF2B5EF4-FFF2-40B4-BE49-F238E27FC236}">
+                <a16:creationId xmlns:a16="http://schemas.microsoft.com/office/drawing/2014/main" id="{EDF90958-EE93-5BF9-DFD0-77AE79CF9CFC}"/>
+              </a:ext>
+            </a:extLst>
+          </p:cNvPr>
+          <p:cNvCxnSpPr/>
+          <p:nvPr/>
+        </p:nvCxnSpPr>
+        <p:spPr>
+          <a:xfrm>
+            <a:off x="9601200" y="4156549"/>
+            <a:ext cx="0" cy="2362200"/>
+          </a:xfrm>
+          <a:prstGeom prst="line">
+            <a:avLst/>
+          </a:prstGeom>
+          <a:ln w="19050" cap="flat" cmpd="sng" algn="ctr">
+            <a:solidFill>
+              <a:schemeClr val="bg1"/>
+            </a:solidFill>
+            <a:prstDash val="dash"/>
+            <a:round/>
+            <a:headEnd type="none" w="med" len="med"/>
+            <a:tailEnd type="none" w="med" len="med"/>
+          </a:ln>
+        </p:spPr>
+        <p:style>
+          <a:lnRef idx="0">
+            <a:scrgbClr r="0" g="0" b="0"/>
+          </a:lnRef>
+          <a:fillRef idx="0">
+            <a:scrgbClr r="0" g="0" b="0"/>
+          </a:fillRef>
+          <a:effectRef idx="0">
+            <a:scrgbClr r="0" g="0" b="0"/>
+          </a:effectRef>
+          <a:fontRef idx="minor">
+            <a:schemeClr val="tx1"/>
+          </a:fontRef>
+        </p:style>
+      </p:cxnSp>
+      <p:cxnSp>
+        <p:nvCxnSpPr>
+          <p:cNvPr id="33" name="직선 연결선 32">
+            <a:extLst>
+              <a:ext uri="{FF2B5EF4-FFF2-40B4-BE49-F238E27FC236}">
+                <a16:creationId xmlns:a16="http://schemas.microsoft.com/office/drawing/2014/main" id="{D420580B-C772-A74B-4CBB-FBF6B74F3DE6}"/>
+              </a:ext>
+            </a:extLst>
+          </p:cNvPr>
+          <p:cNvCxnSpPr/>
+          <p:nvPr/>
+        </p:nvCxnSpPr>
+        <p:spPr>
+          <a:xfrm>
+            <a:off x="7620000" y="4156549"/>
+            <a:ext cx="0" cy="2362200"/>
+          </a:xfrm>
+          <a:prstGeom prst="line">
+            <a:avLst/>
+          </a:prstGeom>
+          <a:ln w="19050" cap="flat" cmpd="sng" algn="ctr">
+            <a:solidFill>
+              <a:schemeClr val="bg1"/>
+            </a:solidFill>
+            <a:prstDash val="dash"/>
+            <a:round/>
+            <a:headEnd type="none" w="med" len="med"/>
+            <a:tailEnd type="none" w="med" len="med"/>
+          </a:ln>
+        </p:spPr>
+        <p:style>
+          <a:lnRef idx="0">
+            <a:scrgbClr r="0" g="0" b="0"/>
+          </a:lnRef>
+          <a:fillRef idx="0">
+            <a:scrgbClr r="0" g="0" b="0"/>
+          </a:fillRef>
+          <a:effectRef idx="0">
+            <a:scrgbClr r="0" g="0" b="0"/>
+          </a:effectRef>
+          <a:fontRef idx="minor">
+            <a:schemeClr val="tx1"/>
+          </a:fontRef>
+        </p:style>
+      </p:cxnSp>
+      <p:cxnSp>
+        <p:nvCxnSpPr>
+          <p:cNvPr id="35" name="직선 화살표 연결선 34">
+            <a:extLst>
+              <a:ext uri="{FF2B5EF4-FFF2-40B4-BE49-F238E27FC236}">
+                <a16:creationId xmlns:a16="http://schemas.microsoft.com/office/drawing/2014/main" id="{29ADC643-DC96-CFE3-AFED-3B4465C605BC}"/>
+              </a:ext>
+            </a:extLst>
+          </p:cNvPr>
+          <p:cNvCxnSpPr>
+            <a:cxnSpLocks/>
+          </p:cNvCxnSpPr>
+          <p:nvPr/>
+        </p:nvCxnSpPr>
+        <p:spPr>
+          <a:xfrm flipV="1">
+            <a:off x="8648700" y="4267200"/>
+            <a:ext cx="0" cy="2168051"/>
+          </a:xfrm>
+          <a:prstGeom prst="straightConnector1">
+            <a:avLst/>
+          </a:prstGeom>
+          <a:ln w="38100">
+            <a:solidFill>
+              <a:srgbClr val="FF0000"/>
+            </a:solidFill>
+            <a:tailEnd type="triangle"/>
+          </a:ln>
+        </p:spPr>
+        <p:style>
+          <a:lnRef idx="1">
+            <a:schemeClr val="accent1"/>
+          </a:lnRef>
+          <a:fillRef idx="0">
+            <a:schemeClr val="accent1"/>
+          </a:fillRef>
+          <a:effectRef idx="0">
+            <a:schemeClr val="accent1"/>
+          </a:effectRef>
+          <a:fontRef idx="minor">
+            <a:schemeClr val="tx1"/>
+          </a:fontRef>
+        </p:style>
+      </p:cxnSp>
+      <p:sp>
+        <p:nvSpPr>
+          <p:cNvPr id="40" name="TextBox 39">
+            <a:extLst>
+              <a:ext uri="{FF2B5EF4-FFF2-40B4-BE49-F238E27FC236}">
+                <a16:creationId xmlns:a16="http://schemas.microsoft.com/office/drawing/2014/main" id="{D0D8E965-F3EB-EC2D-5A5D-23D4E214ADA1}"/>
+              </a:ext>
+            </a:extLst>
+          </p:cNvPr>
+          <p:cNvSpPr txBox="1"/>
+          <p:nvPr/>
+        </p:nvSpPr>
+        <p:spPr>
+          <a:xfrm>
+            <a:off x="8889508" y="5118850"/>
+            <a:ext cx="447558" cy="369332"/>
+          </a:xfrm>
+          <a:prstGeom prst="rect">
+            <a:avLst/>
+          </a:prstGeom>
+          <a:noFill/>
+        </p:spPr>
+        <p:txBody>
+          <a:bodyPr wrap="none" rtlCol="0">
+            <a:spAutoFit/>
+          </a:bodyPr>
+          <a:lstStyle/>
+          <a:p>
+            <a:r>
+              <a:rPr lang="en-US" altLang="ko-KR" dirty="0"/>
+              <a:t>+1</a:t>
+            </a:r>
+            <a:endParaRPr lang="ko-KR" altLang="en-US" dirty="0"/>
+          </a:p>
+        </p:txBody>
+      </p:sp>
+      <p:sp>
+        <p:nvSpPr>
+          <p:cNvPr id="42" name="TextBox 41">
+            <a:extLst>
+              <a:ext uri="{FF2B5EF4-FFF2-40B4-BE49-F238E27FC236}">
+                <a16:creationId xmlns:a16="http://schemas.microsoft.com/office/drawing/2014/main" id="{197EB946-60D8-454D-8B87-4882050CD509}"/>
+              </a:ext>
+            </a:extLst>
+          </p:cNvPr>
+          <p:cNvSpPr txBox="1"/>
+          <p:nvPr/>
+        </p:nvSpPr>
+        <p:spPr>
+          <a:xfrm>
+            <a:off x="9944447" y="5118850"/>
+            <a:ext cx="447558" cy="369332"/>
+          </a:xfrm>
+          <a:prstGeom prst="rect">
+            <a:avLst/>
+          </a:prstGeom>
+          <a:noFill/>
+        </p:spPr>
+        <p:txBody>
+          <a:bodyPr wrap="none" rtlCol="0">
+            <a:spAutoFit/>
+          </a:bodyPr>
+          <a:lstStyle/>
+          <a:p>
+            <a:r>
+              <a:rPr lang="en-US" altLang="ko-KR" dirty="0"/>
+              <a:t>+2</a:t>
+            </a:r>
+            <a:endParaRPr lang="ko-KR" altLang="en-US" dirty="0"/>
+          </a:p>
+        </p:txBody>
+      </p:sp>
+      <p:sp>
+        <p:nvSpPr>
+          <p:cNvPr id="44" name="TextBox 43">
+            <a:extLst>
+              <a:ext uri="{FF2B5EF4-FFF2-40B4-BE49-F238E27FC236}">
+                <a16:creationId xmlns:a16="http://schemas.microsoft.com/office/drawing/2014/main" id="{246FA5E5-CA1A-3809-4FD3-C6B84DB12B2F}"/>
+              </a:ext>
+            </a:extLst>
+          </p:cNvPr>
+          <p:cNvSpPr txBox="1"/>
+          <p:nvPr/>
+        </p:nvSpPr>
+        <p:spPr>
+          <a:xfrm>
+            <a:off x="7900019" y="5118850"/>
+            <a:ext cx="389850" cy="369332"/>
+          </a:xfrm>
+          <a:prstGeom prst="rect">
+            <a:avLst/>
+          </a:prstGeom>
+          <a:noFill/>
+        </p:spPr>
+        <p:txBody>
+          <a:bodyPr wrap="none" rtlCol="0">
+            <a:spAutoFit/>
+          </a:bodyPr>
+          <a:lstStyle/>
+          <a:p>
+            <a:r>
+              <a:rPr lang="en-US" altLang="ko-KR" dirty="0"/>
+              <a:t>-1</a:t>
+            </a:r>
+            <a:endParaRPr lang="ko-KR" altLang="en-US" dirty="0"/>
+          </a:p>
+        </p:txBody>
+      </p:sp>
+      <p:sp>
+        <p:nvSpPr>
+          <p:cNvPr id="46" name="TextBox 45">
+            <a:extLst>
+              <a:ext uri="{FF2B5EF4-FFF2-40B4-BE49-F238E27FC236}">
+                <a16:creationId xmlns:a16="http://schemas.microsoft.com/office/drawing/2014/main" id="{A2CFF4A4-893E-8D2D-F79D-89F8B5DA8E08}"/>
+              </a:ext>
+            </a:extLst>
+          </p:cNvPr>
+          <p:cNvSpPr txBox="1"/>
+          <p:nvPr/>
+        </p:nvSpPr>
+        <p:spPr>
+          <a:xfrm>
+            <a:off x="6967875" y="5118850"/>
+            <a:ext cx="389850" cy="369332"/>
+          </a:xfrm>
+          <a:prstGeom prst="rect">
+            <a:avLst/>
+          </a:prstGeom>
+          <a:noFill/>
+        </p:spPr>
+        <p:txBody>
+          <a:bodyPr wrap="none" rtlCol="0">
+            <a:spAutoFit/>
+          </a:bodyPr>
+          <a:lstStyle/>
+          <a:p>
+            <a:r>
+              <a:rPr lang="en-US" altLang="ko-KR" dirty="0"/>
+              <a:t>-2</a:t>
+            </a:r>
+            <a:endParaRPr lang="ko-KR" altLang="en-US" dirty="0"/>
+          </a:p>
+        </p:txBody>
+      </p:sp>
+      <p:cxnSp>
+        <p:nvCxnSpPr>
+          <p:cNvPr id="48" name="직선 화살표 연결선 47">
+            <a:extLst>
+              <a:ext uri="{FF2B5EF4-FFF2-40B4-BE49-F238E27FC236}">
+                <a16:creationId xmlns:a16="http://schemas.microsoft.com/office/drawing/2014/main" id="{978EE104-D232-8881-3A1E-29244A09BDF1}"/>
+              </a:ext>
+            </a:extLst>
+          </p:cNvPr>
+          <p:cNvCxnSpPr>
+            <a:cxnSpLocks/>
+          </p:cNvCxnSpPr>
+          <p:nvPr/>
+        </p:nvCxnSpPr>
+        <p:spPr>
+          <a:xfrm>
+            <a:off x="4038600" y="5303516"/>
+            <a:ext cx="457200" cy="0"/>
+          </a:xfrm>
+          <a:prstGeom prst="straightConnector1">
+            <a:avLst/>
+          </a:prstGeom>
+          <a:ln w="38100">
+            <a:headEnd type="triangle"/>
+            <a:tailEnd type="triangle"/>
+          </a:ln>
+        </p:spPr>
+        <p:style>
+          <a:lnRef idx="1">
+            <a:schemeClr val="accent1"/>
+          </a:lnRef>
+          <a:fillRef idx="0">
+            <a:schemeClr val="accent1"/>
+          </a:fillRef>
+          <a:effectRef idx="0">
+            <a:schemeClr val="accent1"/>
+          </a:effectRef>
+          <a:fontRef idx="minor">
+            <a:schemeClr val="tx1"/>
+          </a:fontRef>
+        </p:style>
+      </p:cxnSp>
+      <p:cxnSp>
+        <p:nvCxnSpPr>
+          <p:cNvPr id="50" name="직선 화살표 연결선 49">
+            <a:extLst>
+              <a:ext uri="{FF2B5EF4-FFF2-40B4-BE49-F238E27FC236}">
+                <a16:creationId xmlns:a16="http://schemas.microsoft.com/office/drawing/2014/main" id="{10A93A1D-6B62-3428-70FD-565F869141DB}"/>
+              </a:ext>
+            </a:extLst>
+          </p:cNvPr>
+          <p:cNvCxnSpPr>
+            <a:cxnSpLocks/>
+          </p:cNvCxnSpPr>
+          <p:nvPr/>
+        </p:nvCxnSpPr>
+        <p:spPr>
+          <a:xfrm>
+            <a:off x="2029287" y="5257800"/>
+            <a:ext cx="457200" cy="0"/>
+          </a:xfrm>
+          <a:prstGeom prst="straightConnector1">
+            <a:avLst/>
+          </a:prstGeom>
+          <a:ln w="38100">
+            <a:headEnd type="triangle"/>
+            <a:tailEnd type="triangle"/>
+          </a:ln>
+        </p:spPr>
+        <p:style>
+          <a:lnRef idx="1">
+            <a:schemeClr val="accent1"/>
+          </a:lnRef>
+          <a:fillRef idx="0">
+            <a:schemeClr val="accent1"/>
+          </a:fillRef>
+          <a:effectRef idx="0">
+            <a:schemeClr val="accent1"/>
+          </a:effectRef>
+          <a:fontRef idx="minor">
+            <a:schemeClr val="tx1"/>
+          </a:fontRef>
+        </p:style>
+      </p:cxnSp>
+      <p:sp>
+        <p:nvSpPr>
+          <p:cNvPr id="51" name="TextBox 50">
+            <a:extLst>
+              <a:ext uri="{FF2B5EF4-FFF2-40B4-BE49-F238E27FC236}">
+                <a16:creationId xmlns:a16="http://schemas.microsoft.com/office/drawing/2014/main" id="{0D8B2604-C7EC-E9DE-9F98-6D94B9C425E9}"/>
+              </a:ext>
+            </a:extLst>
+          </p:cNvPr>
+          <p:cNvSpPr txBox="1"/>
+          <p:nvPr/>
+        </p:nvSpPr>
+        <p:spPr>
+          <a:xfrm>
+            <a:off x="2969894" y="3854003"/>
+            <a:ext cx="689612" cy="276999"/>
+          </a:xfrm>
+          <a:prstGeom prst="rect">
+            <a:avLst/>
+          </a:prstGeom>
+          <a:noFill/>
+        </p:spPr>
+        <p:txBody>
+          <a:bodyPr wrap="none" rtlCol="0">
+            <a:spAutoFit/>
+          </a:bodyPr>
+          <a:lstStyle/>
+          <a:p>
+            <a:r>
+              <a:rPr lang="ko-KR" altLang="en-US" sz="1200" dirty="0"/>
+              <a:t>변경 전</a:t>
+            </a:r>
+          </a:p>
+        </p:txBody>
+      </p:sp>
+      <p:sp>
+        <p:nvSpPr>
+          <p:cNvPr id="53" name="TextBox 52">
+            <a:extLst>
+              <a:ext uri="{FF2B5EF4-FFF2-40B4-BE49-F238E27FC236}">
+                <a16:creationId xmlns:a16="http://schemas.microsoft.com/office/drawing/2014/main" id="{9A6E98F4-E600-275E-D9E3-5C8D7F8D5DE4}"/>
+              </a:ext>
+            </a:extLst>
+          </p:cNvPr>
+          <p:cNvSpPr txBox="1"/>
+          <p:nvPr/>
+        </p:nvSpPr>
+        <p:spPr>
+          <a:xfrm>
+            <a:off x="8303894" y="3824224"/>
+            <a:ext cx="689612" cy="276999"/>
+          </a:xfrm>
+          <a:prstGeom prst="rect">
+            <a:avLst/>
+          </a:prstGeom>
+          <a:noFill/>
+        </p:spPr>
+        <p:txBody>
+          <a:bodyPr wrap="none" rtlCol="0">
+            <a:spAutoFit/>
+          </a:bodyPr>
+          <a:lstStyle/>
+          <a:p>
+            <a:r>
+              <a:rPr lang="ko-KR" altLang="en-US" sz="1200" dirty="0"/>
+              <a:t>변경 후</a:t>
+            </a:r>
+          </a:p>
+        </p:txBody>
+      </p:sp>
+    </p:spTree>
+    <p:extLst>
+      <p:ext uri="{BB962C8B-B14F-4D97-AF65-F5344CB8AC3E}">
+        <p14:creationId xmlns:p14="http://schemas.microsoft.com/office/powerpoint/2010/main" val="4234543953"/>
+      </p:ext>
+    </p:extLst>
+  </p:cSld>
+  <p:clrMapOvr>
+    <a:masterClrMapping/>
+  </p:clrMapOvr>
+</p:sld>
+</file>
+
+<file path=ppt/slides/slide7.xml><?xml version="1.0" encoding="utf-8"?>
+<p:sld xmlns:a="http://schemas.openxmlformats.org/drawingml/2006/main" xmlns:r="http://schemas.openxmlformats.org/officeDocument/2006/relationships" xmlns:p="http://schemas.openxmlformats.org/presentationml/2006/main">
+  <p:cSld>
+    <p:spTree>
+      <p:nvGrpSpPr>
+        <p:cNvPr id="1" name="">
+          <a:extLst>
+            <a:ext uri="{FF2B5EF4-FFF2-40B4-BE49-F238E27FC236}">
+              <a16:creationId xmlns:a16="http://schemas.microsoft.com/office/drawing/2014/main" id="{78F57772-FDD2-3570-7157-31053269DF3F}"/>
+            </a:ext>
+          </a:extLst>
+        </p:cNvPr>
+        <p:cNvGrpSpPr/>
+        <p:nvPr/>
+      </p:nvGrpSpPr>
+      <p:grpSpPr>
+        <a:xfrm>
+          <a:off x="0" y="0"/>
+          <a:ext cx="0" cy="0"/>
+          <a:chOff x="0" y="0"/>
+          <a:chExt cx="0" cy="0"/>
+        </a:xfrm>
+      </p:grpSpPr>
+      <p:sp>
+        <p:nvSpPr>
+          <p:cNvPr id="2" name="object 2" descr="$PPTXTitle">
+            <a:extLst>
+              <a:ext uri="{FF2B5EF4-FFF2-40B4-BE49-F238E27FC236}">
+                <a16:creationId xmlns:a16="http://schemas.microsoft.com/office/drawing/2014/main" id="{91594C04-0CA3-9FBF-7266-6F8627D52BFF}"/>
+              </a:ext>
+            </a:extLst>
+          </p:cNvPr>
+          <p:cNvSpPr txBox="1">
+            <a:spLocks noGrp="1"/>
+          </p:cNvSpPr>
+          <p:nvPr>
+            <p:ph type="title"/>
+          </p:nvPr>
+        </p:nvSpPr>
+        <p:spPr>
+          <a:prstGeom prst="rect">
+            <a:avLst/>
+          </a:prstGeom>
+        </p:spPr>
+        <p:txBody>
+          <a:bodyPr vert="horz" wrap="square" lIns="0" tIns="12065" rIns="0" bIns="0" rtlCol="0">
+            <a:spAutoFit/>
+          </a:bodyPr>
+          <a:lstStyle/>
+          <a:p>
+            <a:pPr marL="12700">
+              <a:lnSpc>
+                <a:spcPct val="100000"/>
+              </a:lnSpc>
+              <a:spcBef>
+                <a:spcPts val="95"/>
+              </a:spcBef>
+            </a:pPr>
+            <a:r>
+              <a:rPr lang="ko-KR" altLang="en-US" spc="-25" dirty="0"/>
+              <a:t>작업내용 </a:t>
+            </a:r>
+            <a:r>
+              <a:rPr lang="en-US" altLang="ko-KR" spc="-25" dirty="0"/>
+              <a:t>– </a:t>
+            </a:r>
+            <a:r>
+              <a:rPr lang="ko-KR" altLang="en-US" spc="-25" dirty="0"/>
+              <a:t>주행 후보 평가</a:t>
+            </a:r>
+            <a:endParaRPr spc="-25" dirty="0"/>
+          </a:p>
+        </p:txBody>
+      </p:sp>
+      <p:sp>
+        <p:nvSpPr>
+          <p:cNvPr id="4" name="object 4">
+            <a:extLst>
+              <a:ext uri="{FF2B5EF4-FFF2-40B4-BE49-F238E27FC236}">
+                <a16:creationId xmlns:a16="http://schemas.microsoft.com/office/drawing/2014/main" id="{E88DB417-A4C3-199C-02FB-D500EBC06579}"/>
+              </a:ext>
+            </a:extLst>
+          </p:cNvPr>
+          <p:cNvSpPr/>
+          <p:nvPr/>
+        </p:nvSpPr>
+        <p:spPr>
+          <a:xfrm>
+            <a:off x="838200" y="1311910"/>
+            <a:ext cx="10515600" cy="0"/>
+          </a:xfrm>
+          <a:custGeom>
+            <a:avLst/>
+            <a:gdLst/>
+            <a:ahLst/>
+            <a:cxnLst/>
+            <a:rect l="l" t="t" r="r" b="b"/>
+            <a:pathLst>
+              <a:path w="10515600">
+                <a:moveTo>
+                  <a:pt x="0" y="0"/>
+                </a:moveTo>
+                <a:lnTo>
+                  <a:pt x="10515600" y="0"/>
+                </a:lnTo>
+              </a:path>
+            </a:pathLst>
+          </a:custGeom>
+          <a:ln w="28575">
+            <a:solidFill>
+              <a:srgbClr val="CF3C1C"/>
+            </a:solidFill>
+          </a:ln>
+        </p:spPr>
+        <p:txBody>
+          <a:bodyPr wrap="square" lIns="0" tIns="0" rIns="0" bIns="0" rtlCol="0"/>
+          <a:lstStyle/>
+          <a:p>
+            <a:endParaRPr/>
+          </a:p>
+        </p:txBody>
+      </p:sp>
+      <p:sp>
+        <p:nvSpPr>
+          <p:cNvPr id="7" name="내용 개체 틀 2">
+            <a:extLst>
+              <a:ext uri="{FF2B5EF4-FFF2-40B4-BE49-F238E27FC236}">
+                <a16:creationId xmlns:a16="http://schemas.microsoft.com/office/drawing/2014/main" id="{33483EB1-7DE0-8F90-61E4-E67AB508B624}"/>
+              </a:ext>
+            </a:extLst>
+          </p:cNvPr>
+          <p:cNvSpPr txBox="1">
+            <a:spLocks/>
+          </p:cNvSpPr>
+          <p:nvPr/>
+        </p:nvSpPr>
+        <p:spPr>
+          <a:xfrm>
+            <a:off x="1028700" y="1520351"/>
+            <a:ext cx="10134600" cy="2251322"/>
+          </a:xfrm>
+          <a:prstGeom prst="rect">
+            <a:avLst/>
+          </a:prstGeom>
+        </p:spPr>
+        <p:txBody>
+          <a:bodyPr wrap="square" lIns="0" tIns="0" rIns="0" bIns="0">
+            <a:spAutoFit/>
+          </a:bodyPr>
+          <a:lstStyle>
+            <a:lvl1pPr marL="0">
+              <a:defRPr b="0" i="0">
+                <a:solidFill>
+                  <a:schemeClr val="tx1"/>
+                </a:solidFill>
+                <a:latin typeface="+mn-lt"/>
+                <a:ea typeface="+mn-ea"/>
+                <a:cs typeface="+mn-cs"/>
+              </a:defRPr>
+            </a:lvl1pPr>
+            <a:lvl2pPr marL="457200">
+              <a:defRPr>
+                <a:latin typeface="+mn-lt"/>
+                <a:ea typeface="+mn-ea"/>
+                <a:cs typeface="+mn-cs"/>
+              </a:defRPr>
+            </a:lvl2pPr>
+            <a:lvl3pPr marL="914400">
+              <a:defRPr>
+                <a:latin typeface="+mn-lt"/>
+                <a:ea typeface="+mn-ea"/>
+                <a:cs typeface="+mn-cs"/>
+              </a:defRPr>
+            </a:lvl3pPr>
+            <a:lvl4pPr marL="1371600">
+              <a:defRPr>
+                <a:latin typeface="+mn-lt"/>
+                <a:ea typeface="+mn-ea"/>
+                <a:cs typeface="+mn-cs"/>
+              </a:defRPr>
+            </a:lvl4pPr>
+            <a:lvl5pPr marL="1828800">
+              <a:defRPr>
+                <a:latin typeface="+mn-lt"/>
+                <a:ea typeface="+mn-ea"/>
+                <a:cs typeface="+mn-cs"/>
+              </a:defRPr>
+            </a:lvl5pPr>
+            <a:lvl6pPr marL="2286000">
+              <a:defRPr>
+                <a:latin typeface="+mn-lt"/>
+                <a:ea typeface="+mn-ea"/>
+                <a:cs typeface="+mn-cs"/>
+              </a:defRPr>
+            </a:lvl6pPr>
+            <a:lvl7pPr marL="2743200">
+              <a:defRPr>
+                <a:latin typeface="+mn-lt"/>
+                <a:ea typeface="+mn-ea"/>
+                <a:cs typeface="+mn-cs"/>
+              </a:defRPr>
+            </a:lvl7pPr>
+            <a:lvl8pPr marL="3200400">
+              <a:defRPr>
+                <a:latin typeface="+mn-lt"/>
+                <a:ea typeface="+mn-ea"/>
+                <a:cs typeface="+mn-cs"/>
+              </a:defRPr>
+            </a:lvl8pPr>
+            <a:lvl9pPr marL="3657600">
+              <a:defRPr>
+                <a:latin typeface="+mn-lt"/>
+                <a:ea typeface="+mn-ea"/>
+                <a:cs typeface="+mn-cs"/>
+              </a:defRPr>
+            </a:lvl9pPr>
+          </a:lstStyle>
+          <a:p>
+            <a:pPr marL="285750" indent="-285750">
+              <a:lnSpc>
+                <a:spcPct val="200000"/>
+              </a:lnSpc>
+              <a:buFont typeface="Arial" panose="020B0604020202020204" pitchFamily="34" charset="0"/>
+              <a:buChar char="•"/>
+            </a:pPr>
+            <a:r>
+              <a:rPr lang="ko-KR" altLang="en-US" sz="1600" dirty="0">
+                <a:latin typeface="+mn-ea"/>
+                <a:cs typeface="Malgun Gothic"/>
+              </a:rPr>
+              <a:t>기존 도로 데이터 구조</a:t>
+            </a:r>
+            <a:endParaRPr lang="en-US" altLang="ko-KR" sz="1200" dirty="0">
+              <a:latin typeface="Malgun Gothic"/>
+              <a:cs typeface="Malgun Gothic"/>
+            </a:endParaRPr>
+          </a:p>
+          <a:p>
+            <a:pPr marL="742950" lvl="1" indent="-285750">
+              <a:lnSpc>
+                <a:spcPct val="150000"/>
+              </a:lnSpc>
+              <a:buFont typeface="Arial" panose="020B0604020202020204" pitchFamily="34" charset="0"/>
+              <a:buChar char="•"/>
+            </a:pPr>
+            <a:r>
+              <a:rPr lang="en-US" altLang="ko-KR" sz="1400" dirty="0"/>
+              <a:t>Road : </a:t>
+            </a:r>
+            <a:r>
+              <a:rPr lang="ko-KR" altLang="en-US" sz="1400" dirty="0"/>
+              <a:t>메타 데이터 컨테이너 </a:t>
+            </a:r>
+            <a:r>
+              <a:rPr lang="en-US" altLang="ko-KR" sz="1400" dirty="0"/>
+              <a:t>(</a:t>
+            </a:r>
+            <a:r>
+              <a:rPr lang="ko-KR" altLang="en-US" sz="1400" dirty="0"/>
+              <a:t>제한속도 등</a:t>
+            </a:r>
+            <a:r>
+              <a:rPr lang="en-US" altLang="ko-KR" sz="1400" dirty="0"/>
+              <a:t>)</a:t>
+            </a:r>
+          </a:p>
+          <a:p>
+            <a:pPr marL="742950" lvl="1" indent="-285750">
+              <a:lnSpc>
+                <a:spcPct val="150000"/>
+              </a:lnSpc>
+              <a:buFont typeface="Arial" panose="020B0604020202020204" pitchFamily="34" charset="0"/>
+              <a:buChar char="•"/>
+            </a:pPr>
+            <a:r>
+              <a:rPr lang="en-US" altLang="ko-KR" sz="1400" dirty="0"/>
+              <a:t>Lane : </a:t>
+            </a:r>
+            <a:r>
+              <a:rPr lang="ko-KR" altLang="en-US" sz="1400" dirty="0"/>
+              <a:t>각각 독립된 레인</a:t>
+            </a:r>
+            <a:r>
+              <a:rPr lang="en-US" altLang="ko-KR" sz="1400" dirty="0"/>
+              <a:t>, </a:t>
+            </a:r>
+            <a:r>
+              <a:rPr lang="ko-KR" altLang="en-US" sz="1400" dirty="0"/>
+              <a:t>같은 방향 옆차선만 </a:t>
+            </a:r>
+            <a:r>
+              <a:rPr lang="en-US" altLang="ko-KR" sz="1400" dirty="0"/>
+              <a:t>left,</a:t>
+            </a:r>
+            <a:r>
+              <a:rPr lang="ko-KR" altLang="en-US" sz="1400" dirty="0"/>
+              <a:t> </a:t>
+            </a:r>
+            <a:r>
+              <a:rPr lang="en-US" altLang="ko-KR" sz="1400" dirty="0"/>
+              <a:t>right</a:t>
+            </a:r>
+            <a:r>
+              <a:rPr lang="ko-KR" altLang="en-US" sz="1400" dirty="0"/>
+              <a:t>로 연결되어 있음</a:t>
+            </a:r>
+            <a:endParaRPr lang="en-US" altLang="ko-KR" sz="1400" dirty="0"/>
+          </a:p>
+          <a:p>
+            <a:pPr marL="742950" lvl="1" indent="-285750">
+              <a:lnSpc>
+                <a:spcPct val="150000"/>
+              </a:lnSpc>
+              <a:buFont typeface="Arial" panose="020B0604020202020204" pitchFamily="34" charset="0"/>
+              <a:buChar char="•"/>
+            </a:pPr>
+            <a:endParaRPr lang="en-US" altLang="ko-KR" sz="1200" dirty="0"/>
+          </a:p>
+          <a:p>
+            <a:pPr marL="742950" lvl="1" indent="-285750">
+              <a:lnSpc>
+                <a:spcPct val="150000"/>
+              </a:lnSpc>
+              <a:buFont typeface="Arial" panose="020B0604020202020204" pitchFamily="34" charset="0"/>
+              <a:buChar char="•"/>
+            </a:pPr>
+            <a:endParaRPr lang="en-US" altLang="ko-KR" sz="1200" dirty="0">
+              <a:latin typeface="Malgun Gothic"/>
+              <a:cs typeface="Malgun Gothic"/>
+            </a:endParaRPr>
+          </a:p>
+          <a:p>
+            <a:pPr marL="742950" lvl="1" indent="-285750">
+              <a:lnSpc>
+                <a:spcPct val="150000"/>
+              </a:lnSpc>
+              <a:buFont typeface="Arial" panose="020B0604020202020204" pitchFamily="34" charset="0"/>
+              <a:buChar char="•"/>
+            </a:pPr>
+            <a:endParaRPr lang="en-US" altLang="ko-KR" sz="1200" dirty="0">
+              <a:latin typeface="Malgun Gothic"/>
+              <a:cs typeface="Malgun Gothic"/>
+            </a:endParaRPr>
+          </a:p>
+          <a:p>
+            <a:pPr marL="742950" lvl="1" indent="-285750">
+              <a:lnSpc>
+                <a:spcPct val="150000"/>
+              </a:lnSpc>
+              <a:buFont typeface="Arial" panose="020B0604020202020204" pitchFamily="34" charset="0"/>
+              <a:buChar char="•"/>
+            </a:pPr>
+            <a:endParaRPr lang="en-US" altLang="ko-KR" sz="1400" dirty="0">
+              <a:latin typeface="+mn-ea"/>
+            </a:endParaRPr>
+          </a:p>
+        </p:txBody>
+      </p:sp>
+    </p:spTree>
+    <p:extLst>
+      <p:ext uri="{BB962C8B-B14F-4D97-AF65-F5344CB8AC3E}">
+        <p14:creationId xmlns:p14="http://schemas.microsoft.com/office/powerpoint/2010/main" val="4034478046"/>
+      </p:ext>
+    </p:extLst>
+  </p:cSld>
+  <p:clrMapOvr>
+    <a:masterClrMapping/>
+  </p:clrMapOvr>
+</p:sld>
+</file>
+
+<file path=ppt/slides/slide8.xml><?xml version="1.0" encoding="utf-8"?>
+<p:sld xmlns:a="http://schemas.openxmlformats.org/drawingml/2006/main" xmlns:r="http://schemas.openxmlformats.org/officeDocument/2006/relationships" xmlns:p="http://schemas.openxmlformats.org/presentationml/2006/main">
+  <p:cSld>
+    <p:spTree>
+      <p:nvGrpSpPr>
+        <p:cNvPr id="1" name="">
+          <a:extLst>
+            <a:ext uri="{FF2B5EF4-FFF2-40B4-BE49-F238E27FC236}">
+              <a16:creationId xmlns:a16="http://schemas.microsoft.com/office/drawing/2014/main" id="{34CE33E3-BA7F-D9C2-2FCC-1BA5DBF31286}"/>
+            </a:ext>
+          </a:extLst>
+        </p:cNvPr>
+        <p:cNvGrpSpPr/>
+        <p:nvPr/>
+      </p:nvGrpSpPr>
+      <p:grpSpPr>
+        <a:xfrm>
+          <a:off x="0" y="0"/>
+          <a:ext cx="0" cy="0"/>
+          <a:chOff x="0" y="0"/>
+          <a:chExt cx="0" cy="0"/>
+        </a:xfrm>
+      </p:grpSpPr>
+      <p:sp>
+        <p:nvSpPr>
+          <p:cNvPr id="2" name="object 2" descr="$PPTXTitle">
+            <a:extLst>
+              <a:ext uri="{FF2B5EF4-FFF2-40B4-BE49-F238E27FC236}">
+                <a16:creationId xmlns:a16="http://schemas.microsoft.com/office/drawing/2014/main" id="{2ADBBE49-2AB5-68D6-A5EA-FC46494F410F}"/>
+              </a:ext>
+            </a:extLst>
+          </p:cNvPr>
+          <p:cNvSpPr txBox="1">
+            <a:spLocks noGrp="1"/>
+          </p:cNvSpPr>
+          <p:nvPr>
+            <p:ph type="title"/>
+          </p:nvPr>
+        </p:nvSpPr>
+        <p:spPr>
+          <a:prstGeom prst="rect">
+            <a:avLst/>
+          </a:prstGeom>
+        </p:spPr>
+        <p:txBody>
+          <a:bodyPr vert="horz" wrap="square" lIns="0" tIns="12065" rIns="0" bIns="0" rtlCol="0">
+            <a:spAutoFit/>
+          </a:bodyPr>
+          <a:lstStyle/>
+          <a:p>
+            <a:pPr marL="12700">
+              <a:lnSpc>
+                <a:spcPct val="100000"/>
+              </a:lnSpc>
+              <a:spcBef>
+                <a:spcPts val="95"/>
+              </a:spcBef>
+            </a:pPr>
+            <a:r>
+              <a:rPr lang="ko-KR" altLang="en-US" spc="-25" dirty="0"/>
+              <a:t>추가 작업 </a:t>
+            </a:r>
+            <a:r>
+              <a:rPr lang="en-US" altLang="ko-KR" spc="-25" dirty="0"/>
+              <a:t>– </a:t>
+            </a:r>
+            <a:r>
+              <a:rPr lang="ko-KR" altLang="en-US" spc="-25" dirty="0"/>
+              <a:t>최적화</a:t>
+            </a:r>
+            <a:endParaRPr spc="-25" dirty="0"/>
+          </a:p>
+        </p:txBody>
+      </p:sp>
+      <p:sp>
+        <p:nvSpPr>
+          <p:cNvPr id="4" name="object 4">
+            <a:extLst>
+              <a:ext uri="{FF2B5EF4-FFF2-40B4-BE49-F238E27FC236}">
+                <a16:creationId xmlns:a16="http://schemas.microsoft.com/office/drawing/2014/main" id="{2A594A91-0576-A721-CB47-3E8F452C3933}"/>
+              </a:ext>
+            </a:extLst>
+          </p:cNvPr>
+          <p:cNvSpPr/>
+          <p:nvPr/>
+        </p:nvSpPr>
+        <p:spPr>
+          <a:xfrm>
+            <a:off x="838200" y="1311910"/>
+            <a:ext cx="10515600" cy="0"/>
+          </a:xfrm>
+          <a:custGeom>
+            <a:avLst/>
+            <a:gdLst/>
+            <a:ahLst/>
+            <a:cxnLst/>
+            <a:rect l="l" t="t" r="r" b="b"/>
+            <a:pathLst>
+              <a:path w="10515600">
+                <a:moveTo>
+                  <a:pt x="0" y="0"/>
+                </a:moveTo>
+                <a:lnTo>
+                  <a:pt x="10515600" y="0"/>
+                </a:lnTo>
+              </a:path>
+            </a:pathLst>
+          </a:custGeom>
+          <a:ln w="28575">
+            <a:solidFill>
+              <a:srgbClr val="CF3C1C"/>
+            </a:solidFill>
+          </a:ln>
+        </p:spPr>
+        <p:txBody>
+          <a:bodyPr wrap="square" lIns="0" tIns="0" rIns="0" bIns="0" rtlCol="0"/>
+          <a:lstStyle/>
+          <a:p>
+            <a:endParaRPr/>
+          </a:p>
+        </p:txBody>
+      </p:sp>
+      <p:sp>
+        <p:nvSpPr>
+          <p:cNvPr id="7" name="내용 개체 틀 2">
+            <a:extLst>
+              <a:ext uri="{FF2B5EF4-FFF2-40B4-BE49-F238E27FC236}">
+                <a16:creationId xmlns:a16="http://schemas.microsoft.com/office/drawing/2014/main" id="{45AC8FD9-D4C7-5C2C-3757-11499919B0B2}"/>
               </a:ext>
             </a:extLst>
           </p:cNvPr>
@@ -3725,20 +8216,14 @@
           <p:cNvPr id="5" name="표 4">
             <a:extLst>
               <a:ext uri="{FF2B5EF4-FFF2-40B4-BE49-F238E27FC236}">
-                <a16:creationId xmlns:a16="http://schemas.microsoft.com/office/drawing/2014/main" id="{B62D2753-55FE-E3E7-2221-F9F83388D22F}"/>
+                <a16:creationId xmlns:a16="http://schemas.microsoft.com/office/drawing/2014/main" id="{64D064B4-BA8A-9EFC-3261-103DFAF8248E}"/>
               </a:ext>
             </a:extLst>
           </p:cNvPr>
           <p:cNvGraphicFramePr>
             <a:graphicFrameLocks noGrp="1"/>
           </p:cNvGraphicFramePr>
-          <p:nvPr>
-            <p:extLst>
-              <p:ext uri="{D42A27DB-BD31-4B8C-83A1-F6EECF244321}">
-                <p14:modId xmlns:p14="http://schemas.microsoft.com/office/powerpoint/2010/main" val="2567112423"/>
-              </p:ext>
-            </p:extLst>
-          </p:nvPr>
+          <p:nvPr/>
         </p:nvGraphicFramePr>
         <p:xfrm>
           <a:off x="2133600" y="3276600"/>
@@ -5839,20 +10324,14 @@
           <p:cNvPr id="6" name="표 5">
             <a:extLst>
               <a:ext uri="{FF2B5EF4-FFF2-40B4-BE49-F238E27FC236}">
-                <a16:creationId xmlns:a16="http://schemas.microsoft.com/office/drawing/2014/main" id="{CAADC634-E280-37F4-657F-57E15431856D}"/>
+                <a16:creationId xmlns:a16="http://schemas.microsoft.com/office/drawing/2014/main" id="{D852A2E1-94E5-50BF-643A-8D0E08EE0BE7}"/>
               </a:ext>
             </a:extLst>
           </p:cNvPr>
           <p:cNvGraphicFramePr>
             <a:graphicFrameLocks noGrp="1"/>
           </p:cNvGraphicFramePr>
-          <p:nvPr>
-            <p:extLst>
-              <p:ext uri="{D42A27DB-BD31-4B8C-83A1-F6EECF244321}">
-                <p14:modId xmlns:p14="http://schemas.microsoft.com/office/powerpoint/2010/main" val="2480343544"/>
-              </p:ext>
-            </p:extLst>
-          </p:nvPr>
+          <p:nvPr/>
         </p:nvGraphicFramePr>
         <p:xfrm>
           <a:off x="6103679" y="3429000"/>
@@ -7684,7 +12163,7 @@
     </p:spTree>
     <p:extLst>
       <p:ext uri="{BB962C8B-B14F-4D97-AF65-F5344CB8AC3E}">
-        <p14:creationId xmlns:p14="http://schemas.microsoft.com/office/powerpoint/2010/main" val="3488653225"/>
+        <p14:creationId xmlns:p14="http://schemas.microsoft.com/office/powerpoint/2010/main" val="2778617867"/>
       </p:ext>
     </p:extLst>
   </p:cSld>
@@ -7694,7 +12173,7 @@
 </p:sld>
 </file>
 
-<file path=ppt/slides/slide5.xml><?xml version="1.0" encoding="utf-8"?>
+<file path=ppt/slides/slide9.xml><?xml version="1.0" encoding="utf-8"?>
 <p:sld xmlns:a="http://schemas.openxmlformats.org/drawingml/2006/main" xmlns:r="http://schemas.openxmlformats.org/officeDocument/2006/relationships" xmlns:p="http://schemas.openxmlformats.org/presentationml/2006/main" showMasterSp="0">
   <p:cSld>
     <p:spTree>
@@ -7974,7 +12453,7 @@
                         </a:rPr>
                         <a:t>내용</a:t>
                       </a:r>
-                      <a:endParaRPr sz="1200">
+                      <a:endParaRPr sz="1200" dirty="0">
                         <a:latin typeface="Malgun Gothic"/>
                         <a:cs typeface="Malgun Gothic"/>
                       </a:endParaRPr>
